--- a/deck/Troy_K5_ELA_Executive_Summary.pptx
+++ b/deck/Troy_K5_ELA_Executive_Summary.pptx
@@ -3578,7 +3578,7 @@
         <p:spPr>
           <a:xfrm>
             <a:off x="8183879" y="914400"/>
-            <a:ext cx="3749039" cy="2606040"/>
+            <a:ext cx="3749039" cy="2697480"/>
           </a:xfrm>
           <a:prstGeom prst="rect">
             <a:avLst/>
@@ -3621,29 +3621,29 @@
         </p:nvSpPr>
         <p:spPr>
           <a:xfrm>
-            <a:off x="8321040" y="1005840"/>
-            <a:ext cx="3520440" cy="365760"/>
-          </a:xfrm>
-          <a:prstGeom prst="rect">
-            <a:avLst/>
-          </a:prstGeom>
-          <a:noFill/>
-        </p:spPr>
-        <p:txBody>
-          <a:bodyPr wrap="square" lIns="0" rIns="0" tIns="0" bIns="0">
-            <a:spAutoFit/>
-          </a:bodyPr>
-          <a:lstStyle/>
-          <a:p>
-            <a:pPr algn="l"/>
-            <a:r>
-              <a:rPr sz="1150" b="1" i="0">
+            <a:off x="8321040" y="987552"/>
+            <a:ext cx="3520440" cy="292608"/>
+          </a:xfrm>
+          <a:prstGeom prst="rect">
+            <a:avLst/>
+          </a:prstGeom>
+          <a:noFill/>
+        </p:spPr>
+        <p:txBody>
+          <a:bodyPr wrap="square" lIns="0" rIns="0" tIns="0" bIns="0">
+            <a:spAutoFit/>
+          </a:bodyPr>
+          <a:lstStyle/>
+          <a:p>
+            <a:pPr algn="l"/>
+            <a:r>
+              <a:rPr sz="1100" b="1" i="0">
                 <a:solidFill>
                   <a:srgbClr val="B02121"/>
                 </a:solidFill>
                 <a:latin typeface="Calibri"/>
               </a:rPr>
-              <a:t>Pre→Post-COVID Δ on M-STEP %Adv+Prof</a:t>
+              <a:t>Pre→Post-COVID Δ  on M-STEP %Adv+Prof</a:t>
             </a:r>
           </a:p>
         </p:txBody>
@@ -3656,127 +3656,647 @@
         </p:nvSpPr>
         <p:spPr>
           <a:xfrm>
-            <a:off x="8321040" y="1371600"/>
-            <a:ext cx="3520440" cy="2103120"/>
-          </a:xfrm>
-          <a:prstGeom prst="rect">
-            <a:avLst/>
-          </a:prstGeom>
-          <a:noFill/>
-        </p:spPr>
-        <p:txBody>
-          <a:bodyPr wrap="square" lIns="0" rIns="0" tIns="0" bIns="0">
-            <a:spAutoFit/>
-          </a:bodyPr>
-          <a:lstStyle/>
-          <a:p>
-            <a:pPr algn="l"/>
-            <a:r>
-              <a:rPr sz="1000" b="0" i="0">
-                <a:solidFill>
-                  <a:srgbClr val="333333"/>
+            <a:off x="8366760" y="1371600"/>
+            <a:ext cx="868680" cy="256032"/>
+          </a:xfrm>
+          <a:prstGeom prst="rect">
+            <a:avLst/>
+          </a:prstGeom>
+          <a:noFill/>
+        </p:spPr>
+        <p:txBody>
+          <a:bodyPr wrap="square" lIns="0" rIns="0" tIns="0" bIns="0">
+            <a:spAutoFit/>
+          </a:bodyPr>
+          <a:lstStyle/>
+          <a:p>
+            <a:pPr algn="l"/>
+            <a:r>
+              <a:rPr sz="1000" b="1" i="0">
+                <a:solidFill>
+                  <a:srgbClr val="707070"/>
+                </a:solidFill>
+                <a:latin typeface="Calibri"/>
+              </a:rPr>
+              <a:t>Grade</a:t>
+            </a:r>
+          </a:p>
+        </p:txBody>
+      </p:sp>
+      <p:sp>
+        <p:nvSpPr>
+          <p:cNvPr id="9" name="TextBox 8"/>
+          <p:cNvSpPr txBox="1"/>
+          <p:nvPr/>
+        </p:nvSpPr>
+        <p:spPr>
+          <a:xfrm>
+            <a:off x="9326880" y="1371600"/>
+            <a:ext cx="868680" cy="256032"/>
+          </a:xfrm>
+          <a:prstGeom prst="rect">
+            <a:avLst/>
+          </a:prstGeom>
+          <a:noFill/>
+        </p:spPr>
+        <p:txBody>
+          <a:bodyPr wrap="square" lIns="0" rIns="0" tIns="0" bIns="0">
+            <a:spAutoFit/>
+          </a:bodyPr>
+          <a:lstStyle/>
+          <a:p>
+            <a:pPr algn="r"/>
+            <a:r>
+              <a:rPr sz="1000" b="1" i="0">
+                <a:solidFill>
+                  <a:srgbClr val="B02121"/>
+                </a:solidFill>
+                <a:latin typeface="Calibri"/>
+              </a:rPr>
+              <a:t>SWD</a:t>
+            </a:r>
+          </a:p>
+        </p:txBody>
+      </p:sp>
+      <p:sp>
+        <p:nvSpPr>
+          <p:cNvPr id="10" name="TextBox 9"/>
+          <p:cNvSpPr txBox="1"/>
+          <p:nvPr/>
+        </p:nvSpPr>
+        <p:spPr>
+          <a:xfrm>
+            <a:off x="10241280" y="1371600"/>
+            <a:ext cx="868680" cy="256032"/>
+          </a:xfrm>
+          <a:prstGeom prst="rect">
+            <a:avLst/>
+          </a:prstGeom>
+          <a:noFill/>
+        </p:spPr>
+        <p:txBody>
+          <a:bodyPr wrap="square" lIns="0" rIns="0" tIns="0" bIns="0">
+            <a:spAutoFit/>
+          </a:bodyPr>
+          <a:lstStyle/>
+          <a:p>
+            <a:pPr algn="r"/>
+            <a:r>
+              <a:rPr sz="1000" b="1" i="0">
+                <a:solidFill>
+                  <a:srgbClr val="707070"/>
+                </a:solidFill>
+                <a:latin typeface="Calibri"/>
+              </a:rPr>
+              <a:t>non-SWD</a:t>
+            </a:r>
+          </a:p>
+        </p:txBody>
+      </p:sp>
+      <p:sp>
+        <p:nvSpPr>
+          <p:cNvPr id="11" name="TextBox 10"/>
+          <p:cNvSpPr txBox="1"/>
+          <p:nvPr/>
+        </p:nvSpPr>
+        <p:spPr>
+          <a:xfrm>
+            <a:off x="11155680" y="1371600"/>
+            <a:ext cx="868680" cy="256032"/>
+          </a:xfrm>
+          <a:prstGeom prst="rect">
+            <a:avLst/>
+          </a:prstGeom>
+          <a:noFill/>
+        </p:spPr>
+        <p:txBody>
+          <a:bodyPr wrap="square" lIns="0" rIns="0" tIns="0" bIns="0">
+            <a:spAutoFit/>
+          </a:bodyPr>
+          <a:lstStyle/>
+          <a:p>
+            <a:pPr algn="r"/>
+            <a:r>
+              <a:rPr sz="1000" b="1" i="0">
+                <a:solidFill>
+                  <a:srgbClr val="707070"/>
+                </a:solidFill>
+                <a:latin typeface="Calibri"/>
+              </a:rPr>
+              <a:t>State</a:t>
+            </a:r>
+          </a:p>
+        </p:txBody>
+      </p:sp>
+      <p:sp>
+        <p:nvSpPr>
+          <p:cNvPr id="12" name="Rectangle 11"/>
+          <p:cNvSpPr/>
+          <p:nvPr/>
+        </p:nvSpPr>
+        <p:spPr>
+          <a:xfrm>
+            <a:off x="8366760" y="1664208"/>
+            <a:ext cx="3520440" cy="18288"/>
+          </a:xfrm>
+          <a:prstGeom prst="rect">
+            <a:avLst/>
+          </a:prstGeom>
+          <a:solidFill>
+            <a:srgbClr val="707070"/>
+          </a:solidFill>
+          <a:ln>
+            <a:noFill/>
+          </a:ln>
+          <a:effectLst/>
+        </p:spPr>
+        <p:style>
+          <a:lnRef idx="1">
+            <a:schemeClr val="accent1"/>
+          </a:lnRef>
+          <a:fillRef idx="3">
+            <a:schemeClr val="accent1"/>
+          </a:fillRef>
+          <a:effectRef idx="2">
+            <a:schemeClr val="accent1"/>
+          </a:effectRef>
+          <a:fontRef idx="minor">
+            <a:schemeClr val="lt1"/>
+          </a:fontRef>
+        </p:style>
+        <p:txBody>
+          <a:bodyPr rtlCol="0" anchor="ctr"/>
+          <a:lstStyle/>
+          <a:p>
+            <a:pPr algn="ctr"/>
+          </a:p>
+        </p:txBody>
+      </p:sp>
+      <p:sp>
+        <p:nvSpPr>
+          <p:cNvPr id="13" name="TextBox 12"/>
+          <p:cNvSpPr txBox="1"/>
+          <p:nvPr/>
+        </p:nvSpPr>
+        <p:spPr>
+          <a:xfrm>
+            <a:off x="8366760" y="1783080"/>
+            <a:ext cx="868680" cy="274320"/>
+          </a:xfrm>
+          <a:prstGeom prst="rect">
+            <a:avLst/>
+          </a:prstGeom>
+          <a:noFill/>
+        </p:spPr>
+        <p:txBody>
+          <a:bodyPr wrap="square" lIns="0" rIns="0" tIns="0" bIns="0">
+            <a:spAutoFit/>
+          </a:bodyPr>
+          <a:lstStyle/>
+          <a:p>
+            <a:pPr algn="l"/>
+            <a:r>
+              <a:rPr sz="1100" b="1" i="0">
+                <a:solidFill>
+                  <a:srgbClr val="B02121"/>
+                </a:solidFill>
+                <a:latin typeface="Calibri"/>
+              </a:rPr>
+              <a:t>Grade 3</a:t>
+            </a:r>
+          </a:p>
+        </p:txBody>
+      </p:sp>
+      <p:sp>
+        <p:nvSpPr>
+          <p:cNvPr id="14" name="TextBox 13"/>
+          <p:cNvSpPr txBox="1"/>
+          <p:nvPr/>
+        </p:nvSpPr>
+        <p:spPr>
+          <a:xfrm>
+            <a:off x="9326880" y="1783080"/>
+            <a:ext cx="868680" cy="274320"/>
+          </a:xfrm>
+          <a:prstGeom prst="rect">
+            <a:avLst/>
+          </a:prstGeom>
+          <a:noFill/>
+        </p:spPr>
+        <p:txBody>
+          <a:bodyPr wrap="square" lIns="0" rIns="0" tIns="0" bIns="0">
+            <a:spAutoFit/>
+          </a:bodyPr>
+          <a:lstStyle/>
+          <a:p>
+            <a:pPr algn="r"/>
+            <a:r>
+              <a:rPr sz="1100" b="1" i="0">
+                <a:solidFill>
+                  <a:srgbClr val="B02121"/>
                 </a:solidFill>
                 <a:latin typeface="Consolas"/>
               </a:rPr>
-              <a:t>                SWD     non-SWD   State</a:t>
-            </a:r>
-          </a:p>
-          <a:p>
-            <a:pPr algn="l"/>
-            <a:r>
-              <a:rPr sz="1000" b="0" i="0">
+              <a:t>−11.6 pp</a:t>
+            </a:r>
+          </a:p>
+        </p:txBody>
+      </p:sp>
+      <p:sp>
+        <p:nvSpPr>
+          <p:cNvPr id="15" name="TextBox 14"/>
+          <p:cNvSpPr txBox="1"/>
+          <p:nvPr/>
+        </p:nvSpPr>
+        <p:spPr>
+          <a:xfrm>
+            <a:off x="10241280" y="1783080"/>
+            <a:ext cx="868680" cy="274320"/>
+          </a:xfrm>
+          <a:prstGeom prst="rect">
+            <a:avLst/>
+          </a:prstGeom>
+          <a:noFill/>
+        </p:spPr>
+        <p:txBody>
+          <a:bodyPr wrap="square" lIns="0" rIns="0" tIns="0" bIns="0">
+            <a:spAutoFit/>
+          </a:bodyPr>
+          <a:lstStyle/>
+          <a:p>
+            <a:pPr algn="r"/>
+            <a:r>
+              <a:rPr sz="1100" b="0" i="0">
                 <a:solidFill>
                   <a:srgbClr val="333333"/>
                 </a:solidFill>
                 <a:latin typeface="Consolas"/>
               </a:rPr>
-              <a:t>─────────────────────────────────────────</a:t>
-            </a:r>
-          </a:p>
-          <a:p>
-            <a:pPr algn="l"/>
-            <a:r>
-              <a:rPr sz="1000" b="0" i="0">
+              <a:t>−6.7 pp</a:t>
+            </a:r>
+          </a:p>
+        </p:txBody>
+      </p:sp>
+      <p:sp>
+        <p:nvSpPr>
+          <p:cNvPr id="16" name="TextBox 15"/>
+          <p:cNvSpPr txBox="1"/>
+          <p:nvPr/>
+        </p:nvSpPr>
+        <p:spPr>
+          <a:xfrm>
+            <a:off x="11155680" y="1783080"/>
+            <a:ext cx="868680" cy="274320"/>
+          </a:xfrm>
+          <a:prstGeom prst="rect">
+            <a:avLst/>
+          </a:prstGeom>
+          <a:noFill/>
+        </p:spPr>
+        <p:txBody>
+          <a:bodyPr wrap="square" lIns="0" rIns="0" tIns="0" bIns="0">
+            <a:spAutoFit/>
+          </a:bodyPr>
+          <a:lstStyle/>
+          <a:p>
+            <a:pPr algn="r"/>
+            <a:r>
+              <a:rPr sz="1100" b="0" i="0">
                 <a:solidFill>
                   <a:srgbClr val="333333"/>
                 </a:solidFill>
                 <a:latin typeface="Consolas"/>
               </a:rPr>
-              <a:t>Grade 3      −11.6pp   −6.7pp   −5.0pp ◄</a:t>
-            </a:r>
-          </a:p>
-          <a:p>
-            <a:pPr algn="l"/>
-            <a:r>
-              <a:rPr sz="1000" b="0" i="0">
+              <a:t>−5.0 pp</a:t>
+            </a:r>
+          </a:p>
+        </p:txBody>
+      </p:sp>
+      <p:sp>
+        <p:nvSpPr>
+          <p:cNvPr id="17" name="TextBox 16"/>
+          <p:cNvSpPr txBox="1"/>
+          <p:nvPr/>
+        </p:nvSpPr>
+        <p:spPr>
+          <a:xfrm>
+            <a:off x="8366760" y="2112264"/>
+            <a:ext cx="868680" cy="274320"/>
+          </a:xfrm>
+          <a:prstGeom prst="rect">
+            <a:avLst/>
+          </a:prstGeom>
+          <a:noFill/>
+        </p:spPr>
+        <p:txBody>
+          <a:bodyPr wrap="square" lIns="0" rIns="0" tIns="0" bIns="0">
+            <a:spAutoFit/>
+          </a:bodyPr>
+          <a:lstStyle/>
+          <a:p>
+            <a:pPr algn="l"/>
+            <a:r>
+              <a:rPr sz="1100" b="0" i="0">
+                <a:solidFill>
+                  <a:srgbClr val="333333"/>
+                </a:solidFill>
+                <a:latin typeface="Calibri"/>
+              </a:rPr>
+              <a:t>Grade 4</a:t>
+            </a:r>
+          </a:p>
+        </p:txBody>
+      </p:sp>
+      <p:sp>
+        <p:nvSpPr>
+          <p:cNvPr id="18" name="TextBox 17"/>
+          <p:cNvSpPr txBox="1"/>
+          <p:nvPr/>
+        </p:nvSpPr>
+        <p:spPr>
+          <a:xfrm>
+            <a:off x="9326880" y="2112264"/>
+            <a:ext cx="868680" cy="274320"/>
+          </a:xfrm>
+          <a:prstGeom prst="rect">
+            <a:avLst/>
+          </a:prstGeom>
+          <a:noFill/>
+        </p:spPr>
+        <p:txBody>
+          <a:bodyPr wrap="square" lIns="0" rIns="0" tIns="0" bIns="0">
+            <a:spAutoFit/>
+          </a:bodyPr>
+          <a:lstStyle/>
+          <a:p>
+            <a:pPr algn="r"/>
+            <a:r>
+              <a:rPr sz="1100" b="0" i="0">
                 <a:solidFill>
                   <a:srgbClr val="333333"/>
                 </a:solidFill>
                 <a:latin typeface="Consolas"/>
               </a:rPr>
-              <a:t>Grade 4       −1.6pp   −6.7pp   −2.1pp</a:t>
-            </a:r>
-          </a:p>
-          <a:p>
-            <a:pPr algn="l"/>
-            <a:r>
-              <a:rPr sz="1000" b="0" i="0">
+              <a:t>−1.6 pp</a:t>
+            </a:r>
+          </a:p>
+        </p:txBody>
+      </p:sp>
+      <p:sp>
+        <p:nvSpPr>
+          <p:cNvPr id="19" name="TextBox 18"/>
+          <p:cNvSpPr txBox="1"/>
+          <p:nvPr/>
+        </p:nvSpPr>
+        <p:spPr>
+          <a:xfrm>
+            <a:off x="10241280" y="2112264"/>
+            <a:ext cx="868680" cy="274320"/>
+          </a:xfrm>
+          <a:prstGeom prst="rect">
+            <a:avLst/>
+          </a:prstGeom>
+          <a:noFill/>
+        </p:spPr>
+        <p:txBody>
+          <a:bodyPr wrap="square" lIns="0" rIns="0" tIns="0" bIns="0">
+            <a:spAutoFit/>
+          </a:bodyPr>
+          <a:lstStyle/>
+          <a:p>
+            <a:pPr algn="r"/>
+            <a:r>
+              <a:rPr sz="1100" b="0" i="0">
                 <a:solidFill>
                   <a:srgbClr val="333333"/>
                 </a:solidFill>
                 <a:latin typeface="Consolas"/>
               </a:rPr>
-              <a:t>Grade 5       −4.6pp   −7.2pp   −2.2pp</a:t>
-            </a:r>
-          </a:p>
-          <a:p>
-            <a:pPr algn="l"/>
-            <a:r>
-              <a:rPr sz="1000" b="0" i="0">
+              <a:t>−6.7 pp</a:t>
+            </a:r>
+          </a:p>
+        </p:txBody>
+      </p:sp>
+      <p:sp>
+        <p:nvSpPr>
+          <p:cNvPr id="20" name="TextBox 19"/>
+          <p:cNvSpPr txBox="1"/>
+          <p:nvPr/>
+        </p:nvSpPr>
+        <p:spPr>
+          <a:xfrm>
+            <a:off x="11155680" y="2112264"/>
+            <a:ext cx="868680" cy="274320"/>
+          </a:xfrm>
+          <a:prstGeom prst="rect">
+            <a:avLst/>
+          </a:prstGeom>
+          <a:noFill/>
+        </p:spPr>
+        <p:txBody>
+          <a:bodyPr wrap="square" lIns="0" rIns="0" tIns="0" bIns="0">
+            <a:spAutoFit/>
+          </a:bodyPr>
+          <a:lstStyle/>
+          <a:p>
+            <a:pPr algn="r"/>
+            <a:r>
+              <a:rPr sz="1100" b="0" i="0">
                 <a:solidFill>
                   <a:srgbClr val="333333"/>
                 </a:solidFill>
                 <a:latin typeface="Consolas"/>
               </a:rPr>
-              <a:t/>
-            </a:r>
-          </a:p>
-          <a:p>
-            <a:pPr algn="l"/>
-            <a:r>
-              <a:rPr sz="1000" b="0" i="0">
+              <a:t>−2.1 pp</a:t>
+            </a:r>
+          </a:p>
+        </p:txBody>
+      </p:sp>
+      <p:sp>
+        <p:nvSpPr>
+          <p:cNvPr id="21" name="TextBox 20"/>
+          <p:cNvSpPr txBox="1"/>
+          <p:nvPr/>
+        </p:nvSpPr>
+        <p:spPr>
+          <a:xfrm>
+            <a:off x="8366760" y="2441448"/>
+            <a:ext cx="868680" cy="274320"/>
+          </a:xfrm>
+          <a:prstGeom prst="rect">
+            <a:avLst/>
+          </a:prstGeom>
+          <a:noFill/>
+        </p:spPr>
+        <p:txBody>
+          <a:bodyPr wrap="square" lIns="0" rIns="0" tIns="0" bIns="0">
+            <a:spAutoFit/>
+          </a:bodyPr>
+          <a:lstStyle/>
+          <a:p>
+            <a:pPr algn="l"/>
+            <a:r>
+              <a:rPr sz="1100" b="0" i="0">
+                <a:solidFill>
+                  <a:srgbClr val="333333"/>
+                </a:solidFill>
+                <a:latin typeface="Calibri"/>
+              </a:rPr>
+              <a:t>Grade 5</a:t>
+            </a:r>
+          </a:p>
+        </p:txBody>
+      </p:sp>
+      <p:sp>
+        <p:nvSpPr>
+          <p:cNvPr id="22" name="TextBox 21"/>
+          <p:cNvSpPr txBox="1"/>
+          <p:nvPr/>
+        </p:nvSpPr>
+        <p:spPr>
+          <a:xfrm>
+            <a:off x="9326880" y="2441448"/>
+            <a:ext cx="868680" cy="274320"/>
+          </a:xfrm>
+          <a:prstGeom prst="rect">
+            <a:avLst/>
+          </a:prstGeom>
+          <a:noFill/>
+        </p:spPr>
+        <p:txBody>
+          <a:bodyPr wrap="square" lIns="0" rIns="0" tIns="0" bIns="0">
+            <a:spAutoFit/>
+          </a:bodyPr>
+          <a:lstStyle/>
+          <a:p>
+            <a:pPr algn="r"/>
+            <a:r>
+              <a:rPr sz="1100" b="0" i="0">
                 <a:solidFill>
                   <a:srgbClr val="333333"/>
                 </a:solidFill>
                 <a:latin typeface="Consolas"/>
               </a:rPr>
-              <a:t>G3 SWD fell 1.7× faster than non-SWD</a:t>
-            </a:r>
-          </a:p>
-          <a:p>
-            <a:pPr algn="l"/>
-            <a:r>
-              <a:rPr sz="1000" b="0" i="0">
+              <a:t>−4.6 pp</a:t>
+            </a:r>
+          </a:p>
+        </p:txBody>
+      </p:sp>
+      <p:sp>
+        <p:nvSpPr>
+          <p:cNvPr id="23" name="TextBox 22"/>
+          <p:cNvSpPr txBox="1"/>
+          <p:nvPr/>
+        </p:nvSpPr>
+        <p:spPr>
+          <a:xfrm>
+            <a:off x="10241280" y="2441448"/>
+            <a:ext cx="868680" cy="274320"/>
+          </a:xfrm>
+          <a:prstGeom prst="rect">
+            <a:avLst/>
+          </a:prstGeom>
+          <a:noFill/>
+        </p:spPr>
+        <p:txBody>
+          <a:bodyPr wrap="square" lIns="0" rIns="0" tIns="0" bIns="0">
+            <a:spAutoFit/>
+          </a:bodyPr>
+          <a:lstStyle/>
+          <a:p>
+            <a:pPr algn="r"/>
+            <a:r>
+              <a:rPr sz="1100" b="0" i="0">
                 <a:solidFill>
                   <a:srgbClr val="333333"/>
                 </a:solidFill>
                 <a:latin typeface="Consolas"/>
               </a:rPr>
-              <a:t>— and at the foundational reading grade.</a:t>
-            </a:r>
-          </a:p>
-        </p:txBody>
-      </p:sp>
-      <p:sp>
-        <p:nvSpPr>
-          <p:cNvPr id="9" name="Rectangle 8"/>
+              <a:t>−7.2 pp</a:t>
+            </a:r>
+          </a:p>
+        </p:txBody>
+      </p:sp>
+      <p:sp>
+        <p:nvSpPr>
+          <p:cNvPr id="24" name="TextBox 23"/>
+          <p:cNvSpPr txBox="1"/>
+          <p:nvPr/>
+        </p:nvSpPr>
+        <p:spPr>
+          <a:xfrm>
+            <a:off x="11155680" y="2441448"/>
+            <a:ext cx="868680" cy="274320"/>
+          </a:xfrm>
+          <a:prstGeom prst="rect">
+            <a:avLst/>
+          </a:prstGeom>
+          <a:noFill/>
+        </p:spPr>
+        <p:txBody>
+          <a:bodyPr wrap="square" lIns="0" rIns="0" tIns="0" bIns="0">
+            <a:spAutoFit/>
+          </a:bodyPr>
+          <a:lstStyle/>
+          <a:p>
+            <a:pPr algn="r"/>
+            <a:r>
+              <a:rPr sz="1100" b="0" i="0">
+                <a:solidFill>
+                  <a:srgbClr val="333333"/>
+                </a:solidFill>
+                <a:latin typeface="Consolas"/>
+              </a:rPr>
+              <a:t>−2.2 pp</a:t>
+            </a:r>
+          </a:p>
+        </p:txBody>
+      </p:sp>
+      <p:sp>
+        <p:nvSpPr>
+          <p:cNvPr id="25" name="TextBox 24"/>
+          <p:cNvSpPr txBox="1"/>
+          <p:nvPr/>
+        </p:nvSpPr>
+        <p:spPr>
+          <a:xfrm>
+            <a:off x="8321040" y="2834640"/>
+            <a:ext cx="3520440" cy="685800"/>
+          </a:xfrm>
+          <a:prstGeom prst="rect">
+            <a:avLst/>
+          </a:prstGeom>
+          <a:noFill/>
+        </p:spPr>
+        <p:txBody>
+          <a:bodyPr wrap="square" lIns="0" rIns="0" tIns="0" bIns="0">
+            <a:spAutoFit/>
+          </a:bodyPr>
+          <a:lstStyle/>
+          <a:p>
+            <a:pPr algn="l"/>
+            <a:r>
+              <a:rPr sz="1000" b="0" i="1">
+                <a:solidFill>
+                  <a:srgbClr val="B02121"/>
+                </a:solidFill>
+                <a:latin typeface="Calibri"/>
+              </a:rPr>
+              <a:t>G3 SWD fell 1.7× faster than non-SWD — at the foundational reading grade.</a:t>
+            </a:r>
+          </a:p>
+        </p:txBody>
+      </p:sp>
+      <p:sp>
+        <p:nvSpPr>
+          <p:cNvPr id="26" name="Rectangle 25"/>
           <p:cNvSpPr/>
           <p:nvPr/>
         </p:nvSpPr>
         <p:spPr>
           <a:xfrm>
-            <a:off x="8183879" y="3611880"/>
-            <a:ext cx="3749039" cy="2743200"/>
+            <a:off x="8183879" y="3703320"/>
+            <a:ext cx="3749039" cy="2423160"/>
           </a:xfrm>
           <a:prstGeom prst="rect">
             <a:avLst/>
@@ -3813,29 +4333,29 @@
       </p:sp>
       <p:sp>
         <p:nvSpPr>
-          <p:cNvPr id="10" name="TextBox 9"/>
-          <p:cNvSpPr txBox="1"/>
-          <p:nvPr/>
-        </p:nvSpPr>
-        <p:spPr>
-          <a:xfrm>
-            <a:off x="8321040" y="3703320"/>
-            <a:ext cx="3520440" cy="365760"/>
-          </a:xfrm>
-          <a:prstGeom prst="rect">
-            <a:avLst/>
-          </a:prstGeom>
-          <a:noFill/>
-        </p:spPr>
-        <p:txBody>
-          <a:bodyPr wrap="square" lIns="0" rIns="0" tIns="0" bIns="0">
-            <a:spAutoFit/>
-          </a:bodyPr>
-          <a:lstStyle/>
-          <a:p>
-            <a:pPr algn="l"/>
-            <a:r>
-              <a:rPr sz="1150" b="1" i="0">
+          <p:cNvPr id="27" name="TextBox 26"/>
+          <p:cNvSpPr txBox="1"/>
+          <p:nvPr/>
+        </p:nvSpPr>
+        <p:spPr>
+          <a:xfrm>
+            <a:off x="8321040" y="3767328"/>
+            <a:ext cx="3520440" cy="292608"/>
+          </a:xfrm>
+          <a:prstGeom prst="rect">
+            <a:avLst/>
+          </a:prstGeom>
+          <a:noFill/>
+        </p:spPr>
+        <p:txBody>
+          <a:bodyPr wrap="square" lIns="0" rIns="0" tIns="0" bIns="0">
+            <a:spAutoFit/>
+          </a:bodyPr>
+          <a:lstStyle/>
+          <a:p>
+            <a:pPr algn="l"/>
+            <a:r>
+              <a:rPr sz="1100" b="1" i="0">
                 <a:solidFill>
                   <a:srgbClr val="1F3A5F"/>
                 </a:solidFill>
@@ -3848,14 +4368,14 @@
       </p:sp>
       <p:sp>
         <p:nvSpPr>
-          <p:cNvPr id="11" name="TextBox 10"/>
-          <p:cNvSpPr txBox="1"/>
-          <p:nvPr/>
-        </p:nvSpPr>
-        <p:spPr>
-          <a:xfrm>
-            <a:off x="8321040" y="4069080"/>
-            <a:ext cx="3520440" cy="2194560"/>
+          <p:cNvPr id="28" name="TextBox 27"/>
+          <p:cNvSpPr txBox="1"/>
+          <p:nvPr/>
+        </p:nvSpPr>
+        <p:spPr>
+          <a:xfrm>
+            <a:off x="8321040" y="4114800"/>
+            <a:ext cx="3520440" cy="1965960"/>
           </a:xfrm>
           <a:prstGeom prst="rect">
             <a:avLst/>
@@ -3876,7 +4396,7 @@
                 </a:solidFill>
                 <a:latin typeface="Calibri"/>
               </a:rPr>
-              <a:t>•  Troy SWD G3 was 37.1% Adv+Prof pre-COVID; it is now 25.4%.</a:t>
+              <a:t>•  Troy SWD G3: 37.1% pre-COVID → 25.4% today.</a:t>
             </a:r>
           </a:p>
           <a:p>
@@ -3900,7 +4420,7 @@
                 </a:solidFill>
                 <a:latin typeface="Calibri"/>
               </a:rPr>
-              <a:t>•  Pre-COVID Troy SWD G3 was 7.6pp BELOW state All. Today it is 14.4pp BELOW state All — the gap nearly doubled.</a:t>
+              <a:t>•  Pre-COVID, Troy SWD G3 sat 7.6pp BELOW state All.</a:t>
             </a:r>
           </a:p>
           <a:p>
@@ -3912,6 +4432,18 @@
                 </a:solidFill>
                 <a:latin typeface="Calibri"/>
               </a:rPr>
+              <a:t>   Today it sits 14.4pp BELOW state All — gap nearly doubled.</a:t>
+            </a:r>
+          </a:p>
+          <a:p>
+            <a:pPr algn="l"/>
+            <a:r>
+              <a:rPr sz="950" b="0" i="0">
+                <a:solidFill>
+                  <a:srgbClr val="333333"/>
+                </a:solidFill>
+                <a:latin typeface="Calibri"/>
+              </a:rPr>
               <a:t/>
             </a:r>
           </a:p>
@@ -3924,7 +4456,7 @@
                 </a:solidFill>
                 <a:latin typeface="Calibri"/>
               </a:rPr>
-              <a:t>•  SoR is specifically engineered for struggling readers: explicit phonics, decodable text, knowledge-building. The students who benefit MOST from SoR are the ones falling fastest at Troy.</a:t>
+              <a:t>•  SoR is engineered for struggling readers (explicit phonics, decodable text, knowledge-building).</a:t>
             </a:r>
           </a:p>
           <a:p>
@@ -3936,6 +4468,18 @@
                 </a:solidFill>
                 <a:latin typeface="Calibri"/>
               </a:rPr>
+              <a:t>   The students who benefit MOST from SoR are falling FASTEST at Troy.</a:t>
+            </a:r>
+          </a:p>
+          <a:p>
+            <a:pPr algn="l"/>
+            <a:r>
+              <a:rPr sz="950" b="0" i="0">
+                <a:solidFill>
+                  <a:srgbClr val="333333"/>
+                </a:solidFill>
+                <a:latin typeface="Calibri"/>
+              </a:rPr>
               <a:t/>
             </a:r>
           </a:p>
@@ -3948,49 +4492,105 @@
                 </a:solidFill>
                 <a:latin typeface="Calibri"/>
               </a:rPr>
-              <a:t>•  Refutes the "regression-to-the-mean for high-achievers" defense — SWD students aren't high-achievers.</a:t>
-            </a:r>
-          </a:p>
-        </p:txBody>
-      </p:sp>
-      <p:sp>
-        <p:nvSpPr>
-          <p:cNvPr id="12" name="TextBox 11"/>
-          <p:cNvSpPr txBox="1"/>
-          <p:nvPr/>
-        </p:nvSpPr>
-        <p:spPr>
-          <a:xfrm>
-            <a:off x="365760" y="6400800"/>
-            <a:ext cx="11430000" cy="365760"/>
-          </a:xfrm>
-          <a:prstGeom prst="rect">
-            <a:avLst/>
-          </a:prstGeom>
-          <a:noFill/>
-        </p:spPr>
-        <p:txBody>
-          <a:bodyPr wrap="square" lIns="0" rIns="0" tIns="0" bIns="0">
-            <a:spAutoFit/>
-          </a:bodyPr>
+              <a:t>•  Refutes the "regression-to-mean for high-achievers" defense</a:t>
+            </a:r>
+          </a:p>
+          <a:p>
+            <a:pPr algn="l"/>
+            <a:r>
+              <a:rPr sz="950" b="0" i="0">
+                <a:solidFill>
+                  <a:srgbClr val="333333"/>
+                </a:solidFill>
+                <a:latin typeface="Calibri"/>
+              </a:rPr>
+              <a:t>   — SWD students aren't high-achievers.</a:t>
+            </a:r>
+          </a:p>
+        </p:txBody>
+      </p:sp>
+      <p:sp>
+        <p:nvSpPr>
+          <p:cNvPr id="29" name="Rectangle 28"/>
+          <p:cNvSpPr/>
+          <p:nvPr/>
+        </p:nvSpPr>
+        <p:spPr>
+          <a:xfrm>
+            <a:off x="365760" y="6199632"/>
+            <a:ext cx="11430000" cy="274320"/>
+          </a:xfrm>
+          <a:prstGeom prst="rect">
+            <a:avLst/>
+          </a:prstGeom>
+          <a:solidFill>
+            <a:srgbClr val="1F3A5F"/>
+          </a:solidFill>
+          <a:ln>
+            <a:noFill/>
+          </a:ln>
+          <a:effectLst/>
+        </p:spPr>
+        <p:style>
+          <a:lnRef idx="1">
+            <a:schemeClr val="accent1"/>
+          </a:lnRef>
+          <a:fillRef idx="3">
+            <a:schemeClr val="accent1"/>
+          </a:fillRef>
+          <a:effectRef idx="2">
+            <a:schemeClr val="accent1"/>
+          </a:effectRef>
+          <a:fontRef idx="minor">
+            <a:schemeClr val="lt1"/>
+          </a:fontRef>
+        </p:style>
+        <p:txBody>
+          <a:bodyPr rtlCol="0" anchor="ctr"/>
           <a:lstStyle/>
           <a:p>
             <a:pPr algn="ctr"/>
-            <a:r>
-              <a:rPr sz="1050" b="1" i="0">
-                <a:solidFill>
-                  <a:srgbClr val="1F3A5F"/>
-                </a:solidFill>
-                <a:latin typeface="Calibri"/>
-              </a:rPr>
-              <a:t>Two independent sources (SEDA cs scale on 49 districts; MDE M-STEP on Troy subgroups) converge on the same conclusion: the subgroups that should benefit most from SoR are the ones declining fastest under the current curriculum.</a:t>
-            </a:r>
-          </a:p>
-        </p:txBody>
-      </p:sp>
-      <p:sp>
-        <p:nvSpPr>
-          <p:cNvPr id="13" name="TextBox 12"/>
+          </a:p>
+        </p:txBody>
+      </p:sp>
+      <p:sp>
+        <p:nvSpPr>
+          <p:cNvPr id="30" name="TextBox 29"/>
+          <p:cNvSpPr txBox="1"/>
+          <p:nvPr/>
+        </p:nvSpPr>
+        <p:spPr>
+          <a:xfrm>
+            <a:off x="365760" y="6245352"/>
+            <a:ext cx="11430000" cy="228600"/>
+          </a:xfrm>
+          <a:prstGeom prst="rect">
+            <a:avLst/>
+          </a:prstGeom>
+          <a:noFill/>
+        </p:spPr>
+        <p:txBody>
+          <a:bodyPr wrap="square" lIns="0" rIns="0" tIns="0" bIns="0">
+            <a:spAutoFit/>
+          </a:bodyPr>
+          <a:lstStyle/>
+          <a:p>
+            <a:pPr algn="ctr"/>
+            <a:r>
+              <a:rPr sz="1000" b="1" i="0">
+                <a:solidFill>
+                  <a:srgbClr val="FFFFFF"/>
+                </a:solidFill>
+                <a:latin typeface="Calibri"/>
+              </a:rPr>
+              <a:t>Two independent sources converge: SEDA cs scale (49 districts) and MDE M-STEP %prof (Troy subgroups) both say the SoR-relevant subgroups are falling fastest.</a:t>
+            </a:r>
+          </a:p>
+        </p:txBody>
+      </p:sp>
+      <p:sp>
+        <p:nvSpPr>
+          <p:cNvPr id="31" name="TextBox 30"/>
           <p:cNvSpPr txBox="1"/>
           <p:nvPr/>
         </p:nvSpPr>
@@ -4025,7 +4625,7 @@
       </p:sp>
       <p:sp>
         <p:nvSpPr>
-          <p:cNvPr id="14" name="TextBox 13"/>
+          <p:cNvPr id="32" name="TextBox 31"/>
           <p:cNvSpPr txBox="1"/>
           <p:nvPr/>
         </p:nvSpPr>
@@ -8750,7 +9350,7 @@
         <p:spPr>
           <a:xfrm>
             <a:off x="365760" y="868680"/>
-            <a:ext cx="7772400" cy="4185138"/>
+            <a:ext cx="7772400" cy="2989647"/>
           </a:xfrm>
           <a:prstGeom prst="rect">
             <a:avLst/>
@@ -28430,7 +29030,7 @@
         <p:spPr>
           <a:xfrm>
             <a:off x="8321040" y="960120"/>
-            <a:ext cx="3566160" cy="2286000"/>
+            <a:ext cx="3566160" cy="2697480"/>
           </a:xfrm>
           <a:prstGeom prst="rect">
             <a:avLst/>
@@ -28473,8 +29073,8 @@
         </p:nvSpPr>
         <p:spPr>
           <a:xfrm>
-            <a:off x="8458200" y="1097280"/>
-            <a:ext cx="3291840" cy="365760"/>
+            <a:off x="8458200" y="1051560"/>
+            <a:ext cx="3291840" cy="292608"/>
           </a:xfrm>
           <a:prstGeom prst="rect">
             <a:avLst/>
@@ -28508,23 +29108,23 @@
         </p:nvSpPr>
         <p:spPr>
           <a:xfrm>
-            <a:off x="8458200" y="1463040"/>
-            <a:ext cx="3291840" cy="1645920"/>
-          </a:xfrm>
-          <a:prstGeom prst="rect">
-            <a:avLst/>
-          </a:prstGeom>
-          <a:noFill/>
-        </p:spPr>
-        <p:txBody>
-          <a:bodyPr wrap="square" lIns="0" rIns="0" tIns="0" bIns="0">
-            <a:spAutoFit/>
-          </a:bodyPr>
-          <a:lstStyle/>
-          <a:p>
-            <a:pPr algn="l"/>
-            <a:r>
-              <a:rPr sz="1300" b="0" i="0">
+            <a:off x="8458200" y="1371600"/>
+            <a:ext cx="3291840" cy="1325880"/>
+          </a:xfrm>
+          <a:prstGeom prst="rect">
+            <a:avLst/>
+          </a:prstGeom>
+          <a:noFill/>
+        </p:spPr>
+        <p:txBody>
+          <a:bodyPr wrap="square" lIns="0" rIns="0" tIns="0" bIns="0">
+            <a:spAutoFit/>
+          </a:bodyPr>
+          <a:lstStyle/>
+          <a:p>
+            <a:pPr algn="l"/>
+            <a:r>
+              <a:rPr sz="1200" b="0" i="0">
                 <a:solidFill>
                   <a:srgbClr val="333333"/>
                 </a:solidFill>
@@ -28536,7 +29136,7 @@
           <a:p>
             <a:pPr algn="l"/>
             <a:r>
-              <a:rPr sz="1300" b="0" i="0">
+              <a:rPr sz="1200" b="0" i="0">
                 <a:solidFill>
                   <a:srgbClr val="333333"/>
                 </a:solidFill>
@@ -28548,7 +29148,7 @@
           <a:p>
             <a:pPr algn="l"/>
             <a:r>
-              <a:rPr sz="1300" b="0" i="0">
+              <a:rPr sz="1200" b="0" i="0">
                 <a:solidFill>
                   <a:srgbClr val="333333"/>
                 </a:solidFill>
@@ -28560,7 +29160,7 @@
           <a:p>
             <a:pPr algn="l"/>
             <a:r>
-              <a:rPr sz="1300" b="0" i="0">
+              <a:rPr sz="1200" b="0" i="0">
                 <a:solidFill>
                   <a:srgbClr val="333333"/>
                 </a:solidFill>
@@ -28572,7 +29172,7 @@
           <a:p>
             <a:pPr algn="l"/>
             <a:r>
-              <a:rPr sz="1300" b="0" i="0">
+              <a:rPr sz="1200" b="0" i="0">
                 <a:solidFill>
                   <a:srgbClr val="333333"/>
                 </a:solidFill>
@@ -28584,7 +29184,7 @@
           <a:p>
             <a:pPr algn="l"/>
             <a:r>
-              <a:rPr sz="1300" b="0" i="0">
+              <a:rPr sz="1200" b="0" i="0">
                 <a:solidFill>
                   <a:srgbClr val="333333"/>
                 </a:solidFill>
@@ -28596,7 +29196,7 @@
           <a:p>
             <a:pPr algn="l"/>
             <a:r>
-              <a:rPr sz="1300" b="0" i="0">
+              <a:rPr sz="1200" b="0" i="0">
                 <a:solidFill>
                   <a:srgbClr val="333333"/>
                 </a:solidFill>
@@ -28605,26 +29205,37 @@
               <a:t>Hispanic        +0.08 †</a:t>
             </a:r>
           </a:p>
-          <a:p>
-            <a:pPr algn="l"/>
-            <a:r>
-              <a:rPr sz="1300" b="0" i="0">
-                <a:solidFill>
-                  <a:srgbClr val="333333"/>
-                </a:solidFill>
-                <a:latin typeface="Consolas"/>
-              </a:rPr>
-              <a:t/>
-            </a:r>
-          </a:p>
-          <a:p>
-            <a:pPr algn="l"/>
-            <a:r>
-              <a:rPr sz="1300" b="0" i="0">
-                <a:solidFill>
-                  <a:srgbClr val="333333"/>
-                </a:solidFill>
-                <a:latin typeface="Consolas"/>
+        </p:txBody>
+      </p:sp>
+      <p:sp>
+        <p:nvSpPr>
+          <p:cNvPr id="9" name="TextBox 8"/>
+          <p:cNvSpPr txBox="1"/>
+          <p:nvPr/>
+        </p:nvSpPr>
+        <p:spPr>
+          <a:xfrm>
+            <a:off x="8458200" y="2743200"/>
+            <a:ext cx="3291840" cy="777240"/>
+          </a:xfrm>
+          <a:prstGeom prst="rect">
+            <a:avLst/>
+          </a:prstGeom>
+          <a:noFill/>
+        </p:spPr>
+        <p:txBody>
+          <a:bodyPr wrap="square" lIns="0" rIns="0" tIns="0" bIns="0">
+            <a:spAutoFit/>
+          </a:bodyPr>
+          <a:lstStyle/>
+          <a:p>
+            <a:pPr algn="l"/>
+            <a:r>
+              <a:rPr sz="950" b="0" i="1">
+                <a:solidFill>
+                  <a:srgbClr val="707070"/>
+                </a:solidFill>
+                <a:latin typeface="Calibri"/>
               </a:rPr>
               <a:t>(grade-level units)</a:t>
             </a:r>
@@ -28632,11 +29243,11 @@
           <a:p>
             <a:pPr algn="l"/>
             <a:r>
-              <a:rPr sz="1300" b="0" i="0">
-                <a:solidFill>
-                  <a:srgbClr val="333333"/>
-                </a:solidFill>
-                <a:latin typeface="Consolas"/>
+              <a:rPr sz="950" b="0" i="1">
+                <a:solidFill>
+                  <a:srgbClr val="707070"/>
+                </a:solidFill>
+                <a:latin typeface="Calibri"/>
               </a:rPr>
               <a:t>† small-N subgroup (~3-4% of Troy)</a:t>
             </a:r>
@@ -28645,14 +29256,14 @@
       </p:sp>
       <p:sp>
         <p:nvSpPr>
-          <p:cNvPr id="9" name="Rectangle 8"/>
+          <p:cNvPr id="10" name="Rectangle 9"/>
           <p:cNvSpPr/>
           <p:nvPr/>
         </p:nvSpPr>
         <p:spPr>
           <a:xfrm>
-            <a:off x="8321040" y="3429000"/>
-            <a:ext cx="3566160" cy="2743200"/>
+            <a:off x="8321040" y="3749039"/>
+            <a:ext cx="3566160" cy="2423160"/>
           </a:xfrm>
           <a:prstGeom prst="rect">
             <a:avLst/>
@@ -28689,14 +29300,14 @@
       </p:sp>
       <p:sp>
         <p:nvSpPr>
-          <p:cNvPr id="10" name="TextBox 9"/>
-          <p:cNvSpPr txBox="1"/>
-          <p:nvPr/>
-        </p:nvSpPr>
-        <p:spPr>
-          <a:xfrm>
-            <a:off x="8458200" y="3566160"/>
-            <a:ext cx="3291840" cy="365760"/>
+          <p:cNvPr id="11" name="TextBox 10"/>
+          <p:cNvSpPr txBox="1"/>
+          <p:nvPr/>
+        </p:nvSpPr>
+        <p:spPr>
+          <a:xfrm>
+            <a:off x="8458200" y="3840480"/>
+            <a:ext cx="3291840" cy="320040"/>
           </a:xfrm>
           <a:prstGeom prst="rect">
             <a:avLst/>
@@ -28724,29 +29335,29 @@
       </p:sp>
       <p:sp>
         <p:nvSpPr>
-          <p:cNvPr id="11" name="TextBox 10"/>
-          <p:cNvSpPr txBox="1"/>
-          <p:nvPr/>
-        </p:nvSpPr>
-        <p:spPr>
-          <a:xfrm>
-            <a:off x="8458200" y="3931920"/>
-            <a:ext cx="3291840" cy="2194560"/>
-          </a:xfrm>
-          <a:prstGeom prst="rect">
-            <a:avLst/>
-          </a:prstGeom>
-          <a:noFill/>
-        </p:spPr>
-        <p:txBody>
-          <a:bodyPr wrap="square" lIns="0" rIns="0" tIns="0" bIns="0">
-            <a:spAutoFit/>
-          </a:bodyPr>
-          <a:lstStyle/>
-          <a:p>
-            <a:pPr algn="l"/>
-            <a:r>
-              <a:rPr sz="1250" b="0" i="0">
+          <p:cNvPr id="12" name="TextBox 11"/>
+          <p:cNvSpPr txBox="1"/>
+          <p:nvPr/>
+        </p:nvSpPr>
+        <p:spPr>
+          <a:xfrm>
+            <a:off x="8458200" y="4160520"/>
+            <a:ext cx="3291840" cy="1874519"/>
+          </a:xfrm>
+          <a:prstGeom prst="rect">
+            <a:avLst/>
+          </a:prstGeom>
+          <a:noFill/>
+        </p:spPr>
+        <p:txBody>
+          <a:bodyPr wrap="square" lIns="0" rIns="0" tIns="0" bIns="0">
+            <a:spAutoFit/>
+          </a:bodyPr>
+          <a:lstStyle/>
+          <a:p>
+            <a:pPr algn="l"/>
+            <a:r>
+              <a:rPr sz="1150" b="0" i="0">
                 <a:solidFill>
                   <a:srgbClr val="333333"/>
                 </a:solidFill>
@@ -28758,7 +29369,7 @@
           <a:p>
             <a:pPr algn="l"/>
             <a:r>
-              <a:rPr sz="1250" b="0" i="0">
+              <a:rPr sz="1150" b="0" i="0">
                 <a:solidFill>
                   <a:srgbClr val="333333"/>
                 </a:solidFill>
@@ -28770,7 +29381,7 @@
           <a:p>
             <a:pPr algn="l"/>
             <a:r>
-              <a:rPr sz="1250" b="0" i="0">
+              <a:rPr sz="1150" b="0" i="0">
                 <a:solidFill>
                   <a:srgbClr val="333333"/>
                 </a:solidFill>
@@ -28782,7 +29393,7 @@
           <a:p>
             <a:pPr algn="l"/>
             <a:r>
-              <a:rPr sz="1250" b="0" i="0">
+              <a:rPr sz="1150" b="0" i="0">
                 <a:solidFill>
                   <a:srgbClr val="333333"/>
                 </a:solidFill>
@@ -28794,7 +29405,7 @@
           <a:p>
             <a:pPr algn="l"/>
             <a:r>
-              <a:rPr sz="1250" b="0" i="0">
+              <a:rPr sz="1150" b="0" i="0">
                 <a:solidFill>
                   <a:srgbClr val="333333"/>
                 </a:solidFill>
@@ -28806,7 +29417,7 @@
           <a:p>
             <a:pPr algn="l"/>
             <a:r>
-              <a:rPr sz="1250" b="0" i="0">
+              <a:rPr sz="1150" b="0" i="0">
                 <a:solidFill>
                   <a:srgbClr val="333333"/>
                 </a:solidFill>
@@ -28818,7 +29429,7 @@
           <a:p>
             <a:pPr algn="l"/>
             <a:r>
-              <a:rPr sz="1250" b="0" i="0">
+              <a:rPr sz="1150" b="0" i="0">
                 <a:solidFill>
                   <a:srgbClr val="333333"/>
                 </a:solidFill>
@@ -28830,7 +29441,7 @@
           <a:p>
             <a:pPr algn="l"/>
             <a:r>
-              <a:rPr sz="1250" b="0" i="0">
+              <a:rPr sz="1150" b="0" i="0">
                 <a:solidFill>
                   <a:srgbClr val="333333"/>
                 </a:solidFill>
@@ -28843,7 +29454,7 @@
       </p:sp>
       <p:sp>
         <p:nvSpPr>
-          <p:cNvPr id="12" name="TextBox 11"/>
+          <p:cNvPr id="13" name="TextBox 12"/>
           <p:cNvSpPr txBox="1"/>
           <p:nvPr/>
         </p:nvSpPr>
@@ -28878,7 +29489,7 @@
       </p:sp>
       <p:sp>
         <p:nvSpPr>
-          <p:cNvPr id="13" name="TextBox 12"/>
+          <p:cNvPr id="14" name="TextBox 13"/>
           <p:cNvSpPr txBox="1"/>
           <p:nvPr/>
         </p:nvSpPr>
@@ -29810,7 +30421,7 @@
         <p:spPr>
           <a:xfrm>
             <a:off x="365760" y="1965960"/>
-            <a:ext cx="3703320" cy="457200"/>
+            <a:ext cx="3703320" cy="411480"/>
           </a:xfrm>
           <a:prstGeom prst="rect">
             <a:avLst/>
@@ -29853,7 +30464,42 @@
         </p:nvSpPr>
         <p:spPr>
           <a:xfrm>
-            <a:off x="548640" y="2057400"/>
+            <a:off x="548640" y="2039112"/>
+            <a:ext cx="3337560" cy="292608"/>
+          </a:xfrm>
+          <a:prstGeom prst="rect">
+            <a:avLst/>
+          </a:prstGeom>
+          <a:noFill/>
+        </p:spPr>
+        <p:txBody>
+          <a:bodyPr wrap="square" lIns="0" rIns="0" tIns="0" bIns="0">
+            <a:spAutoFit/>
+          </a:bodyPr>
+          <a:lstStyle/>
+          <a:p>
+            <a:pPr algn="ctr"/>
+            <a:r>
+              <a:rPr sz="1200" b="1" i="0">
+                <a:solidFill>
+                  <a:srgbClr val="FFFFFF"/>
+                </a:solidFill>
+                <a:latin typeface="Calibri"/>
+              </a:rPr>
+              <a:t>Big gain   (Δ ≥ +0.10)</a:t>
+            </a:r>
+          </a:p>
+        </p:txBody>
+      </p:sp>
+      <p:sp>
+        <p:nvSpPr>
+          <p:cNvPr id="11" name="TextBox 10"/>
+          <p:cNvSpPr txBox="1"/>
+          <p:nvPr/>
+        </p:nvSpPr>
+        <p:spPr>
+          <a:xfrm>
+            <a:off x="548640" y="2468880"/>
             <a:ext cx="3337560" cy="320040"/>
           </a:xfrm>
           <a:prstGeom prst="rect">
@@ -29869,42 +30515,7 @@
           <a:p>
             <a:pPr algn="ctr"/>
             <a:r>
-              <a:rPr sz="1300" b="1" i="0">
-                <a:solidFill>
-                  <a:srgbClr val="FFFFFF"/>
-                </a:solidFill>
-                <a:latin typeface="Calibri"/>
-              </a:rPr>
-              <a:t>Big gain  (Δ ≥ +0.10)</a:t>
-            </a:r>
-          </a:p>
-        </p:txBody>
-      </p:sp>
-      <p:sp>
-        <p:nvSpPr>
-          <p:cNvPr id="11" name="TextBox 10"/>
-          <p:cNvSpPr txBox="1"/>
-          <p:nvPr/>
-        </p:nvSpPr>
-        <p:spPr>
-          <a:xfrm>
-            <a:off x="548640" y="2560320"/>
-            <a:ext cx="3337560" cy="411480"/>
-          </a:xfrm>
-          <a:prstGeom prst="rect">
-            <a:avLst/>
-          </a:prstGeom>
-          <a:noFill/>
-        </p:spPr>
-        <p:txBody>
-          <a:bodyPr wrap="square" lIns="0" rIns="0" tIns="0" bIns="0">
-            <a:spAutoFit/>
-          </a:bodyPr>
-          <a:lstStyle/>
-          <a:p>
-            <a:pPr algn="ctr"/>
-            <a:r>
-              <a:rPr sz="1500" b="1" i="0">
+              <a:rPr sz="1400" b="1" i="0">
                 <a:solidFill>
                   <a:srgbClr val="1F7A3D"/>
                 </a:solidFill>
@@ -29923,75 +30534,459 @@
         </p:nvSpPr>
         <p:spPr>
           <a:xfrm>
-            <a:off x="594360" y="3108960"/>
-            <a:ext cx="3246120" cy="2926080"/>
-          </a:xfrm>
-          <a:prstGeom prst="rect">
-            <a:avLst/>
-          </a:prstGeom>
-          <a:noFill/>
-        </p:spPr>
-        <p:txBody>
-          <a:bodyPr wrap="square" lIns="0" rIns="0" tIns="0" bIns="0">
-            <a:spAutoFit/>
-          </a:bodyPr>
-          <a:lstStyle/>
-          <a:p>
-            <a:pPr algn="l"/>
-            <a:r>
-              <a:rPr sz="1000" b="0" i="0">
+            <a:off x="548640" y="2926080"/>
+            <a:ext cx="1691640" cy="219456"/>
+          </a:xfrm>
+          <a:prstGeom prst="rect">
+            <a:avLst/>
+          </a:prstGeom>
+          <a:noFill/>
+        </p:spPr>
+        <p:txBody>
+          <a:bodyPr wrap="square" lIns="0" rIns="0" tIns="0" bIns="0">
+            <a:spAutoFit/>
+          </a:bodyPr>
+          <a:lstStyle/>
+          <a:p>
+            <a:pPr algn="l"/>
+            <a:r>
+              <a:rPr sz="950" b="0" i="0">
+                <a:solidFill>
+                  <a:srgbClr val="333333"/>
+                </a:solidFill>
+                <a:latin typeface="Calibri"/>
+              </a:rPr>
+              <a:t>Spring Branch ISD</a:t>
+            </a:r>
+          </a:p>
+        </p:txBody>
+      </p:sp>
+      <p:sp>
+        <p:nvSpPr>
+          <p:cNvPr id="13" name="TextBox 12"/>
+          <p:cNvSpPr txBox="1"/>
+          <p:nvPr/>
+        </p:nvSpPr>
+        <p:spPr>
+          <a:xfrm>
+            <a:off x="2286000" y="2926080"/>
+            <a:ext cx="777240" cy="219456"/>
+          </a:xfrm>
+          <a:prstGeom prst="rect">
+            <a:avLst/>
+          </a:prstGeom>
+          <a:noFill/>
+        </p:spPr>
+        <p:txBody>
+          <a:bodyPr wrap="square" lIns="0" rIns="0" tIns="0" bIns="0">
+            <a:spAutoFit/>
+          </a:bodyPr>
+          <a:lstStyle/>
+          <a:p>
+            <a:pPr algn="l"/>
+            <a:r>
+              <a:rPr sz="950" b="0" i="0">
                 <a:solidFill>
                   <a:srgbClr val="333333"/>
                 </a:solidFill>
                 <a:latin typeface="Consolas"/>
               </a:rPr>
-              <a:t>Spring Branch     +0.284   TX STR³⁶</a:t>
-            </a:r>
-          </a:p>
-          <a:p>
-            <a:pPr algn="l"/>
-            <a:r>
-              <a:rPr sz="1000" b="0" i="0">
+              <a:t>+0.284</a:t>
+            </a:r>
+          </a:p>
+        </p:txBody>
+      </p:sp>
+      <p:sp>
+        <p:nvSpPr>
+          <p:cNvPr id="14" name="TextBox 13"/>
+          <p:cNvSpPr txBox="1"/>
+          <p:nvPr/>
+        </p:nvSpPr>
+        <p:spPr>
+          <a:xfrm>
+            <a:off x="3063240" y="2926080"/>
+            <a:ext cx="914400" cy="219456"/>
+          </a:xfrm>
+          <a:prstGeom prst="rect">
+            <a:avLst/>
+          </a:prstGeom>
+          <a:noFill/>
+        </p:spPr>
+        <p:txBody>
+          <a:bodyPr wrap="square" lIns="0" rIns="0" tIns="0" bIns="0">
+            <a:spAutoFit/>
+          </a:bodyPr>
+          <a:lstStyle/>
+          <a:p>
+            <a:pPr algn="l"/>
+            <a:r>
+              <a:rPr sz="900" b="1" i="0">
+                <a:solidFill>
+                  <a:srgbClr val="1F7A3D"/>
+                </a:solidFill>
+                <a:latin typeface="Calibri"/>
+              </a:rPr>
+              <a:t>TX STR³⁶</a:t>
+            </a:r>
+          </a:p>
+        </p:txBody>
+      </p:sp>
+      <p:sp>
+        <p:nvSpPr>
+          <p:cNvPr id="15" name="TextBox 14"/>
+          <p:cNvSpPr txBox="1"/>
+          <p:nvPr/>
+        </p:nvSpPr>
+        <p:spPr>
+          <a:xfrm>
+            <a:off x="548640" y="3163824"/>
+            <a:ext cx="1691640" cy="219456"/>
+          </a:xfrm>
+          <a:prstGeom prst="rect">
+            <a:avLst/>
+          </a:prstGeom>
+          <a:noFill/>
+        </p:spPr>
+        <p:txBody>
+          <a:bodyPr wrap="square" lIns="0" rIns="0" tIns="0" bIns="0">
+            <a:spAutoFit/>
+          </a:bodyPr>
+          <a:lstStyle/>
+          <a:p>
+            <a:pPr algn="l"/>
+            <a:r>
+              <a:rPr sz="950" b="0" i="0">
+                <a:solidFill>
+                  <a:srgbClr val="333333"/>
+                </a:solidFill>
+                <a:latin typeface="Calibri"/>
+              </a:rPr>
+              <a:t>Palo Alto USD</a:t>
+            </a:r>
+          </a:p>
+        </p:txBody>
+      </p:sp>
+      <p:sp>
+        <p:nvSpPr>
+          <p:cNvPr id="16" name="TextBox 15"/>
+          <p:cNvSpPr txBox="1"/>
+          <p:nvPr/>
+        </p:nvSpPr>
+        <p:spPr>
+          <a:xfrm>
+            <a:off x="2286000" y="3163824"/>
+            <a:ext cx="777240" cy="219456"/>
+          </a:xfrm>
+          <a:prstGeom prst="rect">
+            <a:avLst/>
+          </a:prstGeom>
+          <a:noFill/>
+        </p:spPr>
+        <p:txBody>
+          <a:bodyPr wrap="square" lIns="0" rIns="0" tIns="0" bIns="0">
+            <a:spAutoFit/>
+          </a:bodyPr>
+          <a:lstStyle/>
+          <a:p>
+            <a:pPr algn="l"/>
+            <a:r>
+              <a:rPr sz="950" b="0" i="0">
                 <a:solidFill>
                   <a:srgbClr val="333333"/>
                 </a:solidFill>
                 <a:latin typeface="Consolas"/>
               </a:rPr>
-              <a:t>Palo Alto USD     +0.132   ESRI³⁵</a:t>
-            </a:r>
-          </a:p>
-          <a:p>
-            <a:pPr algn="l"/>
-            <a:r>
-              <a:rPr sz="1000" b="0" i="0">
+              <a:t>+0.132</a:t>
+            </a:r>
+          </a:p>
+        </p:txBody>
+      </p:sp>
+      <p:sp>
+        <p:nvSpPr>
+          <p:cNvPr id="17" name="TextBox 16"/>
+          <p:cNvSpPr txBox="1"/>
+          <p:nvPr/>
+        </p:nvSpPr>
+        <p:spPr>
+          <a:xfrm>
+            <a:off x="3063240" y="3163824"/>
+            <a:ext cx="914400" cy="219456"/>
+          </a:xfrm>
+          <a:prstGeom prst="rect">
+            <a:avLst/>
+          </a:prstGeom>
+          <a:noFill/>
+        </p:spPr>
+        <p:txBody>
+          <a:bodyPr wrap="square" lIns="0" rIns="0" tIns="0" bIns="0">
+            <a:spAutoFit/>
+          </a:bodyPr>
+          <a:lstStyle/>
+          <a:p>
+            <a:pPr algn="l"/>
+            <a:r>
+              <a:rPr sz="900" b="1" i="0">
+                <a:solidFill>
+                  <a:srgbClr val="1F7A3D"/>
+                </a:solidFill>
+                <a:latin typeface="Calibri"/>
+              </a:rPr>
+              <a:t>ESRI³⁵</a:t>
+            </a:r>
+          </a:p>
+        </p:txBody>
+      </p:sp>
+      <p:sp>
+        <p:nvSpPr>
+          <p:cNvPr id="18" name="TextBox 17"/>
+          <p:cNvSpPr txBox="1"/>
+          <p:nvPr/>
+        </p:nvSpPr>
+        <p:spPr>
+          <a:xfrm>
+            <a:off x="548640" y="3401568"/>
+            <a:ext cx="1691640" cy="219456"/>
+          </a:xfrm>
+          <a:prstGeom prst="rect">
+            <a:avLst/>
+          </a:prstGeom>
+          <a:noFill/>
+        </p:spPr>
+        <p:txBody>
+          <a:bodyPr wrap="square" lIns="0" rIns="0" tIns="0" bIns="0">
+            <a:spAutoFit/>
+          </a:bodyPr>
+          <a:lstStyle/>
+          <a:p>
+            <a:pPr algn="l"/>
+            <a:r>
+              <a:rPr sz="950" b="0" i="0">
+                <a:solidFill>
+                  <a:srgbClr val="333333"/>
+                </a:solidFill>
+                <a:latin typeface="Calibri"/>
+              </a:rPr>
+              <a:t>West Baton Rouge</a:t>
+            </a:r>
+          </a:p>
+        </p:txBody>
+      </p:sp>
+      <p:sp>
+        <p:nvSpPr>
+          <p:cNvPr id="19" name="TextBox 18"/>
+          <p:cNvSpPr txBox="1"/>
+          <p:nvPr/>
+        </p:nvSpPr>
+        <p:spPr>
+          <a:xfrm>
+            <a:off x="2286000" y="3401568"/>
+            <a:ext cx="777240" cy="219456"/>
+          </a:xfrm>
+          <a:prstGeom prst="rect">
+            <a:avLst/>
+          </a:prstGeom>
+          <a:noFill/>
+        </p:spPr>
+        <p:txBody>
+          <a:bodyPr wrap="square" lIns="0" rIns="0" tIns="0" bIns="0">
+            <a:spAutoFit/>
+          </a:bodyPr>
+          <a:lstStyle/>
+          <a:p>
+            <a:pPr algn="l"/>
+            <a:r>
+              <a:rPr sz="950" b="0" i="0">
                 <a:solidFill>
                   <a:srgbClr val="333333"/>
                 </a:solidFill>
                 <a:latin typeface="Consolas"/>
               </a:rPr>
-              <a:t>West Baton Rouge  +0.132   W&amp;W³⁷</a:t>
-            </a:r>
-          </a:p>
-          <a:p>
-            <a:pPr algn="l"/>
-            <a:r>
-              <a:rPr sz="1000" b="0" i="0">
+              <a:t>+0.132</a:t>
+            </a:r>
+          </a:p>
+        </p:txBody>
+      </p:sp>
+      <p:sp>
+        <p:nvSpPr>
+          <p:cNvPr id="20" name="TextBox 19"/>
+          <p:cNvSpPr txBox="1"/>
+          <p:nvPr/>
+        </p:nvSpPr>
+        <p:spPr>
+          <a:xfrm>
+            <a:off x="3063240" y="3401568"/>
+            <a:ext cx="914400" cy="219456"/>
+          </a:xfrm>
+          <a:prstGeom prst="rect">
+            <a:avLst/>
+          </a:prstGeom>
+          <a:noFill/>
+        </p:spPr>
+        <p:txBody>
+          <a:bodyPr wrap="square" lIns="0" rIns="0" tIns="0" bIns="0">
+            <a:spAutoFit/>
+          </a:bodyPr>
+          <a:lstStyle/>
+          <a:p>
+            <a:pPr algn="l"/>
+            <a:r>
+              <a:rPr sz="900" b="1" i="0">
+                <a:solidFill>
+                  <a:srgbClr val="1F7A3D"/>
+                </a:solidFill>
+                <a:latin typeface="Calibri"/>
+              </a:rPr>
+              <a:t>W&amp;W³⁷</a:t>
+            </a:r>
+          </a:p>
+        </p:txBody>
+      </p:sp>
+      <p:sp>
+        <p:nvSpPr>
+          <p:cNvPr id="21" name="TextBox 20"/>
+          <p:cNvSpPr txBox="1"/>
+          <p:nvPr/>
+        </p:nvSpPr>
+        <p:spPr>
+          <a:xfrm>
+            <a:off x="548640" y="3639312"/>
+            <a:ext cx="1691640" cy="219456"/>
+          </a:xfrm>
+          <a:prstGeom prst="rect">
+            <a:avLst/>
+          </a:prstGeom>
+          <a:noFill/>
+        </p:spPr>
+        <p:txBody>
+          <a:bodyPr wrap="square" lIns="0" rIns="0" tIns="0" bIns="0">
+            <a:spAutoFit/>
+          </a:bodyPr>
+          <a:lstStyle/>
+          <a:p>
+            <a:pPr algn="l"/>
+            <a:r>
+              <a:rPr sz="950" b="0" i="0">
+                <a:solidFill>
+                  <a:srgbClr val="333333"/>
+                </a:solidFill>
+                <a:latin typeface="Calibri"/>
+              </a:rPr>
+              <a:t>Johnson City TN</a:t>
+            </a:r>
+          </a:p>
+        </p:txBody>
+      </p:sp>
+      <p:sp>
+        <p:nvSpPr>
+          <p:cNvPr id="22" name="TextBox 21"/>
+          <p:cNvSpPr txBox="1"/>
+          <p:nvPr/>
+        </p:nvSpPr>
+        <p:spPr>
+          <a:xfrm>
+            <a:off x="2286000" y="3639312"/>
+            <a:ext cx="777240" cy="219456"/>
+          </a:xfrm>
+          <a:prstGeom prst="rect">
+            <a:avLst/>
+          </a:prstGeom>
+          <a:noFill/>
+        </p:spPr>
+        <p:txBody>
+          <a:bodyPr wrap="square" lIns="0" rIns="0" tIns="0" bIns="0">
+            <a:spAutoFit/>
+          </a:bodyPr>
+          <a:lstStyle/>
+          <a:p>
+            <a:pPr algn="l"/>
+            <a:r>
+              <a:rPr sz="950" b="0" i="0">
                 <a:solidFill>
                   <a:srgbClr val="333333"/>
                 </a:solidFill>
                 <a:latin typeface="Consolas"/>
               </a:rPr>
-              <a:t>Johnson City TN   +0.121   TN HQIM³⁹</a:t>
-            </a:r>
-          </a:p>
-          <a:p>
-            <a:pPr algn="l"/>
-            <a:r>
-              <a:rPr sz="1000" b="0" i="0">
-                <a:solidFill>
-                  <a:srgbClr val="333333"/>
-                </a:solidFill>
-                <a:latin typeface="Consolas"/>
+              <a:t>+0.121</a:t>
+            </a:r>
+          </a:p>
+        </p:txBody>
+      </p:sp>
+      <p:sp>
+        <p:nvSpPr>
+          <p:cNvPr id="23" name="TextBox 22"/>
+          <p:cNvSpPr txBox="1"/>
+          <p:nvPr/>
+        </p:nvSpPr>
+        <p:spPr>
+          <a:xfrm>
+            <a:off x="3063240" y="3639312"/>
+            <a:ext cx="914400" cy="219456"/>
+          </a:xfrm>
+          <a:prstGeom prst="rect">
+            <a:avLst/>
+          </a:prstGeom>
+          <a:noFill/>
+        </p:spPr>
+        <p:txBody>
+          <a:bodyPr wrap="square" lIns="0" rIns="0" tIns="0" bIns="0">
+            <a:spAutoFit/>
+          </a:bodyPr>
+          <a:lstStyle/>
+          <a:p>
+            <a:pPr algn="l"/>
+            <a:r>
+              <a:rPr sz="900" b="1" i="0">
+                <a:solidFill>
+                  <a:srgbClr val="1F7A3D"/>
+                </a:solidFill>
+                <a:latin typeface="Calibri"/>
+              </a:rPr>
+              <a:t>TN HQIM³⁹</a:t>
+            </a:r>
+          </a:p>
+        </p:txBody>
+      </p:sp>
+      <p:sp>
+        <p:nvSpPr>
+          <p:cNvPr id="24" name="TextBox 23"/>
+          <p:cNvSpPr txBox="1"/>
+          <p:nvPr/>
+        </p:nvSpPr>
+        <p:spPr>
+          <a:xfrm>
+            <a:off x="548640" y="5074920"/>
+            <a:ext cx="3337560" cy="1005840"/>
+          </a:xfrm>
+          <a:prstGeom prst="rect">
+            <a:avLst/>
+          </a:prstGeom>
+          <a:noFill/>
+        </p:spPr>
+        <p:txBody>
+          <a:bodyPr wrap="square" lIns="0" rIns="0" tIns="0" bIns="0">
+            <a:spAutoFit/>
+          </a:bodyPr>
+          <a:lstStyle/>
+          <a:p>
+            <a:pPr algn="l"/>
+            <a:r>
+              <a:rPr sz="950" b="0" i="0">
+                <a:solidFill>
+                  <a:srgbClr val="333333"/>
+                </a:solidFill>
+                <a:latin typeface="Calibri"/>
+              </a:rPr>
+              <a:t>100% of districts in this tier run structured-literacy programs.</a:t>
+            </a:r>
+          </a:p>
+          <a:p>
+            <a:pPr algn="l"/>
+            <a:r>
+              <a:rPr sz="950" b="0" i="0">
+                <a:solidFill>
+                  <a:srgbClr val="333333"/>
+                </a:solidFill>
+                <a:latin typeface="Calibri"/>
               </a:rPr>
               <a:t/>
             </a:r>
@@ -29999,35 +30994,11 @@
           <a:p>
             <a:pPr algn="l"/>
             <a:r>
-              <a:rPr sz="1000" b="0" i="0">
-                <a:solidFill>
-                  <a:srgbClr val="333333"/>
-                </a:solidFill>
-                <a:latin typeface="Consolas"/>
-              </a:rPr>
-              <a:t>100% of districts in this tier run structured-literacy programs.</a:t>
-            </a:r>
-          </a:p>
-          <a:p>
-            <a:pPr algn="l"/>
-            <a:r>
-              <a:rPr sz="1000" b="0" i="0">
-                <a:solidFill>
-                  <a:srgbClr val="333333"/>
-                </a:solidFill>
-                <a:latin typeface="Consolas"/>
-              </a:rPr>
-              <a:t/>
-            </a:r>
-          </a:p>
-          <a:p>
-            <a:pPr algn="l"/>
-            <a:r>
-              <a:rPr sz="1000" b="0" i="0">
-                <a:solidFill>
-                  <a:srgbClr val="333333"/>
-                </a:solidFill>
-                <a:latin typeface="Consolas"/>
+              <a:rPr sz="950" b="0" i="0">
+                <a:solidFill>
+                  <a:srgbClr val="333333"/>
+                </a:solidFill>
+                <a:latin typeface="Calibri"/>
               </a:rPr>
               <a:t>Next-strongest gainer outside this tier: Frisco ISD (TX, BL) at +0.097.</a:t>
             </a:r>
@@ -30036,7 +31007,7 @@
       </p:sp>
       <p:sp>
         <p:nvSpPr>
-          <p:cNvPr id="13" name="Rectangle 12"/>
+          <p:cNvPr id="25" name="Rectangle 24"/>
           <p:cNvSpPr/>
           <p:nvPr/>
         </p:nvSpPr>
@@ -30080,14 +31051,14 @@
       </p:sp>
       <p:sp>
         <p:nvSpPr>
-          <p:cNvPr id="14" name="Rectangle 13"/>
+          <p:cNvPr id="26" name="Rectangle 25"/>
           <p:cNvSpPr/>
           <p:nvPr/>
         </p:nvSpPr>
         <p:spPr>
           <a:xfrm>
             <a:off x="4251960" y="1965960"/>
-            <a:ext cx="3703320" cy="457200"/>
+            <a:ext cx="3703320" cy="411480"/>
           </a:xfrm>
           <a:prstGeom prst="rect">
             <a:avLst/>
@@ -30124,13 +31095,48 @@
       </p:sp>
       <p:sp>
         <p:nvSpPr>
-          <p:cNvPr id="15" name="TextBox 14"/>
-          <p:cNvSpPr txBox="1"/>
-          <p:nvPr/>
-        </p:nvSpPr>
-        <p:spPr>
-          <a:xfrm>
-            <a:off x="4434840" y="2057400"/>
+          <p:cNvPr id="27" name="TextBox 26"/>
+          <p:cNvSpPr txBox="1"/>
+          <p:nvPr/>
+        </p:nvSpPr>
+        <p:spPr>
+          <a:xfrm>
+            <a:off x="4434840" y="2039112"/>
+            <a:ext cx="3337560" cy="292608"/>
+          </a:xfrm>
+          <a:prstGeom prst="rect">
+            <a:avLst/>
+          </a:prstGeom>
+          <a:noFill/>
+        </p:spPr>
+        <p:txBody>
+          <a:bodyPr wrap="square" lIns="0" rIns="0" tIns="0" bIns="0">
+            <a:spAutoFit/>
+          </a:bodyPr>
+          <a:lstStyle/>
+          <a:p>
+            <a:pPr algn="ctr"/>
+            <a:r>
+              <a:rPr sz="1200" b="1" i="0">
+                <a:solidFill>
+                  <a:srgbClr val="FFFFFF"/>
+                </a:solidFill>
+                <a:latin typeface="Calibri"/>
+              </a:rPr>
+              <a:t>Moderate gain   (+0.05 to +0.10)</a:t>
+            </a:r>
+          </a:p>
+        </p:txBody>
+      </p:sp>
+      <p:sp>
+        <p:nvSpPr>
+          <p:cNvPr id="28" name="TextBox 27"/>
+          <p:cNvSpPr txBox="1"/>
+          <p:nvPr/>
+        </p:nvSpPr>
+        <p:spPr>
+          <a:xfrm>
+            <a:off x="4434840" y="2468880"/>
             <a:ext cx="3337560" cy="320040"/>
           </a:xfrm>
           <a:prstGeom prst="rect">
@@ -30146,42 +31152,7 @@
           <a:p>
             <a:pPr algn="ctr"/>
             <a:r>
-              <a:rPr sz="1300" b="1" i="0">
-                <a:solidFill>
-                  <a:srgbClr val="FFFFFF"/>
-                </a:solidFill>
-                <a:latin typeface="Calibri"/>
-              </a:rPr>
-              <a:t>Moderate gain  (+0.05 to +0.10)</a:t>
-            </a:r>
-          </a:p>
-        </p:txBody>
-      </p:sp>
-      <p:sp>
-        <p:nvSpPr>
-          <p:cNvPr id="16" name="TextBox 15"/>
-          <p:cNvSpPr txBox="1"/>
-          <p:nvPr/>
-        </p:nvSpPr>
-        <p:spPr>
-          <a:xfrm>
-            <a:off x="4434840" y="2560320"/>
-            <a:ext cx="3337560" cy="411480"/>
-          </a:xfrm>
-          <a:prstGeom prst="rect">
-            <a:avLst/>
-          </a:prstGeom>
-          <a:noFill/>
-        </p:spPr>
-        <p:txBody>
-          <a:bodyPr wrap="square" lIns="0" rIns="0" tIns="0" bIns="0">
-            <a:spAutoFit/>
-          </a:bodyPr>
-          <a:lstStyle/>
-          <a:p>
-            <a:pPr algn="ctr"/>
-            <a:r>
-              <a:rPr sz="1500" b="1" i="0">
+              <a:rPr sz="1400" b="1" i="0">
                 <a:solidFill>
                   <a:srgbClr val="CC6A11"/>
                 </a:solidFill>
@@ -30194,126 +31165,672 @@
       </p:sp>
       <p:sp>
         <p:nvSpPr>
-          <p:cNvPr id="17" name="TextBox 16"/>
-          <p:cNvSpPr txBox="1"/>
-          <p:nvPr/>
-        </p:nvSpPr>
-        <p:spPr>
-          <a:xfrm>
-            <a:off x="4480560" y="3108960"/>
-            <a:ext cx="3246120" cy="2926080"/>
-          </a:xfrm>
-          <a:prstGeom prst="rect">
-            <a:avLst/>
-          </a:prstGeom>
-          <a:noFill/>
-        </p:spPr>
-        <p:txBody>
-          <a:bodyPr wrap="square" lIns="0" rIns="0" tIns="0" bIns="0">
-            <a:spAutoFit/>
-          </a:bodyPr>
-          <a:lstStyle/>
-          <a:p>
-            <a:pPr algn="l"/>
-            <a:r>
-              <a:rPr sz="1000" b="0" i="0">
+          <p:cNvPr id="29" name="TextBox 28"/>
+          <p:cNvSpPr txBox="1"/>
+          <p:nvPr/>
+        </p:nvSpPr>
+        <p:spPr>
+          <a:xfrm>
+            <a:off x="4434840" y="2926080"/>
+            <a:ext cx="1691640" cy="219456"/>
+          </a:xfrm>
+          <a:prstGeom prst="rect">
+            <a:avLst/>
+          </a:prstGeom>
+          <a:noFill/>
+        </p:spPr>
+        <p:txBody>
+          <a:bodyPr wrap="square" lIns="0" rIns="0" tIns="0" bIns="0">
+            <a:spAutoFit/>
+          </a:bodyPr>
+          <a:lstStyle/>
+          <a:p>
+            <a:pPr algn="l"/>
+            <a:r>
+              <a:rPr sz="950" b="0" i="0">
+                <a:solidFill>
+                  <a:srgbClr val="333333"/>
+                </a:solidFill>
+                <a:latin typeface="Calibri"/>
+              </a:rPr>
+              <a:t>Frisco ISD</a:t>
+            </a:r>
+          </a:p>
+        </p:txBody>
+      </p:sp>
+      <p:sp>
+        <p:nvSpPr>
+          <p:cNvPr id="30" name="TextBox 29"/>
+          <p:cNvSpPr txBox="1"/>
+          <p:nvPr/>
+        </p:nvSpPr>
+        <p:spPr>
+          <a:xfrm>
+            <a:off x="6172200" y="2926080"/>
+            <a:ext cx="777240" cy="219456"/>
+          </a:xfrm>
+          <a:prstGeom prst="rect">
+            <a:avLst/>
+          </a:prstGeom>
+          <a:noFill/>
+        </p:spPr>
+        <p:txBody>
+          <a:bodyPr wrap="square" lIns="0" rIns="0" tIns="0" bIns="0">
+            <a:spAutoFit/>
+          </a:bodyPr>
+          <a:lstStyle/>
+          <a:p>
+            <a:pPr algn="l"/>
+            <a:r>
+              <a:rPr sz="950" b="0" i="0">
                 <a:solidFill>
                   <a:srgbClr val="333333"/>
                 </a:solidFill>
                 <a:latin typeface="Consolas"/>
               </a:rPr>
-              <a:t>Frisco ISD        +0.097   BL</a:t>
-            </a:r>
-          </a:p>
-          <a:p>
-            <a:pPr algn="l"/>
-            <a:r>
-              <a:rPr sz="1000" b="0" i="0">
+              <a:t>+0.097</a:t>
+            </a:r>
+          </a:p>
+        </p:txBody>
+      </p:sp>
+      <p:sp>
+        <p:nvSpPr>
+          <p:cNvPr id="31" name="TextBox 30"/>
+          <p:cNvSpPr txBox="1"/>
+          <p:nvPr/>
+        </p:nvSpPr>
+        <p:spPr>
+          <a:xfrm>
+            <a:off x="6949440" y="2926080"/>
+            <a:ext cx="914400" cy="219456"/>
+          </a:xfrm>
+          <a:prstGeom prst="rect">
+            <a:avLst/>
+          </a:prstGeom>
+          <a:noFill/>
+        </p:spPr>
+        <p:txBody>
+          <a:bodyPr wrap="square" lIns="0" rIns="0" tIns="0" bIns="0">
+            <a:spAutoFit/>
+          </a:bodyPr>
+          <a:lstStyle/>
+          <a:p>
+            <a:pPr algn="l"/>
+            <a:r>
+              <a:rPr sz="900" b="1" i="0">
+                <a:solidFill>
+                  <a:srgbClr val="CC6A11"/>
+                </a:solidFill>
+                <a:latin typeface="Calibri"/>
+              </a:rPr>
+              <a:t>BL</a:t>
+            </a:r>
+          </a:p>
+        </p:txBody>
+      </p:sp>
+      <p:sp>
+        <p:nvSpPr>
+          <p:cNvPr id="32" name="TextBox 31"/>
+          <p:cNvSpPr txBox="1"/>
+          <p:nvPr/>
+        </p:nvSpPr>
+        <p:spPr>
+          <a:xfrm>
+            <a:off x="4434840" y="3163824"/>
+            <a:ext cx="1691640" cy="219456"/>
+          </a:xfrm>
+          <a:prstGeom prst="rect">
+            <a:avLst/>
+          </a:prstGeom>
+          <a:noFill/>
+        </p:spPr>
+        <p:txBody>
+          <a:bodyPr wrap="square" lIns="0" rIns="0" tIns="0" bIns="0">
+            <a:spAutoFit/>
+          </a:bodyPr>
+          <a:lstStyle/>
+          <a:p>
+            <a:pPr algn="l"/>
+            <a:r>
+              <a:rPr sz="950" b="0" i="0">
+                <a:solidFill>
+                  <a:srgbClr val="333333"/>
+                </a:solidFill>
+                <a:latin typeface="Calibri"/>
+              </a:rPr>
+              <a:t>Milpitas USD</a:t>
+            </a:r>
+          </a:p>
+        </p:txBody>
+      </p:sp>
+      <p:sp>
+        <p:nvSpPr>
+          <p:cNvPr id="33" name="TextBox 32"/>
+          <p:cNvSpPr txBox="1"/>
+          <p:nvPr/>
+        </p:nvSpPr>
+        <p:spPr>
+          <a:xfrm>
+            <a:off x="6172200" y="3163824"/>
+            <a:ext cx="777240" cy="219456"/>
+          </a:xfrm>
+          <a:prstGeom prst="rect">
+            <a:avLst/>
+          </a:prstGeom>
+          <a:noFill/>
+        </p:spPr>
+        <p:txBody>
+          <a:bodyPr wrap="square" lIns="0" rIns="0" tIns="0" bIns="0">
+            <a:spAutoFit/>
+          </a:bodyPr>
+          <a:lstStyle/>
+          <a:p>
+            <a:pPr algn="l"/>
+            <a:r>
+              <a:rPr sz="950" b="0" i="0">
                 <a:solidFill>
                   <a:srgbClr val="333333"/>
                 </a:solidFill>
                 <a:latin typeface="Consolas"/>
               </a:rPr>
-              <a:t>Milpitas USD      +0.090   Benchmark</a:t>
-            </a:r>
-          </a:p>
-          <a:p>
-            <a:pPr algn="l"/>
-            <a:r>
-              <a:rPr sz="1000" b="0" i="0">
+              <a:t>+0.090</a:t>
+            </a:r>
+          </a:p>
+        </p:txBody>
+      </p:sp>
+      <p:sp>
+        <p:nvSpPr>
+          <p:cNvPr id="34" name="TextBox 33"/>
+          <p:cNvSpPr txBox="1"/>
+          <p:nvPr/>
+        </p:nvSpPr>
+        <p:spPr>
+          <a:xfrm>
+            <a:off x="6949440" y="3163824"/>
+            <a:ext cx="914400" cy="219456"/>
+          </a:xfrm>
+          <a:prstGeom prst="rect">
+            <a:avLst/>
+          </a:prstGeom>
+          <a:noFill/>
+        </p:spPr>
+        <p:txBody>
+          <a:bodyPr wrap="square" lIns="0" rIns="0" tIns="0" bIns="0">
+            <a:spAutoFit/>
+          </a:bodyPr>
+          <a:lstStyle/>
+          <a:p>
+            <a:pPr algn="l"/>
+            <a:r>
+              <a:rPr sz="900" b="1" i="0">
+                <a:solidFill>
+                  <a:srgbClr val="CC6A11"/>
+                </a:solidFill>
+                <a:latin typeface="Calibri"/>
+              </a:rPr>
+              <a:t>Benchmark</a:t>
+            </a:r>
+          </a:p>
+        </p:txBody>
+      </p:sp>
+      <p:sp>
+        <p:nvSpPr>
+          <p:cNvPr id="35" name="TextBox 34"/>
+          <p:cNvSpPr txBox="1"/>
+          <p:nvPr/>
+        </p:nvSpPr>
+        <p:spPr>
+          <a:xfrm>
+            <a:off x="4434840" y="3401568"/>
+            <a:ext cx="1691640" cy="219456"/>
+          </a:xfrm>
+          <a:prstGeom prst="rect">
+            <a:avLst/>
+          </a:prstGeom>
+          <a:noFill/>
+        </p:spPr>
+        <p:txBody>
+          <a:bodyPr wrap="square" lIns="0" rIns="0" tIns="0" bIns="0">
+            <a:spAutoFit/>
+          </a:bodyPr>
+          <a:lstStyle/>
+          <a:p>
+            <a:pPr algn="l"/>
+            <a:r>
+              <a:rPr sz="950" b="0" i="0">
+                <a:solidFill>
+                  <a:srgbClr val="333333"/>
+                </a:solidFill>
+                <a:latin typeface="Calibri"/>
+              </a:rPr>
+              <a:t>Issaquah SD</a:t>
+            </a:r>
+          </a:p>
+        </p:txBody>
+      </p:sp>
+      <p:sp>
+        <p:nvSpPr>
+          <p:cNvPr id="36" name="TextBox 35"/>
+          <p:cNvSpPr txBox="1"/>
+          <p:nvPr/>
+        </p:nvSpPr>
+        <p:spPr>
+          <a:xfrm>
+            <a:off x="6172200" y="3401568"/>
+            <a:ext cx="777240" cy="219456"/>
+          </a:xfrm>
+          <a:prstGeom prst="rect">
+            <a:avLst/>
+          </a:prstGeom>
+          <a:noFill/>
+        </p:spPr>
+        <p:txBody>
+          <a:bodyPr wrap="square" lIns="0" rIns="0" tIns="0" bIns="0">
+            <a:spAutoFit/>
+          </a:bodyPr>
+          <a:lstStyle/>
+          <a:p>
+            <a:pPr algn="l"/>
+            <a:r>
+              <a:rPr sz="950" b="0" i="0">
                 <a:solidFill>
                   <a:srgbClr val="333333"/>
                 </a:solidFill>
                 <a:latin typeface="Consolas"/>
               </a:rPr>
-              <a:t>Issaquah SD       +0.087   Benchmark '24</a:t>
-            </a:r>
-          </a:p>
-          <a:p>
-            <a:pPr algn="l"/>
-            <a:r>
-              <a:rPr sz="1000" b="0" i="0">
+              <a:t>+0.087</a:t>
+            </a:r>
+          </a:p>
+        </p:txBody>
+      </p:sp>
+      <p:sp>
+        <p:nvSpPr>
+          <p:cNvPr id="37" name="TextBox 36"/>
+          <p:cNvSpPr txBox="1"/>
+          <p:nvPr/>
+        </p:nvSpPr>
+        <p:spPr>
+          <a:xfrm>
+            <a:off x="6949440" y="3401568"/>
+            <a:ext cx="914400" cy="219456"/>
+          </a:xfrm>
+          <a:prstGeom prst="rect">
+            <a:avLst/>
+          </a:prstGeom>
+          <a:noFill/>
+        </p:spPr>
+        <p:txBody>
+          <a:bodyPr wrap="square" lIns="0" rIns="0" tIns="0" bIns="0">
+            <a:spAutoFit/>
+          </a:bodyPr>
+          <a:lstStyle/>
+          <a:p>
+            <a:pPr algn="l"/>
+            <a:r>
+              <a:rPr sz="900" b="1" i="0">
+                <a:solidFill>
+                  <a:srgbClr val="CC6A11"/>
+                </a:solidFill>
+                <a:latin typeface="Calibri"/>
+              </a:rPr>
+              <a:t>Benchmark '24</a:t>
+            </a:r>
+          </a:p>
+        </p:txBody>
+      </p:sp>
+      <p:sp>
+        <p:nvSpPr>
+          <p:cNvPr id="38" name="TextBox 37"/>
+          <p:cNvSpPr txBox="1"/>
+          <p:nvPr/>
+        </p:nvSpPr>
+        <p:spPr>
+          <a:xfrm>
+            <a:off x="4434840" y="3639312"/>
+            <a:ext cx="1691640" cy="219456"/>
+          </a:xfrm>
+          <a:prstGeom prst="rect">
+            <a:avLst/>
+          </a:prstGeom>
+          <a:noFill/>
+        </p:spPr>
+        <p:txBody>
+          <a:bodyPr wrap="square" lIns="0" rIns="0" tIns="0" bIns="0">
+            <a:spAutoFit/>
+          </a:bodyPr>
+          <a:lstStyle/>
+          <a:p>
+            <a:pPr algn="l"/>
+            <a:r>
+              <a:rPr sz="950" b="0" i="0">
+                <a:solidFill>
+                  <a:srgbClr val="333333"/>
+                </a:solidFill>
+                <a:latin typeface="Calibri"/>
+              </a:rPr>
+              <a:t>Dublin USD</a:t>
+            </a:r>
+          </a:p>
+        </p:txBody>
+      </p:sp>
+      <p:sp>
+        <p:nvSpPr>
+          <p:cNvPr id="39" name="TextBox 38"/>
+          <p:cNvSpPr txBox="1"/>
+          <p:nvPr/>
+        </p:nvSpPr>
+        <p:spPr>
+          <a:xfrm>
+            <a:off x="6172200" y="3639312"/>
+            <a:ext cx="777240" cy="219456"/>
+          </a:xfrm>
+          <a:prstGeom prst="rect">
+            <a:avLst/>
+          </a:prstGeom>
+          <a:noFill/>
+        </p:spPr>
+        <p:txBody>
+          <a:bodyPr wrap="square" lIns="0" rIns="0" tIns="0" bIns="0">
+            <a:spAutoFit/>
+          </a:bodyPr>
+          <a:lstStyle/>
+          <a:p>
+            <a:pPr algn="l"/>
+            <a:r>
+              <a:rPr sz="950" b="0" i="0">
                 <a:solidFill>
                   <a:srgbClr val="333333"/>
                 </a:solidFill>
                 <a:latin typeface="Consolas"/>
               </a:rPr>
-              <a:t>Dublin USD        +0.084   Benchmark+Heggerty</a:t>
-            </a:r>
-          </a:p>
-          <a:p>
-            <a:pPr algn="l"/>
-            <a:r>
-              <a:rPr sz="1000" b="0" i="0">
+              <a:t>+0.084</a:t>
+            </a:r>
+          </a:p>
+        </p:txBody>
+      </p:sp>
+      <p:sp>
+        <p:nvSpPr>
+          <p:cNvPr id="40" name="TextBox 39"/>
+          <p:cNvSpPr txBox="1"/>
+          <p:nvPr/>
+        </p:nvSpPr>
+        <p:spPr>
+          <a:xfrm>
+            <a:off x="6949440" y="3639312"/>
+            <a:ext cx="914400" cy="219456"/>
+          </a:xfrm>
+          <a:prstGeom prst="rect">
+            <a:avLst/>
+          </a:prstGeom>
+          <a:noFill/>
+        </p:spPr>
+        <p:txBody>
+          <a:bodyPr wrap="square" lIns="0" rIns="0" tIns="0" bIns="0">
+            <a:spAutoFit/>
+          </a:bodyPr>
+          <a:lstStyle/>
+          <a:p>
+            <a:pPr algn="l"/>
+            <a:r>
+              <a:rPr sz="900" b="1" i="0">
+                <a:solidFill>
+                  <a:srgbClr val="CC6A11"/>
+                </a:solidFill>
+                <a:latin typeface="Calibri"/>
+              </a:rPr>
+              <a:t>Bench+Heggerty</a:t>
+            </a:r>
+          </a:p>
+        </p:txBody>
+      </p:sp>
+      <p:sp>
+        <p:nvSpPr>
+          <p:cNvPr id="41" name="TextBox 40"/>
+          <p:cNvSpPr txBox="1"/>
+          <p:nvPr/>
+        </p:nvSpPr>
+        <p:spPr>
+          <a:xfrm>
+            <a:off x="4434840" y="3877056"/>
+            <a:ext cx="1691640" cy="219456"/>
+          </a:xfrm>
+          <a:prstGeom prst="rect">
+            <a:avLst/>
+          </a:prstGeom>
+          <a:noFill/>
+        </p:spPr>
+        <p:txBody>
+          <a:bodyPr wrap="square" lIns="0" rIns="0" tIns="0" bIns="0">
+            <a:spAutoFit/>
+          </a:bodyPr>
+          <a:lstStyle/>
+          <a:p>
+            <a:pPr algn="l"/>
+            <a:r>
+              <a:rPr sz="950" b="0" i="0">
+                <a:solidFill>
+                  <a:srgbClr val="333333"/>
+                </a:solidFill>
+                <a:latin typeface="Calibri"/>
+              </a:rPr>
+              <a:t>Coppell ISD</a:t>
+            </a:r>
+          </a:p>
+        </p:txBody>
+      </p:sp>
+      <p:sp>
+        <p:nvSpPr>
+          <p:cNvPr id="42" name="TextBox 41"/>
+          <p:cNvSpPr txBox="1"/>
+          <p:nvPr/>
+        </p:nvSpPr>
+        <p:spPr>
+          <a:xfrm>
+            <a:off x="6172200" y="3877056"/>
+            <a:ext cx="777240" cy="219456"/>
+          </a:xfrm>
+          <a:prstGeom prst="rect">
+            <a:avLst/>
+          </a:prstGeom>
+          <a:noFill/>
+        </p:spPr>
+        <p:txBody>
+          <a:bodyPr wrap="square" lIns="0" rIns="0" tIns="0" bIns="0">
+            <a:spAutoFit/>
+          </a:bodyPr>
+          <a:lstStyle/>
+          <a:p>
+            <a:pPr algn="l"/>
+            <a:r>
+              <a:rPr sz="950" b="0" i="0">
                 <a:solidFill>
                   <a:srgbClr val="333333"/>
                 </a:solidFill>
                 <a:latin typeface="Consolas"/>
               </a:rPr>
-              <a:t>Coppell ISD       +0.068   BL</a:t>
-            </a:r>
-          </a:p>
-          <a:p>
-            <a:pPr algn="l"/>
-            <a:r>
-              <a:rPr sz="1000" b="0" i="0">
+              <a:t>+0.068</a:t>
+            </a:r>
+          </a:p>
+        </p:txBody>
+      </p:sp>
+      <p:sp>
+        <p:nvSpPr>
+          <p:cNvPr id="43" name="TextBox 42"/>
+          <p:cNvSpPr txBox="1"/>
+          <p:nvPr/>
+        </p:nvSpPr>
+        <p:spPr>
+          <a:xfrm>
+            <a:off x="6949440" y="3877056"/>
+            <a:ext cx="914400" cy="219456"/>
+          </a:xfrm>
+          <a:prstGeom prst="rect">
+            <a:avLst/>
+          </a:prstGeom>
+          <a:noFill/>
+        </p:spPr>
+        <p:txBody>
+          <a:bodyPr wrap="square" lIns="0" rIns="0" tIns="0" bIns="0">
+            <a:spAutoFit/>
+          </a:bodyPr>
+          <a:lstStyle/>
+          <a:p>
+            <a:pPr algn="l"/>
+            <a:r>
+              <a:rPr sz="900" b="1" i="0">
+                <a:solidFill>
+                  <a:srgbClr val="CC6A11"/>
+                </a:solidFill>
+                <a:latin typeface="Calibri"/>
+              </a:rPr>
+              <a:t>BL</a:t>
+            </a:r>
+          </a:p>
+        </p:txBody>
+      </p:sp>
+      <p:sp>
+        <p:nvSpPr>
+          <p:cNvPr id="44" name="TextBox 43"/>
+          <p:cNvSpPr txBox="1"/>
+          <p:nvPr/>
+        </p:nvSpPr>
+        <p:spPr>
+          <a:xfrm>
+            <a:off x="4434840" y="4114800"/>
+            <a:ext cx="1691640" cy="219456"/>
+          </a:xfrm>
+          <a:prstGeom prst="rect">
+            <a:avLst/>
+          </a:prstGeom>
+          <a:noFill/>
+        </p:spPr>
+        <p:txBody>
+          <a:bodyPr wrap="square" lIns="0" rIns="0" tIns="0" bIns="0">
+            <a:spAutoFit/>
+          </a:bodyPr>
+          <a:lstStyle/>
+          <a:p>
+            <a:pPr algn="l"/>
+            <a:r>
+              <a:rPr sz="950" b="0" i="0">
+                <a:solidFill>
+                  <a:srgbClr val="333333"/>
+                </a:solidFill>
+                <a:latin typeface="Calibri"/>
+              </a:rPr>
+              <a:t>Princeton PS</a:t>
+            </a:r>
+          </a:p>
+        </p:txBody>
+      </p:sp>
+      <p:sp>
+        <p:nvSpPr>
+          <p:cNvPr id="45" name="TextBox 44"/>
+          <p:cNvSpPr txBox="1"/>
+          <p:nvPr/>
+        </p:nvSpPr>
+        <p:spPr>
+          <a:xfrm>
+            <a:off x="6172200" y="4114800"/>
+            <a:ext cx="777240" cy="219456"/>
+          </a:xfrm>
+          <a:prstGeom prst="rect">
+            <a:avLst/>
+          </a:prstGeom>
+          <a:noFill/>
+        </p:spPr>
+        <p:txBody>
+          <a:bodyPr wrap="square" lIns="0" rIns="0" tIns="0" bIns="0">
+            <a:spAutoFit/>
+          </a:bodyPr>
+          <a:lstStyle/>
+          <a:p>
+            <a:pPr algn="l"/>
+            <a:r>
+              <a:rPr sz="950" b="0" i="0">
                 <a:solidFill>
                   <a:srgbClr val="333333"/>
                 </a:solidFill>
                 <a:latin typeface="Consolas"/>
               </a:rPr>
-              <a:t>Princeton PS      +0.060   NJ peer (BL?)</a:t>
-            </a:r>
-          </a:p>
-          <a:p>
-            <a:pPr algn="l"/>
-            <a:r>
-              <a:rPr sz="1000" b="0" i="0">
-                <a:solidFill>
-                  <a:srgbClr val="333333"/>
-                </a:solidFill>
-                <a:latin typeface="Consolas"/>
-              </a:rPr>
-              <a:t/>
-            </a:r>
-          </a:p>
-          <a:p>
-            <a:pPr algn="l"/>
-            <a:r>
-              <a:rPr sz="1000" b="0" i="0">
-                <a:solidFill>
-                  <a:srgbClr val="333333"/>
-                </a:solidFill>
-                <a:latin typeface="Consolas"/>
-              </a:rPr>
-              <a:t>Mix of BL, Benchmark, and recently-adopted SoR.</a:t>
-            </a:r>
-          </a:p>
-        </p:txBody>
-      </p:sp>
-      <p:sp>
-        <p:nvSpPr>
-          <p:cNvPr id="18" name="Rectangle 17"/>
+              <a:t>+0.060</a:t>
+            </a:r>
+          </a:p>
+        </p:txBody>
+      </p:sp>
+      <p:sp>
+        <p:nvSpPr>
+          <p:cNvPr id="46" name="TextBox 45"/>
+          <p:cNvSpPr txBox="1"/>
+          <p:nvPr/>
+        </p:nvSpPr>
+        <p:spPr>
+          <a:xfrm>
+            <a:off x="6949440" y="4114800"/>
+            <a:ext cx="914400" cy="219456"/>
+          </a:xfrm>
+          <a:prstGeom prst="rect">
+            <a:avLst/>
+          </a:prstGeom>
+          <a:noFill/>
+        </p:spPr>
+        <p:txBody>
+          <a:bodyPr wrap="square" lIns="0" rIns="0" tIns="0" bIns="0">
+            <a:spAutoFit/>
+          </a:bodyPr>
+          <a:lstStyle/>
+          <a:p>
+            <a:pPr algn="l"/>
+            <a:r>
+              <a:rPr sz="900" b="1" i="0">
+                <a:solidFill>
+                  <a:srgbClr val="CC6A11"/>
+                </a:solidFill>
+                <a:latin typeface="Calibri"/>
+              </a:rPr>
+              <a:t>BL (NJ peer)</a:t>
+            </a:r>
+          </a:p>
+        </p:txBody>
+      </p:sp>
+      <p:sp>
+        <p:nvSpPr>
+          <p:cNvPr id="47" name="TextBox 46"/>
+          <p:cNvSpPr txBox="1"/>
+          <p:nvPr/>
+        </p:nvSpPr>
+        <p:spPr>
+          <a:xfrm>
+            <a:off x="4434840" y="5074920"/>
+            <a:ext cx="3337560" cy="1005840"/>
+          </a:xfrm>
+          <a:prstGeom prst="rect">
+            <a:avLst/>
+          </a:prstGeom>
+          <a:noFill/>
+        </p:spPr>
+        <p:txBody>
+          <a:bodyPr wrap="square" lIns="0" rIns="0" tIns="0" bIns="0">
+            <a:spAutoFit/>
+          </a:bodyPr>
+          <a:lstStyle/>
+          <a:p>
+            <a:pPr algn="l"/>
+            <a:r>
+              <a:rPr sz="950" b="0" i="0">
+                <a:solidFill>
+                  <a:srgbClr val="333333"/>
+                </a:solidFill>
+                <a:latin typeface="Calibri"/>
+              </a:rPr>
+              <a:t>Mix of BL, Benchmark-Advance, and recently-adopted structured literacy.</a:t>
+            </a:r>
+          </a:p>
+        </p:txBody>
+      </p:sp>
+      <p:sp>
+        <p:nvSpPr>
+          <p:cNvPr id="48" name="Rectangle 47"/>
           <p:cNvSpPr/>
           <p:nvPr/>
         </p:nvSpPr>
@@ -30357,14 +31874,14 @@
       </p:sp>
       <p:sp>
         <p:nvSpPr>
-          <p:cNvPr id="19" name="Rectangle 18"/>
+          <p:cNvPr id="49" name="Rectangle 48"/>
           <p:cNvSpPr/>
           <p:nvPr/>
         </p:nvSpPr>
         <p:spPr>
           <a:xfrm>
             <a:off x="8138160" y="1965960"/>
-            <a:ext cx="3703320" cy="457200"/>
+            <a:ext cx="3703320" cy="411480"/>
           </a:xfrm>
           <a:prstGeom prst="rect">
             <a:avLst/>
@@ -30401,13 +31918,48 @@
       </p:sp>
       <p:sp>
         <p:nvSpPr>
-          <p:cNvPr id="20" name="TextBox 19"/>
-          <p:cNvSpPr txBox="1"/>
-          <p:nvPr/>
-        </p:nvSpPr>
-        <p:spPr>
-          <a:xfrm>
-            <a:off x="8321040" y="2057400"/>
+          <p:cNvPr id="50" name="TextBox 49"/>
+          <p:cNvSpPr txBox="1"/>
+          <p:nvPr/>
+        </p:nvSpPr>
+        <p:spPr>
+          <a:xfrm>
+            <a:off x="8321040" y="2039112"/>
+            <a:ext cx="3337560" cy="292608"/>
+          </a:xfrm>
+          <a:prstGeom prst="rect">
+            <a:avLst/>
+          </a:prstGeom>
+          <a:noFill/>
+        </p:spPr>
+        <p:txBody>
+          <a:bodyPr wrap="square" lIns="0" rIns="0" tIns="0" bIns="0">
+            <a:spAutoFit/>
+          </a:bodyPr>
+          <a:lstStyle/>
+          <a:p>
+            <a:pPr algn="ctr"/>
+            <a:r>
+              <a:rPr sz="1200" b="1" i="0">
+                <a:solidFill>
+                  <a:srgbClr val="FFFFFF"/>
+                </a:solidFill>
+                <a:latin typeface="Calibri"/>
+              </a:rPr>
+              <a:t>Flat or declined   (Δ &lt; +0.05)</a:t>
+            </a:r>
+          </a:p>
+        </p:txBody>
+      </p:sp>
+      <p:sp>
+        <p:nvSpPr>
+          <p:cNvPr id="51" name="TextBox 50"/>
+          <p:cNvSpPr txBox="1"/>
+          <p:nvPr/>
+        </p:nvSpPr>
+        <p:spPr>
+          <a:xfrm>
+            <a:off x="8321040" y="2468880"/>
             <a:ext cx="3337560" cy="320040"/>
           </a:xfrm>
           <a:prstGeom prst="rect">
@@ -30423,42 +31975,7 @@
           <a:p>
             <a:pPr algn="ctr"/>
             <a:r>
-              <a:rPr sz="1300" b="1" i="0">
-                <a:solidFill>
-                  <a:srgbClr val="FFFFFF"/>
-                </a:solidFill>
-                <a:latin typeface="Calibri"/>
-              </a:rPr>
-              <a:t>Flat or declined  (Δ &lt; +0.05)</a:t>
-            </a:r>
-          </a:p>
-        </p:txBody>
-      </p:sp>
-      <p:sp>
-        <p:nvSpPr>
-          <p:cNvPr id="21" name="TextBox 20"/>
-          <p:cNvSpPr txBox="1"/>
-          <p:nvPr/>
-        </p:nvSpPr>
-        <p:spPr>
-          <a:xfrm>
-            <a:off x="8321040" y="2560320"/>
-            <a:ext cx="3337560" cy="411480"/>
-          </a:xfrm>
-          <a:prstGeom prst="rect">
-            <a:avLst/>
-          </a:prstGeom>
-          <a:noFill/>
-        </p:spPr>
-        <p:txBody>
-          <a:bodyPr wrap="square" lIns="0" rIns="0" tIns="0" bIns="0">
-            <a:spAutoFit/>
-          </a:bodyPr>
-          <a:lstStyle/>
-          <a:p>
-            <a:pPr algn="ctr"/>
-            <a:r>
-              <a:rPr sz="1500" b="1" i="0">
+              <a:rPr sz="1400" b="1" i="0">
                 <a:solidFill>
                   <a:srgbClr val="B02121"/>
                 </a:solidFill>
@@ -30471,150 +31988,672 @@
       </p:sp>
       <p:sp>
         <p:nvSpPr>
-          <p:cNvPr id="22" name="TextBox 21"/>
-          <p:cNvSpPr txBox="1"/>
-          <p:nvPr/>
-        </p:nvSpPr>
-        <p:spPr>
-          <a:xfrm>
-            <a:off x="8366760" y="3108960"/>
-            <a:ext cx="3246120" cy="2926080"/>
-          </a:xfrm>
-          <a:prstGeom prst="rect">
-            <a:avLst/>
-          </a:prstGeom>
-          <a:noFill/>
-        </p:spPr>
-        <p:txBody>
-          <a:bodyPr wrap="square" lIns="0" rIns="0" tIns="0" bIns="0">
-            <a:spAutoFit/>
-          </a:bodyPr>
-          <a:lstStyle/>
-          <a:p>
-            <a:pPr algn="l"/>
-            <a:r>
-              <a:rPr sz="1000" b="0" i="0">
-                <a:solidFill>
-                  <a:srgbClr val="333333"/>
-                </a:solidFill>
-                <a:latin typeface="Calibri"/>
-              </a:rPr>
-              <a:t>36 of 49 districts had Δ &lt; 0; 3 more held flat</a:t>
-            </a:r>
-          </a:p>
-          <a:p>
-            <a:pPr algn="l"/>
-            <a:r>
-              <a:rPr sz="1000" b="0" i="0">
-                <a:solidFill>
-                  <a:srgbClr val="333333"/>
-                </a:solidFill>
-                <a:latin typeface="Calibri"/>
-              </a:rPr>
-              <a:t>(Bloomfield Hills, Starkville, Dover).</a:t>
-            </a:r>
-          </a:p>
-          <a:p>
-            <a:pPr algn="l"/>
-            <a:r>
-              <a:rPr sz="1000" b="0" i="0">
-                <a:solidFill>
-                  <a:srgbClr val="333333"/>
-                </a:solidFill>
-                <a:latin typeface="Calibri"/>
-              </a:rPr>
-              <a:t/>
-            </a:r>
-          </a:p>
-          <a:p>
-            <a:pPr algn="l"/>
-            <a:r>
-              <a:rPr sz="1000" b="0" i="0">
-                <a:solidFill>
-                  <a:srgbClr val="333333"/>
-                </a:solidFill>
-                <a:latin typeface="Calibri"/>
-              </a:rPr>
-              <a:t>SoR districts that DECLINED include:</a:t>
-            </a:r>
-          </a:p>
-          <a:p>
-            <a:pPr algn="l"/>
-            <a:r>
-              <a:rPr sz="1000" b="0" i="0">
-                <a:solidFill>
-                  <a:srgbClr val="333333"/>
-                </a:solidFill>
-                <a:latin typeface="Calibri"/>
-              </a:rPr>
-              <a:t>Detroit DPSCD, Aldine, Brownsville, Baltimore,</a:t>
-            </a:r>
-          </a:p>
-          <a:p>
-            <a:pPr algn="l"/>
-            <a:r>
-              <a:rPr sz="1000" b="0" i="0">
-                <a:solidFill>
-                  <a:srgbClr val="333333"/>
-                </a:solidFill>
-                <a:latin typeface="Calibri"/>
-              </a:rPr>
-              <a:t>Bethlehem, Roanoke County, Seaford, Steubenville,</a:t>
-            </a:r>
-          </a:p>
-          <a:p>
-            <a:pPr algn="l"/>
-            <a:r>
-              <a:rPr sz="1000" b="0" i="0">
-                <a:solidFill>
-                  <a:srgbClr val="333333"/>
-                </a:solidFill>
-                <a:latin typeface="Calibri"/>
-              </a:rPr>
-              <a:t>Fond du Lac, Brandywine, Sikeston, East Chicago…</a:t>
-            </a:r>
-          </a:p>
-          <a:p>
-            <a:pPr algn="l"/>
-            <a:r>
-              <a:rPr sz="1000" b="0" i="0">
-                <a:solidFill>
-                  <a:srgbClr val="333333"/>
-                </a:solidFill>
-                <a:latin typeface="Calibri"/>
-              </a:rPr>
-              <a:t/>
-            </a:r>
-          </a:p>
-          <a:p>
-            <a:pPr algn="l"/>
-            <a:r>
-              <a:rPr sz="1000" b="0" i="0">
-                <a:solidFill>
-                  <a:srgbClr val="333333"/>
-                </a:solidFill>
-                <a:latin typeface="Calibri"/>
-              </a:rPr>
-              <a:t>Adopting SoR alone is necessary but not sufficient.</a:t>
-            </a:r>
-          </a:p>
-          <a:p>
-            <a:pPr algn="l"/>
-            <a:r>
-              <a:rPr sz="1000" b="0" i="0">
-                <a:solidFill>
-                  <a:srgbClr val="333333"/>
-                </a:solidFill>
-                <a:latin typeface="Calibri"/>
-              </a:rPr>
-              <a:t>Recovery requires curriculum + sustained PD + screeners + 2-3 year cohort lag (see slide 19).</a:t>
-            </a:r>
-          </a:p>
-        </p:txBody>
-      </p:sp>
-      <p:sp>
-        <p:nvSpPr>
-          <p:cNvPr id="23" name="TextBox 22"/>
+          <p:cNvPr id="52" name="TextBox 51"/>
+          <p:cNvSpPr txBox="1"/>
+          <p:nvPr/>
+        </p:nvSpPr>
+        <p:spPr>
+          <a:xfrm>
+            <a:off x="8321040" y="2926080"/>
+            <a:ext cx="1691640" cy="219456"/>
+          </a:xfrm>
+          <a:prstGeom prst="rect">
+            <a:avLst/>
+          </a:prstGeom>
+          <a:noFill/>
+        </p:spPr>
+        <p:txBody>
+          <a:bodyPr wrap="square" lIns="0" rIns="0" tIns="0" bIns="0">
+            <a:spAutoFit/>
+          </a:bodyPr>
+          <a:lstStyle/>
+          <a:p>
+            <a:pPr algn="l"/>
+            <a:r>
+              <a:rPr sz="950" b="0" i="0">
+                <a:solidFill>
+                  <a:srgbClr val="333333"/>
+                </a:solidFill>
+                <a:latin typeface="Calibri"/>
+              </a:rPr>
+              <a:t>Detroit DPSCD</a:t>
+            </a:r>
+          </a:p>
+        </p:txBody>
+      </p:sp>
+      <p:sp>
+        <p:nvSpPr>
+          <p:cNvPr id="53" name="TextBox 52"/>
+          <p:cNvSpPr txBox="1"/>
+          <p:nvPr/>
+        </p:nvSpPr>
+        <p:spPr>
+          <a:xfrm>
+            <a:off x="10058400" y="2926080"/>
+            <a:ext cx="777240" cy="219456"/>
+          </a:xfrm>
+          <a:prstGeom prst="rect">
+            <a:avLst/>
+          </a:prstGeom>
+          <a:noFill/>
+        </p:spPr>
+        <p:txBody>
+          <a:bodyPr wrap="square" lIns="0" rIns="0" tIns="0" bIns="0">
+            <a:spAutoFit/>
+          </a:bodyPr>
+          <a:lstStyle/>
+          <a:p>
+            <a:pPr algn="l"/>
+            <a:r>
+              <a:rPr sz="950" b="0" i="0">
+                <a:solidFill>
+                  <a:srgbClr val="333333"/>
+                </a:solidFill>
+                <a:latin typeface="Consolas"/>
+              </a:rPr>
+              <a:t>−0.259</a:t>
+            </a:r>
+          </a:p>
+        </p:txBody>
+      </p:sp>
+      <p:sp>
+        <p:nvSpPr>
+          <p:cNvPr id="54" name="TextBox 53"/>
+          <p:cNvSpPr txBox="1"/>
+          <p:nvPr/>
+        </p:nvSpPr>
+        <p:spPr>
+          <a:xfrm>
+            <a:off x="10835640" y="2926080"/>
+            <a:ext cx="914400" cy="219456"/>
+          </a:xfrm>
+          <a:prstGeom prst="rect">
+            <a:avLst/>
+          </a:prstGeom>
+          <a:noFill/>
+        </p:spPr>
+        <p:txBody>
+          <a:bodyPr wrap="square" lIns="0" rIns="0" tIns="0" bIns="0">
+            <a:spAutoFit/>
+          </a:bodyPr>
+          <a:lstStyle/>
+          <a:p>
+            <a:pPr algn="l"/>
+            <a:r>
+              <a:rPr sz="900" b="1" i="0">
+                <a:solidFill>
+                  <a:srgbClr val="B02121"/>
+                </a:solidFill>
+                <a:latin typeface="Calibri"/>
+              </a:rPr>
+              <a:t>EL Ed (SoR)</a:t>
+            </a:r>
+          </a:p>
+        </p:txBody>
+      </p:sp>
+      <p:sp>
+        <p:nvSpPr>
+          <p:cNvPr id="55" name="TextBox 54"/>
+          <p:cNvSpPr txBox="1"/>
+          <p:nvPr/>
+        </p:nvSpPr>
+        <p:spPr>
+          <a:xfrm>
+            <a:off x="8321040" y="3163824"/>
+            <a:ext cx="1691640" cy="219456"/>
+          </a:xfrm>
+          <a:prstGeom prst="rect">
+            <a:avLst/>
+          </a:prstGeom>
+          <a:noFill/>
+        </p:spPr>
+        <p:txBody>
+          <a:bodyPr wrap="square" lIns="0" rIns="0" tIns="0" bIns="0">
+            <a:spAutoFit/>
+          </a:bodyPr>
+          <a:lstStyle/>
+          <a:p>
+            <a:pPr algn="l"/>
+            <a:r>
+              <a:rPr sz="950" b="0" i="0">
+                <a:solidFill>
+                  <a:srgbClr val="333333"/>
+                </a:solidFill>
+                <a:latin typeface="Calibri"/>
+              </a:rPr>
+              <a:t>Aldine ISD</a:t>
+            </a:r>
+          </a:p>
+        </p:txBody>
+      </p:sp>
+      <p:sp>
+        <p:nvSpPr>
+          <p:cNvPr id="56" name="TextBox 55"/>
+          <p:cNvSpPr txBox="1"/>
+          <p:nvPr/>
+        </p:nvSpPr>
+        <p:spPr>
+          <a:xfrm>
+            <a:off x="10058400" y="3163824"/>
+            <a:ext cx="777240" cy="219456"/>
+          </a:xfrm>
+          <a:prstGeom prst="rect">
+            <a:avLst/>
+          </a:prstGeom>
+          <a:noFill/>
+        </p:spPr>
+        <p:txBody>
+          <a:bodyPr wrap="square" lIns="0" rIns="0" tIns="0" bIns="0">
+            <a:spAutoFit/>
+          </a:bodyPr>
+          <a:lstStyle/>
+          <a:p>
+            <a:pPr algn="l"/>
+            <a:r>
+              <a:rPr sz="950" b="0" i="0">
+                <a:solidFill>
+                  <a:srgbClr val="333333"/>
+                </a:solidFill>
+                <a:latin typeface="Consolas"/>
+              </a:rPr>
+              <a:t>−0.034</a:t>
+            </a:r>
+          </a:p>
+        </p:txBody>
+      </p:sp>
+      <p:sp>
+        <p:nvSpPr>
+          <p:cNvPr id="57" name="TextBox 56"/>
+          <p:cNvSpPr txBox="1"/>
+          <p:nvPr/>
+        </p:nvSpPr>
+        <p:spPr>
+          <a:xfrm>
+            <a:off x="10835640" y="3163824"/>
+            <a:ext cx="914400" cy="219456"/>
+          </a:xfrm>
+          <a:prstGeom prst="rect">
+            <a:avLst/>
+          </a:prstGeom>
+          <a:noFill/>
+        </p:spPr>
+        <p:txBody>
+          <a:bodyPr wrap="square" lIns="0" rIns="0" tIns="0" bIns="0">
+            <a:spAutoFit/>
+          </a:bodyPr>
+          <a:lstStyle/>
+          <a:p>
+            <a:pPr algn="l"/>
+            <a:r>
+              <a:rPr sz="900" b="1" i="0">
+                <a:solidFill>
+                  <a:srgbClr val="B02121"/>
+                </a:solidFill>
+                <a:latin typeface="Calibri"/>
+              </a:rPr>
+              <a:t>CKLA (SoR)</a:t>
+            </a:r>
+          </a:p>
+        </p:txBody>
+      </p:sp>
+      <p:sp>
+        <p:nvSpPr>
+          <p:cNvPr id="58" name="TextBox 57"/>
+          <p:cNvSpPr txBox="1"/>
+          <p:nvPr/>
+        </p:nvSpPr>
+        <p:spPr>
+          <a:xfrm>
+            <a:off x="8321040" y="3401568"/>
+            <a:ext cx="1691640" cy="219456"/>
+          </a:xfrm>
+          <a:prstGeom prst="rect">
+            <a:avLst/>
+          </a:prstGeom>
+          <a:noFill/>
+        </p:spPr>
+        <p:txBody>
+          <a:bodyPr wrap="square" lIns="0" rIns="0" tIns="0" bIns="0">
+            <a:spAutoFit/>
+          </a:bodyPr>
+          <a:lstStyle/>
+          <a:p>
+            <a:pPr algn="l"/>
+            <a:r>
+              <a:rPr sz="950" b="0" i="0">
+                <a:solidFill>
+                  <a:srgbClr val="333333"/>
+                </a:solidFill>
+                <a:latin typeface="Calibri"/>
+              </a:rPr>
+              <a:t>Baltimore PS</a:t>
+            </a:r>
+          </a:p>
+        </p:txBody>
+      </p:sp>
+      <p:sp>
+        <p:nvSpPr>
+          <p:cNvPr id="59" name="TextBox 58"/>
+          <p:cNvSpPr txBox="1"/>
+          <p:nvPr/>
+        </p:nvSpPr>
+        <p:spPr>
+          <a:xfrm>
+            <a:off x="10058400" y="3401568"/>
+            <a:ext cx="777240" cy="219456"/>
+          </a:xfrm>
+          <a:prstGeom prst="rect">
+            <a:avLst/>
+          </a:prstGeom>
+          <a:noFill/>
+        </p:spPr>
+        <p:txBody>
+          <a:bodyPr wrap="square" lIns="0" rIns="0" tIns="0" bIns="0">
+            <a:spAutoFit/>
+          </a:bodyPr>
+          <a:lstStyle/>
+          <a:p>
+            <a:pPr algn="l"/>
+            <a:r>
+              <a:rPr sz="950" b="0" i="0">
+                <a:solidFill>
+                  <a:srgbClr val="333333"/>
+                </a:solidFill>
+                <a:latin typeface="Consolas"/>
+              </a:rPr>
+              <a:t>−0.213</a:t>
+            </a:r>
+          </a:p>
+        </p:txBody>
+      </p:sp>
+      <p:sp>
+        <p:nvSpPr>
+          <p:cNvPr id="60" name="TextBox 59"/>
+          <p:cNvSpPr txBox="1"/>
+          <p:nvPr/>
+        </p:nvSpPr>
+        <p:spPr>
+          <a:xfrm>
+            <a:off x="10835640" y="3401568"/>
+            <a:ext cx="914400" cy="219456"/>
+          </a:xfrm>
+          <a:prstGeom prst="rect">
+            <a:avLst/>
+          </a:prstGeom>
+          <a:noFill/>
+        </p:spPr>
+        <p:txBody>
+          <a:bodyPr wrap="square" lIns="0" rIns="0" tIns="0" bIns="0">
+            <a:spAutoFit/>
+          </a:bodyPr>
+          <a:lstStyle/>
+          <a:p>
+            <a:pPr algn="l"/>
+            <a:r>
+              <a:rPr sz="900" b="1" i="0">
+                <a:solidFill>
+                  <a:srgbClr val="B02121"/>
+                </a:solidFill>
+                <a:latin typeface="Calibri"/>
+              </a:rPr>
+              <a:t>W&amp;W (SoR)</a:t>
+            </a:r>
+          </a:p>
+        </p:txBody>
+      </p:sp>
+      <p:sp>
+        <p:nvSpPr>
+          <p:cNvPr id="61" name="TextBox 60"/>
+          <p:cNvSpPr txBox="1"/>
+          <p:nvPr/>
+        </p:nvSpPr>
+        <p:spPr>
+          <a:xfrm>
+            <a:off x="8321040" y="3639312"/>
+            <a:ext cx="1691640" cy="219456"/>
+          </a:xfrm>
+          <a:prstGeom prst="rect">
+            <a:avLst/>
+          </a:prstGeom>
+          <a:noFill/>
+        </p:spPr>
+        <p:txBody>
+          <a:bodyPr wrap="square" lIns="0" rIns="0" tIns="0" bIns="0">
+            <a:spAutoFit/>
+          </a:bodyPr>
+          <a:lstStyle/>
+          <a:p>
+            <a:pPr algn="l"/>
+            <a:r>
+              <a:rPr sz="950" b="0" i="0">
+                <a:solidFill>
+                  <a:srgbClr val="333333"/>
+                </a:solidFill>
+                <a:latin typeface="Calibri"/>
+              </a:rPr>
+              <a:t>Fond du Lac</a:t>
+            </a:r>
+          </a:p>
+        </p:txBody>
+      </p:sp>
+      <p:sp>
+        <p:nvSpPr>
+          <p:cNvPr id="62" name="TextBox 61"/>
+          <p:cNvSpPr txBox="1"/>
+          <p:nvPr/>
+        </p:nvSpPr>
+        <p:spPr>
+          <a:xfrm>
+            <a:off x="10058400" y="3639312"/>
+            <a:ext cx="777240" cy="219456"/>
+          </a:xfrm>
+          <a:prstGeom prst="rect">
+            <a:avLst/>
+          </a:prstGeom>
+          <a:noFill/>
+        </p:spPr>
+        <p:txBody>
+          <a:bodyPr wrap="square" lIns="0" rIns="0" tIns="0" bIns="0">
+            <a:spAutoFit/>
+          </a:bodyPr>
+          <a:lstStyle/>
+          <a:p>
+            <a:pPr algn="l"/>
+            <a:r>
+              <a:rPr sz="950" b="0" i="0">
+                <a:solidFill>
+                  <a:srgbClr val="333333"/>
+                </a:solidFill>
+                <a:latin typeface="Consolas"/>
+              </a:rPr>
+              <a:t>−0.014</a:t>
+            </a:r>
+          </a:p>
+        </p:txBody>
+      </p:sp>
+      <p:sp>
+        <p:nvSpPr>
+          <p:cNvPr id="63" name="TextBox 62"/>
+          <p:cNvSpPr txBox="1"/>
+          <p:nvPr/>
+        </p:nvSpPr>
+        <p:spPr>
+          <a:xfrm>
+            <a:off x="10835640" y="3639312"/>
+            <a:ext cx="914400" cy="219456"/>
+          </a:xfrm>
+          <a:prstGeom prst="rect">
+            <a:avLst/>
+          </a:prstGeom>
+          <a:noFill/>
+        </p:spPr>
+        <p:txBody>
+          <a:bodyPr wrap="square" lIns="0" rIns="0" tIns="0" bIns="0">
+            <a:spAutoFit/>
+          </a:bodyPr>
+          <a:lstStyle/>
+          <a:p>
+            <a:pPr algn="l"/>
+            <a:r>
+              <a:rPr sz="900" b="1" i="0">
+                <a:solidFill>
+                  <a:srgbClr val="B02121"/>
+                </a:solidFill>
+                <a:latin typeface="Calibri"/>
+              </a:rPr>
+              <a:t>CKLA (SoR)</a:t>
+            </a:r>
+          </a:p>
+        </p:txBody>
+      </p:sp>
+      <p:sp>
+        <p:nvSpPr>
+          <p:cNvPr id="64" name="TextBox 63"/>
+          <p:cNvSpPr txBox="1"/>
+          <p:nvPr/>
+        </p:nvSpPr>
+        <p:spPr>
+          <a:xfrm>
+            <a:off x="8321040" y="3877056"/>
+            <a:ext cx="1691640" cy="219456"/>
+          </a:xfrm>
+          <a:prstGeom prst="rect">
+            <a:avLst/>
+          </a:prstGeom>
+          <a:noFill/>
+        </p:spPr>
+        <p:txBody>
+          <a:bodyPr wrap="square" lIns="0" rIns="0" tIns="0" bIns="0">
+            <a:spAutoFit/>
+          </a:bodyPr>
+          <a:lstStyle/>
+          <a:p>
+            <a:pPr algn="l"/>
+            <a:r>
+              <a:rPr sz="950" b="0" i="0">
+                <a:solidFill>
+                  <a:srgbClr val="333333"/>
+                </a:solidFill>
+                <a:latin typeface="Calibri"/>
+              </a:rPr>
+              <a:t>Seaford SD</a:t>
+            </a:r>
+          </a:p>
+        </p:txBody>
+      </p:sp>
+      <p:sp>
+        <p:nvSpPr>
+          <p:cNvPr id="65" name="TextBox 64"/>
+          <p:cNvSpPr txBox="1"/>
+          <p:nvPr/>
+        </p:nvSpPr>
+        <p:spPr>
+          <a:xfrm>
+            <a:off x="10058400" y="3877056"/>
+            <a:ext cx="777240" cy="219456"/>
+          </a:xfrm>
+          <a:prstGeom prst="rect">
+            <a:avLst/>
+          </a:prstGeom>
+          <a:noFill/>
+        </p:spPr>
+        <p:txBody>
+          <a:bodyPr wrap="square" lIns="0" rIns="0" tIns="0" bIns="0">
+            <a:spAutoFit/>
+          </a:bodyPr>
+          <a:lstStyle/>
+          <a:p>
+            <a:pPr algn="l"/>
+            <a:r>
+              <a:rPr sz="950" b="0" i="0">
+                <a:solidFill>
+                  <a:srgbClr val="333333"/>
+                </a:solidFill>
+                <a:latin typeface="Consolas"/>
+              </a:rPr>
+              <a:t>−0.180</a:t>
+            </a:r>
+          </a:p>
+        </p:txBody>
+      </p:sp>
+      <p:sp>
+        <p:nvSpPr>
+          <p:cNvPr id="66" name="TextBox 65"/>
+          <p:cNvSpPr txBox="1"/>
+          <p:nvPr/>
+        </p:nvSpPr>
+        <p:spPr>
+          <a:xfrm>
+            <a:off x="10835640" y="3877056"/>
+            <a:ext cx="914400" cy="219456"/>
+          </a:xfrm>
+          <a:prstGeom prst="rect">
+            <a:avLst/>
+          </a:prstGeom>
+          <a:noFill/>
+        </p:spPr>
+        <p:txBody>
+          <a:bodyPr wrap="square" lIns="0" rIns="0" tIns="0" bIns="0">
+            <a:spAutoFit/>
+          </a:bodyPr>
+          <a:lstStyle/>
+          <a:p>
+            <a:pPr algn="l"/>
+            <a:r>
+              <a:rPr sz="900" b="1" i="0">
+                <a:solidFill>
+                  <a:srgbClr val="B02121"/>
+                </a:solidFill>
+                <a:latin typeface="Calibri"/>
+              </a:rPr>
+              <a:t>Bookworms (SoR)</a:t>
+            </a:r>
+          </a:p>
+        </p:txBody>
+      </p:sp>
+      <p:sp>
+        <p:nvSpPr>
+          <p:cNvPr id="67" name="TextBox 66"/>
+          <p:cNvSpPr txBox="1"/>
+          <p:nvPr/>
+        </p:nvSpPr>
+        <p:spPr>
+          <a:xfrm>
+            <a:off x="8321040" y="4114800"/>
+            <a:ext cx="1691640" cy="219456"/>
+          </a:xfrm>
+          <a:prstGeom prst="rect">
+            <a:avLst/>
+          </a:prstGeom>
+          <a:noFill/>
+        </p:spPr>
+        <p:txBody>
+          <a:bodyPr wrap="square" lIns="0" rIns="0" tIns="0" bIns="0">
+            <a:spAutoFit/>
+          </a:bodyPr>
+          <a:lstStyle/>
+          <a:p>
+            <a:pPr algn="l"/>
+            <a:r>
+              <a:rPr sz="950" b="0" i="0">
+                <a:solidFill>
+                  <a:srgbClr val="333333"/>
+                </a:solidFill>
+                <a:latin typeface="Calibri"/>
+              </a:rPr>
+              <a:t>Troy SD</a:t>
+            </a:r>
+          </a:p>
+        </p:txBody>
+      </p:sp>
+      <p:sp>
+        <p:nvSpPr>
+          <p:cNvPr id="68" name="TextBox 67"/>
+          <p:cNvSpPr txBox="1"/>
+          <p:nvPr/>
+        </p:nvSpPr>
+        <p:spPr>
+          <a:xfrm>
+            <a:off x="10058400" y="4114800"/>
+            <a:ext cx="777240" cy="219456"/>
+          </a:xfrm>
+          <a:prstGeom prst="rect">
+            <a:avLst/>
+          </a:prstGeom>
+          <a:noFill/>
+        </p:spPr>
+        <p:txBody>
+          <a:bodyPr wrap="square" lIns="0" rIns="0" tIns="0" bIns="0">
+            <a:spAutoFit/>
+          </a:bodyPr>
+          <a:lstStyle/>
+          <a:p>
+            <a:pPr algn="l"/>
+            <a:r>
+              <a:rPr sz="950" b="0" i="0">
+                <a:solidFill>
+                  <a:srgbClr val="333333"/>
+                </a:solidFill>
+                <a:latin typeface="Consolas"/>
+              </a:rPr>
+              <a:t>−0.253</a:t>
+            </a:r>
+          </a:p>
+        </p:txBody>
+      </p:sp>
+      <p:sp>
+        <p:nvSpPr>
+          <p:cNvPr id="69" name="TextBox 68"/>
+          <p:cNvSpPr txBox="1"/>
+          <p:nvPr/>
+        </p:nvSpPr>
+        <p:spPr>
+          <a:xfrm>
+            <a:off x="10835640" y="4114800"/>
+            <a:ext cx="914400" cy="219456"/>
+          </a:xfrm>
+          <a:prstGeom prst="rect">
+            <a:avLst/>
+          </a:prstGeom>
+          <a:noFill/>
+        </p:spPr>
+        <p:txBody>
+          <a:bodyPr wrap="square" lIns="0" rIns="0" tIns="0" bIns="0">
+            <a:spAutoFit/>
+          </a:bodyPr>
+          <a:lstStyle/>
+          <a:p>
+            <a:pPr algn="l"/>
+            <a:r>
+              <a:rPr sz="900" b="1" i="0">
+                <a:solidFill>
+                  <a:srgbClr val="B02121"/>
+                </a:solidFill>
+                <a:latin typeface="Calibri"/>
+              </a:rPr>
+              <a:t>Calkins UoS (BL)</a:t>
+            </a:r>
+          </a:p>
+        </p:txBody>
+      </p:sp>
+      <p:sp>
+        <p:nvSpPr>
+          <p:cNvPr id="70" name="TextBox 69"/>
+          <p:cNvSpPr txBox="1"/>
+          <p:nvPr/>
+        </p:nvSpPr>
+        <p:spPr>
+          <a:xfrm>
+            <a:off x="8321040" y="5074920"/>
+            <a:ext cx="3337560" cy="1005840"/>
+          </a:xfrm>
+          <a:prstGeom prst="rect">
+            <a:avLst/>
+          </a:prstGeom>
+          <a:noFill/>
+        </p:spPr>
+        <p:txBody>
+          <a:bodyPr wrap="square" lIns="0" rIns="0" tIns="0" bIns="0">
+            <a:spAutoFit/>
+          </a:bodyPr>
+          <a:lstStyle/>
+          <a:p>
+            <a:pPr algn="l"/>
+            <a:r>
+              <a:rPr sz="950" b="0" i="0">
+                <a:solidFill>
+                  <a:srgbClr val="333333"/>
+                </a:solidFill>
+                <a:latin typeface="Calibri"/>
+              </a:rPr>
+              <a:t>36 of 49 had Δ &lt; 0; 3 held flat (Bloomfield Hills, Starkville, Dover). SoR alone is necessary but not sufficient — recovery also needs sustained PD, universal screeners, and a 2-3-year cohort lag (slide 19).</a:t>
+            </a:r>
+          </a:p>
+        </p:txBody>
+      </p:sp>
+      <p:sp>
+        <p:nvSpPr>
+          <p:cNvPr id="71" name="TextBox 70"/>
           <p:cNvSpPr txBox="1"/>
           <p:nvPr/>
         </p:nvSpPr>
@@ -30649,7 +32688,7 @@
       </p:sp>
       <p:sp>
         <p:nvSpPr>
-          <p:cNvPr id="24" name="TextBox 23"/>
+          <p:cNvPr id="72" name="TextBox 71"/>
           <p:cNvSpPr txBox="1"/>
           <p:nvPr/>
         </p:nvSpPr>
@@ -30684,7 +32723,7 @@
       </p:sp>
       <p:sp>
         <p:nvSpPr>
-          <p:cNvPr id="25" name="TextBox 24"/>
+          <p:cNvPr id="73" name="TextBox 72"/>
           <p:cNvSpPr txBox="1"/>
           <p:nvPr/>
         </p:nvSpPr>
@@ -35224,144 +37263,1025 @@
         </p:nvSpPr>
         <p:spPr>
           <a:xfrm>
-            <a:off x="8001000" y="1463040"/>
-            <a:ext cx="3840480" cy="3657600"/>
-          </a:xfrm>
-          <a:prstGeom prst="rect">
-            <a:avLst/>
-          </a:prstGeom>
-          <a:noFill/>
-        </p:spPr>
-        <p:txBody>
-          <a:bodyPr wrap="square" lIns="0" rIns="0" tIns="0" bIns="0">
-            <a:spAutoFit/>
-          </a:bodyPr>
-          <a:lstStyle/>
-          <a:p>
-            <a:pPr algn="l"/>
-            <a:r>
-              <a:rPr sz="1250" b="0" i="0">
-                <a:solidFill>
-                  <a:srgbClr val="333333"/>
+            <a:off x="8183879" y="1463040"/>
+            <a:ext cx="1417320" cy="256032"/>
+          </a:xfrm>
+          <a:prstGeom prst="rect">
+            <a:avLst/>
+          </a:prstGeom>
+          <a:noFill/>
+        </p:spPr>
+        <p:txBody>
+          <a:bodyPr wrap="square" lIns="0" rIns="0" tIns="0" bIns="0">
+            <a:spAutoFit/>
+          </a:bodyPr>
+          <a:lstStyle/>
+          <a:p>
+            <a:pPr algn="l"/>
+            <a:r>
+              <a:rPr sz="1100" b="1" i="0">
+                <a:solidFill>
+                  <a:srgbClr val="1F3A5F"/>
+                </a:solidFill>
+                <a:latin typeface="Calibri"/>
+              </a:rPr>
+              <a:t>Subgroup</a:t>
+            </a:r>
+          </a:p>
+        </p:txBody>
+      </p:sp>
+      <p:sp>
+        <p:nvSpPr>
+          <p:cNvPr id="9" name="TextBox 8"/>
+          <p:cNvSpPr txBox="1"/>
+          <p:nvPr/>
+        </p:nvSpPr>
+        <p:spPr>
+          <a:xfrm>
+            <a:off x="9601200" y="1463040"/>
+            <a:ext cx="914400" cy="256032"/>
+          </a:xfrm>
+          <a:prstGeom prst="rect">
+            <a:avLst/>
+          </a:prstGeom>
+          <a:noFill/>
+        </p:spPr>
+        <p:txBody>
+          <a:bodyPr wrap="square" lIns="0" rIns="0" tIns="0" bIns="0">
+            <a:spAutoFit/>
+          </a:bodyPr>
+          <a:lstStyle/>
+          <a:p>
+            <a:pPr algn="l"/>
+            <a:r>
+              <a:rPr sz="1100" b="1" i="0">
+                <a:solidFill>
+                  <a:srgbClr val="1F3A5F"/>
+                </a:solidFill>
+                <a:latin typeface="Calibri"/>
+              </a:rPr>
+              <a:t>Rank</a:t>
+            </a:r>
+          </a:p>
+        </p:txBody>
+      </p:sp>
+      <p:sp>
+        <p:nvSpPr>
+          <p:cNvPr id="10" name="TextBox 9"/>
+          <p:cNvSpPr txBox="1"/>
+          <p:nvPr/>
+        </p:nvSpPr>
+        <p:spPr>
+          <a:xfrm>
+            <a:off x="10515600" y="1463040"/>
+            <a:ext cx="868680" cy="256032"/>
+          </a:xfrm>
+          <a:prstGeom prst="rect">
+            <a:avLst/>
+          </a:prstGeom>
+          <a:noFill/>
+        </p:spPr>
+        <p:txBody>
+          <a:bodyPr wrap="square" lIns="0" rIns="0" tIns="0" bIns="0">
+            <a:spAutoFit/>
+          </a:bodyPr>
+          <a:lstStyle/>
+          <a:p>
+            <a:pPr algn="l"/>
+            <a:r>
+              <a:rPr sz="1100" b="1" i="0">
+                <a:solidFill>
+                  <a:srgbClr val="1F3A5F"/>
+                </a:solidFill>
+                <a:latin typeface="Calibri"/>
+              </a:rPr>
+              <a:t>Δ</a:t>
+            </a:r>
+          </a:p>
+        </p:txBody>
+      </p:sp>
+      <p:sp>
+        <p:nvSpPr>
+          <p:cNvPr id="11" name="Rectangle 10"/>
+          <p:cNvSpPr/>
+          <p:nvPr/>
+        </p:nvSpPr>
+        <p:spPr>
+          <a:xfrm>
+            <a:off x="8183879" y="1764792"/>
+            <a:ext cx="3657600" cy="18288"/>
+          </a:xfrm>
+          <a:prstGeom prst="rect">
+            <a:avLst/>
+          </a:prstGeom>
+          <a:solidFill>
+            <a:srgbClr val="707070"/>
+          </a:solidFill>
+          <a:ln>
+            <a:noFill/>
+          </a:ln>
+          <a:effectLst/>
+        </p:spPr>
+        <p:style>
+          <a:lnRef idx="1">
+            <a:schemeClr val="accent1"/>
+          </a:lnRef>
+          <a:fillRef idx="3">
+            <a:schemeClr val="accent1"/>
+          </a:fillRef>
+          <a:effectRef idx="2">
+            <a:schemeClr val="accent1"/>
+          </a:effectRef>
+          <a:fontRef idx="minor">
+            <a:schemeClr val="lt1"/>
+          </a:fontRef>
+        </p:style>
+        <p:txBody>
+          <a:bodyPr rtlCol="0" anchor="ctr"/>
+          <a:lstStyle/>
+          <a:p>
+            <a:pPr algn="ctr"/>
+          </a:p>
+        </p:txBody>
+      </p:sp>
+      <p:sp>
+        <p:nvSpPr>
+          <p:cNvPr id="12" name="TextBox 11"/>
+          <p:cNvSpPr txBox="1"/>
+          <p:nvPr/>
+        </p:nvSpPr>
+        <p:spPr>
+          <a:xfrm>
+            <a:off x="8183879" y="1828800"/>
+            <a:ext cx="1417320" cy="274320"/>
+          </a:xfrm>
+          <a:prstGeom prst="rect">
+            <a:avLst/>
+          </a:prstGeom>
+          <a:noFill/>
+        </p:spPr>
+        <p:txBody>
+          <a:bodyPr wrap="square" lIns="0" rIns="0" tIns="0" bIns="0">
+            <a:spAutoFit/>
+          </a:bodyPr>
+          <a:lstStyle/>
+          <a:p>
+            <a:pPr algn="l"/>
+            <a:r>
+              <a:rPr sz="1100" b="1" i="0">
+                <a:solidFill>
+                  <a:srgbClr val="B02121"/>
+                </a:solidFill>
+                <a:latin typeface="Calibri"/>
+              </a:rPr>
+              <a:t>Asian</a:t>
+            </a:r>
+          </a:p>
+        </p:txBody>
+      </p:sp>
+      <p:sp>
+        <p:nvSpPr>
+          <p:cNvPr id="13" name="TextBox 12"/>
+          <p:cNvSpPr txBox="1"/>
+          <p:nvPr/>
+        </p:nvSpPr>
+        <p:spPr>
+          <a:xfrm>
+            <a:off x="9601200" y="1828800"/>
+            <a:ext cx="914400" cy="274320"/>
+          </a:xfrm>
+          <a:prstGeom prst="rect">
+            <a:avLst/>
+          </a:prstGeom>
+          <a:noFill/>
+        </p:spPr>
+        <p:txBody>
+          <a:bodyPr wrap="square" lIns="0" rIns="0" tIns="0" bIns="0">
+            <a:spAutoFit/>
+          </a:bodyPr>
+          <a:lstStyle/>
+          <a:p>
+            <a:pPr algn="l"/>
+            <a:r>
+              <a:rPr sz="1100" b="1" i="0">
+                <a:solidFill>
+                  <a:srgbClr val="B02121"/>
                 </a:solidFill>
                 <a:latin typeface="Consolas"/>
               </a:rPr>
-              <a:t>Subgroup        Rank      Δ</a:t>
-            </a:r>
-          </a:p>
-          <a:p>
-            <a:pPr algn="l"/>
-            <a:r>
-              <a:rPr sz="1250" b="0" i="0">
-                <a:solidFill>
-                  <a:srgbClr val="333333"/>
+              <a:t>34/35</a:t>
+            </a:r>
+          </a:p>
+        </p:txBody>
+      </p:sp>
+      <p:sp>
+        <p:nvSpPr>
+          <p:cNvPr id="14" name="TextBox 13"/>
+          <p:cNvSpPr txBox="1"/>
+          <p:nvPr/>
+        </p:nvSpPr>
+        <p:spPr>
+          <a:xfrm>
+            <a:off x="10515600" y="1828800"/>
+            <a:ext cx="868680" cy="274320"/>
+          </a:xfrm>
+          <a:prstGeom prst="rect">
+            <a:avLst/>
+          </a:prstGeom>
+          <a:noFill/>
+        </p:spPr>
+        <p:txBody>
+          <a:bodyPr wrap="square" lIns="0" rIns="0" tIns="0" bIns="0">
+            <a:spAutoFit/>
+          </a:bodyPr>
+          <a:lstStyle/>
+          <a:p>
+            <a:pPr algn="l"/>
+            <a:r>
+              <a:rPr sz="1100" b="1" i="0">
+                <a:solidFill>
+                  <a:srgbClr val="B02121"/>
                 </a:solidFill>
                 <a:latin typeface="Consolas"/>
               </a:rPr>
-              <a:t>──────────────────────────</a:t>
-            </a:r>
-          </a:p>
-          <a:p>
-            <a:pPr algn="l"/>
-            <a:r>
-              <a:rPr sz="1250" b="0" i="0">
-                <a:solidFill>
-                  <a:srgbClr val="333333"/>
+              <a:t>−0.347</a:t>
+            </a:r>
+          </a:p>
+        </p:txBody>
+      </p:sp>
+      <p:sp>
+        <p:nvSpPr>
+          <p:cNvPr id="15" name="TextBox 14"/>
+          <p:cNvSpPr txBox="1"/>
+          <p:nvPr/>
+        </p:nvSpPr>
+        <p:spPr>
+          <a:xfrm>
+            <a:off x="11384280" y="1828800"/>
+            <a:ext cx="457200" cy="274320"/>
+          </a:xfrm>
+          <a:prstGeom prst="rect">
+            <a:avLst/>
+          </a:prstGeom>
+          <a:noFill/>
+        </p:spPr>
+        <p:txBody>
+          <a:bodyPr wrap="square" lIns="0" rIns="0" tIns="0" bIns="0">
+            <a:spAutoFit/>
+          </a:bodyPr>
+          <a:lstStyle/>
+          <a:p>
+            <a:pPr algn="l"/>
+            <a:r>
+              <a:rPr sz="1100" b="1" i="0">
+                <a:solidFill>
+                  <a:srgbClr val="B02121"/>
+                </a:solidFill>
+                <a:latin typeface="Calibri"/>
+              </a:rPr>
+              <a:t>◄</a:t>
+            </a:r>
+          </a:p>
+        </p:txBody>
+      </p:sp>
+      <p:sp>
+        <p:nvSpPr>
+          <p:cNvPr id="16" name="TextBox 15"/>
+          <p:cNvSpPr txBox="1"/>
+          <p:nvPr/>
+        </p:nvSpPr>
+        <p:spPr>
+          <a:xfrm>
+            <a:off x="8183879" y="2157984"/>
+            <a:ext cx="1417320" cy="274320"/>
+          </a:xfrm>
+          <a:prstGeom prst="rect">
+            <a:avLst/>
+          </a:prstGeom>
+          <a:noFill/>
+        </p:spPr>
+        <p:txBody>
+          <a:bodyPr wrap="square" lIns="0" rIns="0" tIns="0" bIns="0">
+            <a:spAutoFit/>
+          </a:bodyPr>
+          <a:lstStyle/>
+          <a:p>
+            <a:pPr algn="l"/>
+            <a:r>
+              <a:rPr sz="1100" b="1" i="0">
+                <a:solidFill>
+                  <a:srgbClr val="B02121"/>
+                </a:solidFill>
+                <a:latin typeface="Calibri"/>
+              </a:rPr>
+              <a:t>White</a:t>
+            </a:r>
+          </a:p>
+        </p:txBody>
+      </p:sp>
+      <p:sp>
+        <p:nvSpPr>
+          <p:cNvPr id="17" name="TextBox 16"/>
+          <p:cNvSpPr txBox="1"/>
+          <p:nvPr/>
+        </p:nvSpPr>
+        <p:spPr>
+          <a:xfrm>
+            <a:off x="9601200" y="2157984"/>
+            <a:ext cx="914400" cy="274320"/>
+          </a:xfrm>
+          <a:prstGeom prst="rect">
+            <a:avLst/>
+          </a:prstGeom>
+          <a:noFill/>
+        </p:spPr>
+        <p:txBody>
+          <a:bodyPr wrap="square" lIns="0" rIns="0" tIns="0" bIns="0">
+            <a:spAutoFit/>
+          </a:bodyPr>
+          <a:lstStyle/>
+          <a:p>
+            <a:pPr algn="l"/>
+            <a:r>
+              <a:rPr sz="1100" b="1" i="0">
+                <a:solidFill>
+                  <a:srgbClr val="B02121"/>
                 </a:solidFill>
                 <a:latin typeface="Consolas"/>
               </a:rPr>
-              <a:t>Asian            34/35   −0.347  ◄</a:t>
-            </a:r>
-          </a:p>
-          <a:p>
-            <a:pPr algn="l"/>
-            <a:r>
-              <a:rPr sz="1250" b="0" i="0">
-                <a:solidFill>
-                  <a:srgbClr val="333333"/>
+              <a:t>44/46</a:t>
+            </a:r>
+          </a:p>
+        </p:txBody>
+      </p:sp>
+      <p:sp>
+        <p:nvSpPr>
+          <p:cNvPr id="18" name="TextBox 17"/>
+          <p:cNvSpPr txBox="1"/>
+          <p:nvPr/>
+        </p:nvSpPr>
+        <p:spPr>
+          <a:xfrm>
+            <a:off x="10515600" y="2157984"/>
+            <a:ext cx="868680" cy="274320"/>
+          </a:xfrm>
+          <a:prstGeom prst="rect">
+            <a:avLst/>
+          </a:prstGeom>
+          <a:noFill/>
+        </p:spPr>
+        <p:txBody>
+          <a:bodyPr wrap="square" lIns="0" rIns="0" tIns="0" bIns="0">
+            <a:spAutoFit/>
+          </a:bodyPr>
+          <a:lstStyle/>
+          <a:p>
+            <a:pPr algn="l"/>
+            <a:r>
+              <a:rPr sz="1100" b="1" i="0">
+                <a:solidFill>
+                  <a:srgbClr val="B02121"/>
                 </a:solidFill>
                 <a:latin typeface="Consolas"/>
               </a:rPr>
-              <a:t>White            44/46   −0.231  ◄</a:t>
-            </a:r>
-          </a:p>
-          <a:p>
-            <a:pPr algn="l"/>
-            <a:r>
-              <a:rPr sz="1250" b="0" i="0">
-                <a:solidFill>
-                  <a:srgbClr val="333333"/>
+              <a:t>−0.231</a:t>
+            </a:r>
+          </a:p>
+        </p:txBody>
+      </p:sp>
+      <p:sp>
+        <p:nvSpPr>
+          <p:cNvPr id="19" name="TextBox 18"/>
+          <p:cNvSpPr txBox="1"/>
+          <p:nvPr/>
+        </p:nvSpPr>
+        <p:spPr>
+          <a:xfrm>
+            <a:off x="11384280" y="2157984"/>
+            <a:ext cx="457200" cy="274320"/>
+          </a:xfrm>
+          <a:prstGeom prst="rect">
+            <a:avLst/>
+          </a:prstGeom>
+          <a:noFill/>
+        </p:spPr>
+        <p:txBody>
+          <a:bodyPr wrap="square" lIns="0" rIns="0" tIns="0" bIns="0">
+            <a:spAutoFit/>
+          </a:bodyPr>
+          <a:lstStyle/>
+          <a:p>
+            <a:pPr algn="l"/>
+            <a:r>
+              <a:rPr sz="1100" b="1" i="0">
+                <a:solidFill>
+                  <a:srgbClr val="B02121"/>
+                </a:solidFill>
+                <a:latin typeface="Calibri"/>
+              </a:rPr>
+              <a:t>◄</a:t>
+            </a:r>
+          </a:p>
+        </p:txBody>
+      </p:sp>
+      <p:sp>
+        <p:nvSpPr>
+          <p:cNvPr id="20" name="TextBox 19"/>
+          <p:cNvSpPr txBox="1"/>
+          <p:nvPr/>
+        </p:nvSpPr>
+        <p:spPr>
+          <a:xfrm>
+            <a:off x="8183879" y="2487168"/>
+            <a:ext cx="1417320" cy="274320"/>
+          </a:xfrm>
+          <a:prstGeom prst="rect">
+            <a:avLst/>
+          </a:prstGeom>
+          <a:noFill/>
+        </p:spPr>
+        <p:txBody>
+          <a:bodyPr wrap="square" lIns="0" rIns="0" tIns="0" bIns="0">
+            <a:spAutoFit/>
+          </a:bodyPr>
+          <a:lstStyle/>
+          <a:p>
+            <a:pPr algn="l"/>
+            <a:r>
+              <a:rPr sz="1100" b="1" i="0">
+                <a:solidFill>
+                  <a:srgbClr val="B02121"/>
+                </a:solidFill>
+                <a:latin typeface="Calibri"/>
+              </a:rPr>
+              <a:t>Not-ECD</a:t>
+            </a:r>
+          </a:p>
+        </p:txBody>
+      </p:sp>
+      <p:sp>
+        <p:nvSpPr>
+          <p:cNvPr id="21" name="TextBox 20"/>
+          <p:cNvSpPr txBox="1"/>
+          <p:nvPr/>
+        </p:nvSpPr>
+        <p:spPr>
+          <a:xfrm>
+            <a:off x="9601200" y="2487168"/>
+            <a:ext cx="914400" cy="274320"/>
+          </a:xfrm>
+          <a:prstGeom prst="rect">
+            <a:avLst/>
+          </a:prstGeom>
+          <a:noFill/>
+        </p:spPr>
+        <p:txBody>
+          <a:bodyPr wrap="square" lIns="0" rIns="0" tIns="0" bIns="0">
+            <a:spAutoFit/>
+          </a:bodyPr>
+          <a:lstStyle/>
+          <a:p>
+            <a:pPr algn="l"/>
+            <a:r>
+              <a:rPr sz="1100" b="1" i="0">
+                <a:solidFill>
+                  <a:srgbClr val="B02121"/>
                 </a:solidFill>
                 <a:latin typeface="Consolas"/>
               </a:rPr>
-              <a:t>Not-ECD         42/46   −0.252  ◄</a:t>
-            </a:r>
-          </a:p>
-          <a:p>
-            <a:pPr algn="l"/>
-            <a:r>
-              <a:rPr sz="1250" b="0" i="0">
-                <a:solidFill>
-                  <a:srgbClr val="333333"/>
+              <a:t>42/46</a:t>
+            </a:r>
+          </a:p>
+        </p:txBody>
+      </p:sp>
+      <p:sp>
+        <p:nvSpPr>
+          <p:cNvPr id="22" name="TextBox 21"/>
+          <p:cNvSpPr txBox="1"/>
+          <p:nvPr/>
+        </p:nvSpPr>
+        <p:spPr>
+          <a:xfrm>
+            <a:off x="10515600" y="2487168"/>
+            <a:ext cx="868680" cy="274320"/>
+          </a:xfrm>
+          <a:prstGeom prst="rect">
+            <a:avLst/>
+          </a:prstGeom>
+          <a:noFill/>
+        </p:spPr>
+        <p:txBody>
+          <a:bodyPr wrap="square" lIns="0" rIns="0" tIns="0" bIns="0">
+            <a:spAutoFit/>
+          </a:bodyPr>
+          <a:lstStyle/>
+          <a:p>
+            <a:pPr algn="l"/>
+            <a:r>
+              <a:rPr sz="1100" b="1" i="0">
+                <a:solidFill>
+                  <a:srgbClr val="B02121"/>
                 </a:solidFill>
                 <a:latin typeface="Consolas"/>
               </a:rPr>
-              <a:t>All                  47/49   −0.253  ◄</a:t>
-            </a:r>
-          </a:p>
-          <a:p>
-            <a:pPr algn="l"/>
-            <a:r>
-              <a:rPr sz="1250" b="0" i="0">
-                <a:solidFill>
-                  <a:srgbClr val="333333"/>
+              <a:t>−0.252</a:t>
+            </a:r>
+          </a:p>
+        </p:txBody>
+      </p:sp>
+      <p:sp>
+        <p:nvSpPr>
+          <p:cNvPr id="23" name="TextBox 22"/>
+          <p:cNvSpPr txBox="1"/>
+          <p:nvPr/>
+        </p:nvSpPr>
+        <p:spPr>
+          <a:xfrm>
+            <a:off x="11384280" y="2487168"/>
+            <a:ext cx="457200" cy="274320"/>
+          </a:xfrm>
+          <a:prstGeom prst="rect">
+            <a:avLst/>
+          </a:prstGeom>
+          <a:noFill/>
+        </p:spPr>
+        <p:txBody>
+          <a:bodyPr wrap="square" lIns="0" rIns="0" tIns="0" bIns="0">
+            <a:spAutoFit/>
+          </a:bodyPr>
+          <a:lstStyle/>
+          <a:p>
+            <a:pPr algn="l"/>
+            <a:r>
+              <a:rPr sz="1100" b="1" i="0">
+                <a:solidFill>
+                  <a:srgbClr val="B02121"/>
+                </a:solidFill>
+                <a:latin typeface="Calibri"/>
+              </a:rPr>
+              <a:t>◄</a:t>
+            </a:r>
+          </a:p>
+        </p:txBody>
+      </p:sp>
+      <p:sp>
+        <p:nvSpPr>
+          <p:cNvPr id="24" name="TextBox 23"/>
+          <p:cNvSpPr txBox="1"/>
+          <p:nvPr/>
+        </p:nvSpPr>
+        <p:spPr>
+          <a:xfrm>
+            <a:off x="8183879" y="2816352"/>
+            <a:ext cx="1417320" cy="274320"/>
+          </a:xfrm>
+          <a:prstGeom prst="rect">
+            <a:avLst/>
+          </a:prstGeom>
+          <a:noFill/>
+        </p:spPr>
+        <p:txBody>
+          <a:bodyPr wrap="square" lIns="0" rIns="0" tIns="0" bIns="0">
+            <a:spAutoFit/>
+          </a:bodyPr>
+          <a:lstStyle/>
+          <a:p>
+            <a:pPr algn="l"/>
+            <a:r>
+              <a:rPr sz="1100" b="1" i="0">
+                <a:solidFill>
+                  <a:srgbClr val="B02121"/>
+                </a:solidFill>
+                <a:latin typeface="Calibri"/>
+              </a:rPr>
+              <a:t>All</a:t>
+            </a:r>
+          </a:p>
+        </p:txBody>
+      </p:sp>
+      <p:sp>
+        <p:nvSpPr>
+          <p:cNvPr id="25" name="TextBox 24"/>
+          <p:cNvSpPr txBox="1"/>
+          <p:nvPr/>
+        </p:nvSpPr>
+        <p:spPr>
+          <a:xfrm>
+            <a:off x="9601200" y="2816352"/>
+            <a:ext cx="914400" cy="274320"/>
+          </a:xfrm>
+          <a:prstGeom prst="rect">
+            <a:avLst/>
+          </a:prstGeom>
+          <a:noFill/>
+        </p:spPr>
+        <p:txBody>
+          <a:bodyPr wrap="square" lIns="0" rIns="0" tIns="0" bIns="0">
+            <a:spAutoFit/>
+          </a:bodyPr>
+          <a:lstStyle/>
+          <a:p>
+            <a:pPr algn="l"/>
+            <a:r>
+              <a:rPr sz="1100" b="1" i="0">
+                <a:solidFill>
+                  <a:srgbClr val="B02121"/>
                 </a:solidFill>
                 <a:latin typeface="Consolas"/>
               </a:rPr>
-              <a:t>Black            27/33   −0.274</a:t>
-            </a:r>
-          </a:p>
-          <a:p>
-            <a:pPr algn="l"/>
-            <a:r>
-              <a:rPr sz="1250" b="0" i="0">
-                <a:solidFill>
-                  <a:srgbClr val="333333"/>
+              <a:t>47/49</a:t>
+            </a:r>
+          </a:p>
+        </p:txBody>
+      </p:sp>
+      <p:sp>
+        <p:nvSpPr>
+          <p:cNvPr id="26" name="TextBox 25"/>
+          <p:cNvSpPr txBox="1"/>
+          <p:nvPr/>
+        </p:nvSpPr>
+        <p:spPr>
+          <a:xfrm>
+            <a:off x="10515600" y="2816352"/>
+            <a:ext cx="868680" cy="274320"/>
+          </a:xfrm>
+          <a:prstGeom prst="rect">
+            <a:avLst/>
+          </a:prstGeom>
+          <a:noFill/>
+        </p:spPr>
+        <p:txBody>
+          <a:bodyPr wrap="square" lIns="0" rIns="0" tIns="0" bIns="0">
+            <a:spAutoFit/>
+          </a:bodyPr>
+          <a:lstStyle/>
+          <a:p>
+            <a:pPr algn="l"/>
+            <a:r>
+              <a:rPr sz="1100" b="1" i="0">
+                <a:solidFill>
+                  <a:srgbClr val="B02121"/>
                 </a:solidFill>
                 <a:latin typeface="Consolas"/>
               </a:rPr>
-              <a:t>EconDis         32/47   −0.147</a:t>
-            </a:r>
-          </a:p>
-          <a:p>
-            <a:pPr algn="l"/>
-            <a:r>
-              <a:rPr sz="1250" b="0" i="0">
+              <a:t>−0.253</a:t>
+            </a:r>
+          </a:p>
+        </p:txBody>
+      </p:sp>
+      <p:sp>
+        <p:nvSpPr>
+          <p:cNvPr id="27" name="TextBox 26"/>
+          <p:cNvSpPr txBox="1"/>
+          <p:nvPr/>
+        </p:nvSpPr>
+        <p:spPr>
+          <a:xfrm>
+            <a:off x="11384280" y="2816352"/>
+            <a:ext cx="457200" cy="274320"/>
+          </a:xfrm>
+          <a:prstGeom prst="rect">
+            <a:avLst/>
+          </a:prstGeom>
+          <a:noFill/>
+        </p:spPr>
+        <p:txBody>
+          <a:bodyPr wrap="square" lIns="0" rIns="0" tIns="0" bIns="0">
+            <a:spAutoFit/>
+          </a:bodyPr>
+          <a:lstStyle/>
+          <a:p>
+            <a:pPr algn="l"/>
+            <a:r>
+              <a:rPr sz="1100" b="1" i="0">
+                <a:solidFill>
+                  <a:srgbClr val="B02121"/>
+                </a:solidFill>
+                <a:latin typeface="Calibri"/>
+              </a:rPr>
+              <a:t>◄</a:t>
+            </a:r>
+          </a:p>
+        </p:txBody>
+      </p:sp>
+      <p:sp>
+        <p:nvSpPr>
+          <p:cNvPr id="28" name="TextBox 27"/>
+          <p:cNvSpPr txBox="1"/>
+          <p:nvPr/>
+        </p:nvSpPr>
+        <p:spPr>
+          <a:xfrm>
+            <a:off x="8183879" y="3145536"/>
+            <a:ext cx="1417320" cy="274320"/>
+          </a:xfrm>
+          <a:prstGeom prst="rect">
+            <a:avLst/>
+          </a:prstGeom>
+          <a:noFill/>
+        </p:spPr>
+        <p:txBody>
+          <a:bodyPr wrap="square" lIns="0" rIns="0" tIns="0" bIns="0">
+            <a:spAutoFit/>
+          </a:bodyPr>
+          <a:lstStyle/>
+          <a:p>
+            <a:pPr algn="l"/>
+            <a:r>
+              <a:rPr sz="1100" b="0" i="0">
+                <a:solidFill>
+                  <a:srgbClr val="333333"/>
+                </a:solidFill>
+                <a:latin typeface="Calibri"/>
+              </a:rPr>
+              <a:t>Black</a:t>
+            </a:r>
+          </a:p>
+        </p:txBody>
+      </p:sp>
+      <p:sp>
+        <p:nvSpPr>
+          <p:cNvPr id="29" name="TextBox 28"/>
+          <p:cNvSpPr txBox="1"/>
+          <p:nvPr/>
+        </p:nvSpPr>
+        <p:spPr>
+          <a:xfrm>
+            <a:off x="9601200" y="3145536"/>
+            <a:ext cx="914400" cy="274320"/>
+          </a:xfrm>
+          <a:prstGeom prst="rect">
+            <a:avLst/>
+          </a:prstGeom>
+          <a:noFill/>
+        </p:spPr>
+        <p:txBody>
+          <a:bodyPr wrap="square" lIns="0" rIns="0" tIns="0" bIns="0">
+            <a:spAutoFit/>
+          </a:bodyPr>
+          <a:lstStyle/>
+          <a:p>
+            <a:pPr algn="l"/>
+            <a:r>
+              <a:rPr sz="1100" b="0" i="0">
                 <a:solidFill>
                   <a:srgbClr val="333333"/>
                 </a:solidFill>
                 <a:latin typeface="Consolas"/>
               </a:rPr>
-              <a:t>Hispanic     12/39   −0.031</a:t>
-            </a:r>
-          </a:p>
-          <a:p>
-            <a:pPr algn="l"/>
-            <a:r>
-              <a:rPr sz="1250" b="0" i="0">
+              <a:t>27/33</a:t>
+            </a:r>
+          </a:p>
+        </p:txBody>
+      </p:sp>
+      <p:sp>
+        <p:nvSpPr>
+          <p:cNvPr id="30" name="TextBox 29"/>
+          <p:cNvSpPr txBox="1"/>
+          <p:nvPr/>
+        </p:nvSpPr>
+        <p:spPr>
+          <a:xfrm>
+            <a:off x="10515600" y="3145536"/>
+            <a:ext cx="868680" cy="274320"/>
+          </a:xfrm>
+          <a:prstGeom prst="rect">
+            <a:avLst/>
+          </a:prstGeom>
+          <a:noFill/>
+        </p:spPr>
+        <p:txBody>
+          <a:bodyPr wrap="square" lIns="0" rIns="0" tIns="0" bIns="0">
+            <a:spAutoFit/>
+          </a:bodyPr>
+          <a:lstStyle/>
+          <a:p>
+            <a:pPr algn="l"/>
+            <a:r>
+              <a:rPr sz="1100" b="0" i="0">
                 <a:solidFill>
                   <a:srgbClr val="333333"/>
                 </a:solidFill>
                 <a:latin typeface="Consolas"/>
               </a:rPr>
-              <a:t/>
-            </a:r>
-          </a:p>
-        </p:txBody>
-      </p:sp>
-      <p:sp>
-        <p:nvSpPr>
-          <p:cNvPr id="9" name="TextBox 8"/>
+              <a:t>−0.274</a:t>
+            </a:r>
+          </a:p>
+        </p:txBody>
+      </p:sp>
+      <p:sp>
+        <p:nvSpPr>
+          <p:cNvPr id="31" name="TextBox 30"/>
+          <p:cNvSpPr txBox="1"/>
+          <p:nvPr/>
+        </p:nvSpPr>
+        <p:spPr>
+          <a:xfrm>
+            <a:off x="8183879" y="3474720"/>
+            <a:ext cx="1417320" cy="274320"/>
+          </a:xfrm>
+          <a:prstGeom prst="rect">
+            <a:avLst/>
+          </a:prstGeom>
+          <a:noFill/>
+        </p:spPr>
+        <p:txBody>
+          <a:bodyPr wrap="square" lIns="0" rIns="0" tIns="0" bIns="0">
+            <a:spAutoFit/>
+          </a:bodyPr>
+          <a:lstStyle/>
+          <a:p>
+            <a:pPr algn="l"/>
+            <a:r>
+              <a:rPr sz="1100" b="0" i="0">
+                <a:solidFill>
+                  <a:srgbClr val="333333"/>
+                </a:solidFill>
+                <a:latin typeface="Calibri"/>
+              </a:rPr>
+              <a:t>EconDis</a:t>
+            </a:r>
+          </a:p>
+        </p:txBody>
+      </p:sp>
+      <p:sp>
+        <p:nvSpPr>
+          <p:cNvPr id="32" name="TextBox 31"/>
+          <p:cNvSpPr txBox="1"/>
+          <p:nvPr/>
+        </p:nvSpPr>
+        <p:spPr>
+          <a:xfrm>
+            <a:off x="9601200" y="3474720"/>
+            <a:ext cx="914400" cy="274320"/>
+          </a:xfrm>
+          <a:prstGeom prst="rect">
+            <a:avLst/>
+          </a:prstGeom>
+          <a:noFill/>
+        </p:spPr>
+        <p:txBody>
+          <a:bodyPr wrap="square" lIns="0" rIns="0" tIns="0" bIns="0">
+            <a:spAutoFit/>
+          </a:bodyPr>
+          <a:lstStyle/>
+          <a:p>
+            <a:pPr algn="l"/>
+            <a:r>
+              <a:rPr sz="1100" b="0" i="0">
+                <a:solidFill>
+                  <a:srgbClr val="333333"/>
+                </a:solidFill>
+                <a:latin typeface="Consolas"/>
+              </a:rPr>
+              <a:t>32/47</a:t>
+            </a:r>
+          </a:p>
+        </p:txBody>
+      </p:sp>
+      <p:sp>
+        <p:nvSpPr>
+          <p:cNvPr id="33" name="TextBox 32"/>
+          <p:cNvSpPr txBox="1"/>
+          <p:nvPr/>
+        </p:nvSpPr>
+        <p:spPr>
+          <a:xfrm>
+            <a:off x="10515600" y="3474720"/>
+            <a:ext cx="868680" cy="274320"/>
+          </a:xfrm>
+          <a:prstGeom prst="rect">
+            <a:avLst/>
+          </a:prstGeom>
+          <a:noFill/>
+        </p:spPr>
+        <p:txBody>
+          <a:bodyPr wrap="square" lIns="0" rIns="0" tIns="0" bIns="0">
+            <a:spAutoFit/>
+          </a:bodyPr>
+          <a:lstStyle/>
+          <a:p>
+            <a:pPr algn="l"/>
+            <a:r>
+              <a:rPr sz="1100" b="0" i="0">
+                <a:solidFill>
+                  <a:srgbClr val="333333"/>
+                </a:solidFill>
+                <a:latin typeface="Consolas"/>
+              </a:rPr>
+              <a:t>−0.147</a:t>
+            </a:r>
+          </a:p>
+        </p:txBody>
+      </p:sp>
+      <p:sp>
+        <p:nvSpPr>
+          <p:cNvPr id="34" name="TextBox 33"/>
+          <p:cNvSpPr txBox="1"/>
+          <p:nvPr/>
+        </p:nvSpPr>
+        <p:spPr>
+          <a:xfrm>
+            <a:off x="8183879" y="3803904"/>
+            <a:ext cx="1417320" cy="274320"/>
+          </a:xfrm>
+          <a:prstGeom prst="rect">
+            <a:avLst/>
+          </a:prstGeom>
+          <a:noFill/>
+        </p:spPr>
+        <p:txBody>
+          <a:bodyPr wrap="square" lIns="0" rIns="0" tIns="0" bIns="0">
+            <a:spAutoFit/>
+          </a:bodyPr>
+          <a:lstStyle/>
+          <a:p>
+            <a:pPr algn="l"/>
+            <a:r>
+              <a:rPr sz="1100" b="0" i="0">
+                <a:solidFill>
+                  <a:srgbClr val="333333"/>
+                </a:solidFill>
+                <a:latin typeface="Calibri"/>
+              </a:rPr>
+              <a:t>Hispanic</a:t>
+            </a:r>
+          </a:p>
+        </p:txBody>
+      </p:sp>
+      <p:sp>
+        <p:nvSpPr>
+          <p:cNvPr id="35" name="TextBox 34"/>
+          <p:cNvSpPr txBox="1"/>
+          <p:nvPr/>
+        </p:nvSpPr>
+        <p:spPr>
+          <a:xfrm>
+            <a:off x="9601200" y="3803904"/>
+            <a:ext cx="914400" cy="274320"/>
+          </a:xfrm>
+          <a:prstGeom prst="rect">
+            <a:avLst/>
+          </a:prstGeom>
+          <a:noFill/>
+        </p:spPr>
+        <p:txBody>
+          <a:bodyPr wrap="square" lIns="0" rIns="0" tIns="0" bIns="0">
+            <a:spAutoFit/>
+          </a:bodyPr>
+          <a:lstStyle/>
+          <a:p>
+            <a:pPr algn="l"/>
+            <a:r>
+              <a:rPr sz="1100" b="0" i="0">
+                <a:solidFill>
+                  <a:srgbClr val="333333"/>
+                </a:solidFill>
+                <a:latin typeface="Consolas"/>
+              </a:rPr>
+              <a:t>12/39</a:t>
+            </a:r>
+          </a:p>
+        </p:txBody>
+      </p:sp>
+      <p:sp>
+        <p:nvSpPr>
+          <p:cNvPr id="36" name="TextBox 35"/>
+          <p:cNvSpPr txBox="1"/>
+          <p:nvPr/>
+        </p:nvSpPr>
+        <p:spPr>
+          <a:xfrm>
+            <a:off x="10515600" y="3803904"/>
+            <a:ext cx="868680" cy="274320"/>
+          </a:xfrm>
+          <a:prstGeom prst="rect">
+            <a:avLst/>
+          </a:prstGeom>
+          <a:noFill/>
+        </p:spPr>
+        <p:txBody>
+          <a:bodyPr wrap="square" lIns="0" rIns="0" tIns="0" bIns="0">
+            <a:spAutoFit/>
+          </a:bodyPr>
+          <a:lstStyle/>
+          <a:p>
+            <a:pPr algn="l"/>
+            <a:r>
+              <a:rPr sz="1100" b="0" i="0">
+                <a:solidFill>
+                  <a:srgbClr val="333333"/>
+                </a:solidFill>
+                <a:latin typeface="Consolas"/>
+              </a:rPr>
+              <a:t>−0.031</a:t>
+            </a:r>
+          </a:p>
+        </p:txBody>
+      </p:sp>
+      <p:sp>
+        <p:nvSpPr>
+          <p:cNvPr id="37" name="TextBox 36"/>
           <p:cNvSpPr txBox="1"/>
           <p:nvPr/>
         </p:nvSpPr>
@@ -35396,7 +38316,7 @@
       </p:sp>
       <p:sp>
         <p:nvSpPr>
-          <p:cNvPr id="10" name="TextBox 9"/>
+          <p:cNvPr id="38" name="TextBox 37"/>
           <p:cNvSpPr txBox="1"/>
           <p:nvPr/>
         </p:nvSpPr>
@@ -35455,7 +38375,7 @@
       </p:sp>
       <p:sp>
         <p:nvSpPr>
-          <p:cNvPr id="11" name="TextBox 10"/>
+          <p:cNvPr id="39" name="TextBox 38"/>
           <p:cNvSpPr txBox="1"/>
           <p:nvPr/>
         </p:nvSpPr>
@@ -35490,7 +38410,7 @@
       </p:sp>
       <p:sp>
         <p:nvSpPr>
-          <p:cNvPr id="12" name="TextBox 11"/>
+          <p:cNvPr id="40" name="TextBox 39"/>
           <p:cNvSpPr txBox="1"/>
           <p:nvPr/>
         </p:nvSpPr>

--- a/deck/Troy_K5_ELA_Executive_Summary.pptx
+++ b/deck/Troy_K5_ELA_Executive_Summary.pptx
@@ -8528,7 +8528,7 @@
         <p:spPr>
           <a:xfrm>
             <a:off x="365760" y="868680"/>
-            <a:ext cx="7772400" cy="4185138"/>
+            <a:ext cx="7772400" cy="2989647"/>
           </a:xfrm>
           <a:prstGeom prst="rect">
             <a:avLst/>
@@ -9350,7 +9350,7 @@
         <p:spPr>
           <a:xfrm>
             <a:off x="365760" y="868680"/>
-            <a:ext cx="7772400" cy="2989647"/>
+            <a:ext cx="7772400" cy="2992272"/>
           </a:xfrm>
           <a:prstGeom prst="rect">
             <a:avLst/>
@@ -10934,7 +10934,7 @@
         <p:spPr>
           <a:xfrm>
             <a:off x="365760" y="1691640"/>
-            <a:ext cx="5669280" cy="4572000"/>
+            <a:ext cx="5669280" cy="4206240"/>
           </a:xfrm>
           <a:prstGeom prst="rect">
             <a:avLst/>
@@ -11013,7 +11013,7 @@
         <p:spPr>
           <a:xfrm>
             <a:off x="502920" y="2194560"/>
-            <a:ext cx="5486400" cy="4023360"/>
+            <a:ext cx="5486400" cy="3657600"/>
           </a:xfrm>
           <a:prstGeom prst="rect">
             <a:avLst/>
@@ -11204,7 +11204,7 @@
         <p:spPr>
           <a:xfrm>
             <a:off x="6172200" y="1691640"/>
-            <a:ext cx="5623560" cy="4572000"/>
+            <a:ext cx="5623560" cy="4206240"/>
           </a:xfrm>
           <a:prstGeom prst="rect">
             <a:avLst/>
@@ -11283,7 +11283,7 @@
         <p:spPr>
           <a:xfrm>
             <a:off x="6309360" y="2194560"/>
-            <a:ext cx="5486400" cy="4023360"/>
+            <a:ext cx="5486400" cy="3657600"/>
           </a:xfrm>
           <a:prstGeom prst="rect">
             <a:avLst/>
@@ -11485,8 +11485,8 @@
         </p:nvSpPr>
         <p:spPr>
           <a:xfrm>
-            <a:off x="365760" y="6355080"/>
-            <a:ext cx="11430000" cy="411480"/>
+            <a:off x="365760" y="5989320"/>
+            <a:ext cx="11430000" cy="384048"/>
           </a:xfrm>
           <a:prstGeom prst="rect">
             <a:avLst/>
@@ -11529,7 +11529,7 @@
         </p:nvSpPr>
         <p:spPr>
           <a:xfrm>
-            <a:off x="502920" y="6400800"/>
+            <a:off x="502920" y="6035040"/>
             <a:ext cx="2560320" cy="274320"/>
           </a:xfrm>
           <a:prstGeom prst="rect">
@@ -11564,7 +11564,7 @@
         </p:nvSpPr>
         <p:spPr>
           <a:xfrm>
-            <a:off x="3108960" y="6400800"/>
+            <a:off x="3108960" y="6035040"/>
             <a:ext cx="8686800" cy="320040"/>
           </a:xfrm>
           <a:prstGeom prst="rect">
@@ -29671,7 +29671,7 @@
         <p:spPr>
           <a:xfrm>
             <a:off x="365760" y="868680"/>
-            <a:ext cx="7498079" cy="7498079"/>
+            <a:ext cx="7498079" cy="5394438"/>
           </a:xfrm>
           <a:prstGeom prst="rect">
             <a:avLst/>

--- a/deck/Troy_K5_ELA_Executive_Summary.pptx
+++ b/deck/Troy_K5_ELA_Executive_Summary.pptx
@@ -3578,7 +3578,7 @@
         <p:spPr>
           <a:xfrm>
             <a:off x="8183879" y="914400"/>
-            <a:ext cx="3749039" cy="2697480"/>
+            <a:ext cx="3749039" cy="2880360"/>
           </a:xfrm>
           <a:prstGeom prst="rect">
             <a:avLst/>
@@ -4295,8 +4295,8 @@
         </p:nvSpPr>
         <p:spPr>
           <a:xfrm>
-            <a:off x="8183879" y="3703320"/>
-            <a:ext cx="3749039" cy="2423160"/>
+            <a:off x="8183879" y="3886200"/>
+            <a:ext cx="3749039" cy="2240280"/>
           </a:xfrm>
           <a:prstGeom prst="rect">
             <a:avLst/>
@@ -4339,7 +4339,7 @@
         </p:nvSpPr>
         <p:spPr>
           <a:xfrm>
-            <a:off x="8321040" y="3767328"/>
+            <a:off x="8321040" y="3950208"/>
             <a:ext cx="3520440" cy="292608"/>
           </a:xfrm>
           <a:prstGeom prst="rect">
@@ -4374,8 +4374,8 @@
         </p:nvSpPr>
         <p:spPr>
           <a:xfrm>
-            <a:off x="8321040" y="4114800"/>
-            <a:ext cx="3520440" cy="1965960"/>
+            <a:off x="8321040" y="4251960"/>
+            <a:ext cx="3520440" cy="1828800"/>
           </a:xfrm>
           <a:prstGeom prst="rect">
             <a:avLst/>
@@ -4596,23 +4596,23 @@
         </p:nvSpPr>
         <p:spPr>
           <a:xfrm>
-            <a:off x="365760" y="6537960"/>
-            <a:ext cx="7315200" cy="274320"/>
-          </a:xfrm>
-          <a:prstGeom prst="rect">
-            <a:avLst/>
-          </a:prstGeom>
-          <a:noFill/>
-        </p:spPr>
-        <p:txBody>
-          <a:bodyPr wrap="square" lIns="0" rIns="0" tIns="0" bIns="0">
-            <a:spAutoFit/>
-          </a:bodyPr>
-          <a:lstStyle/>
-          <a:p>
-            <a:pPr algn="l"/>
-            <a:r>
-              <a:rPr sz="850" b="0" i="0">
+            <a:off x="365760" y="6601968"/>
+            <a:ext cx="7315200" cy="228600"/>
+          </a:xfrm>
+          <a:prstGeom prst="rect">
+            <a:avLst/>
+          </a:prstGeom>
+          <a:noFill/>
+        </p:spPr>
+        <p:txBody>
+          <a:bodyPr wrap="square" lIns="0" rIns="0" tIns="0" bIns="0">
+            <a:spAutoFit/>
+          </a:bodyPr>
+          <a:lstStyle/>
+          <a:p>
+            <a:pPr algn="l"/>
+            <a:r>
+              <a:rPr sz="800" b="0" i="0">
                 <a:solidFill>
                   <a:srgbClr val="707070"/>
                 </a:solidFill>
@@ -4631,8 +4631,8 @@
         </p:nvSpPr>
         <p:spPr>
           <a:xfrm>
-            <a:off x="10515600" y="6537960"/>
-            <a:ext cx="1371600" cy="274320"/>
+            <a:off x="10515600" y="6601968"/>
+            <a:ext cx="1371600" cy="228600"/>
           </a:xfrm>
           <a:prstGeom prst="rect">
             <a:avLst/>
@@ -4647,7 +4647,7 @@
           <a:p>
             <a:pPr algn="r"/>
             <a:r>
-              <a:rPr sz="850" b="0" i="0">
+              <a:rPr sz="800" b="0" i="0">
                 <a:solidFill>
                   <a:srgbClr val="707070"/>
                 </a:solidFill>
@@ -4805,7 +4805,7 @@
             <a:avLst/>
           </a:prstGeom>
           <a:solidFill>
-            <a:srgbClr val="999933"/>
+            <a:srgbClr val="1F3A5F"/>
           </a:solidFill>
           <a:ln>
             <a:noFill/>
@@ -5002,7 +5002,7 @@
             <a:avLst/>
           </a:prstGeom>
           <a:solidFill>
-            <a:srgbClr val="996633"/>
+            <a:srgbClr val="CC6A11"/>
           </a:solidFill>
           <a:ln>
             <a:noFill/>
@@ -5199,7 +5199,7 @@
             <a:avLst/>
           </a:prstGeom>
           <a:solidFill>
-            <a:srgbClr val="993322"/>
+            <a:srgbClr val="B02121"/>
           </a:solidFill>
           <a:ln>
             <a:noFill/>
@@ -5389,23 +5389,23 @@
         </p:nvSpPr>
         <p:spPr>
           <a:xfrm>
-            <a:off x="365760" y="6537960"/>
-            <a:ext cx="7315200" cy="274320"/>
-          </a:xfrm>
-          <a:prstGeom prst="rect">
-            <a:avLst/>
-          </a:prstGeom>
-          <a:noFill/>
-        </p:spPr>
-        <p:txBody>
-          <a:bodyPr wrap="square" lIns="0" rIns="0" tIns="0" bIns="0">
-            <a:spAutoFit/>
-          </a:bodyPr>
-          <a:lstStyle/>
-          <a:p>
-            <a:pPr algn="l"/>
-            <a:r>
-              <a:rPr sz="850" b="0" i="0">
+            <a:off x="365760" y="6601968"/>
+            <a:ext cx="7315200" cy="228600"/>
+          </a:xfrm>
+          <a:prstGeom prst="rect">
+            <a:avLst/>
+          </a:prstGeom>
+          <a:noFill/>
+        </p:spPr>
+        <p:txBody>
+          <a:bodyPr wrap="square" lIns="0" rIns="0" tIns="0" bIns="0">
+            <a:spAutoFit/>
+          </a:bodyPr>
+          <a:lstStyle/>
+          <a:p>
+            <a:pPr algn="l"/>
+            <a:r>
+              <a:rPr sz="800" b="0" i="0">
                 <a:solidFill>
                   <a:srgbClr val="707070"/>
                 </a:solidFill>
@@ -5424,8 +5424,8 @@
         </p:nvSpPr>
         <p:spPr>
           <a:xfrm>
-            <a:off x="10515600" y="6537960"/>
-            <a:ext cx="1371600" cy="274320"/>
+            <a:off x="10515600" y="6601968"/>
+            <a:ext cx="1371600" cy="228600"/>
           </a:xfrm>
           <a:prstGeom prst="rect">
             <a:avLst/>
@@ -5440,7 +5440,7 @@
           <a:p>
             <a:pPr algn="r"/>
             <a:r>
-              <a:rPr sz="850" b="0" i="0">
+              <a:rPr sz="800" b="0" i="0">
                 <a:solidFill>
                   <a:srgbClr val="707070"/>
                 </a:solidFill>
@@ -5600,7 +5600,7 @@
         <p:spPr>
           <a:xfrm>
             <a:off x="365760" y="914400"/>
-            <a:ext cx="7132320" cy="6537960"/>
+            <a:ext cx="5835535" cy="5349240"/>
           </a:xfrm>
           <a:prstGeom prst="rect">
             <a:avLst/>
@@ -5615,8 +5615,8 @@
         </p:nvSpPr>
         <p:spPr>
           <a:xfrm>
-            <a:off x="7680960" y="914400"/>
-            <a:ext cx="4297680" cy="5486400"/>
+            <a:off x="6400800" y="914400"/>
+            <a:ext cx="5486400" cy="5349240"/>
           </a:xfrm>
           <a:prstGeom prst="rect">
             <a:avLst/>
@@ -5659,8 +5659,8 @@
         </p:nvSpPr>
         <p:spPr>
           <a:xfrm>
-            <a:off x="7818120" y="1051560"/>
-            <a:ext cx="4023360" cy="365760"/>
+            <a:off x="6537960" y="1051560"/>
+            <a:ext cx="5212080" cy="365760"/>
           </a:xfrm>
           <a:prstGeom prst="rect">
             <a:avLst/>
@@ -5694,8 +5694,8 @@
         </p:nvSpPr>
         <p:spPr>
           <a:xfrm>
-            <a:off x="7818120" y="1417320"/>
-            <a:ext cx="4023360" cy="1463040"/>
+            <a:off x="6537960" y="1417320"/>
+            <a:ext cx="5212080" cy="1463040"/>
           </a:xfrm>
           <a:prstGeom prst="rect">
             <a:avLst/>
@@ -5777,8 +5777,8 @@
         </p:nvSpPr>
         <p:spPr>
           <a:xfrm>
-            <a:off x="7818120" y="2971800"/>
-            <a:ext cx="4023360" cy="365760"/>
+            <a:off x="6537960" y="2971800"/>
+            <a:ext cx="5212080" cy="365760"/>
           </a:xfrm>
           <a:prstGeom prst="rect">
             <a:avLst/>
@@ -5812,8 +5812,8 @@
         </p:nvSpPr>
         <p:spPr>
           <a:xfrm>
-            <a:off x="7818120" y="3337560"/>
-            <a:ext cx="4023360" cy="1463040"/>
+            <a:off x="6537960" y="3337560"/>
+            <a:ext cx="5212080" cy="1463040"/>
           </a:xfrm>
           <a:prstGeom prst="rect">
             <a:avLst/>
@@ -5895,8 +5895,8 @@
         </p:nvSpPr>
         <p:spPr>
           <a:xfrm>
-            <a:off x="7818120" y="4937760"/>
-            <a:ext cx="4023360" cy="365760"/>
+            <a:off x="6537960" y="4937760"/>
+            <a:ext cx="5212080" cy="365760"/>
           </a:xfrm>
           <a:prstGeom prst="rect">
             <a:avLst/>
@@ -5930,8 +5930,8 @@
         </p:nvSpPr>
         <p:spPr>
           <a:xfrm>
-            <a:off x="7818120" y="5303520"/>
-            <a:ext cx="4023360" cy="1280160"/>
+            <a:off x="6537960" y="5303520"/>
+            <a:ext cx="5212080" cy="914400"/>
           </a:xfrm>
           <a:prstGeom prst="rect">
             <a:avLst/>
@@ -5989,23 +5989,23 @@
         </p:nvSpPr>
         <p:spPr>
           <a:xfrm>
-            <a:off x="365760" y="6537960"/>
-            <a:ext cx="7315200" cy="274320"/>
-          </a:xfrm>
-          <a:prstGeom prst="rect">
-            <a:avLst/>
-          </a:prstGeom>
-          <a:noFill/>
-        </p:spPr>
-        <p:txBody>
-          <a:bodyPr wrap="square" lIns="0" rIns="0" tIns="0" bIns="0">
-            <a:spAutoFit/>
-          </a:bodyPr>
-          <a:lstStyle/>
-          <a:p>
-            <a:pPr algn="l"/>
-            <a:r>
-              <a:rPr sz="850" b="0" i="0">
+            <a:off x="365760" y="6601968"/>
+            <a:ext cx="7315200" cy="228600"/>
+          </a:xfrm>
+          <a:prstGeom prst="rect">
+            <a:avLst/>
+          </a:prstGeom>
+          <a:noFill/>
+        </p:spPr>
+        <p:txBody>
+          <a:bodyPr wrap="square" lIns="0" rIns="0" tIns="0" bIns="0">
+            <a:spAutoFit/>
+          </a:bodyPr>
+          <a:lstStyle/>
+          <a:p>
+            <a:pPr algn="l"/>
+            <a:r>
+              <a:rPr sz="800" b="0" i="0">
                 <a:solidFill>
                   <a:srgbClr val="707070"/>
                 </a:solidFill>
@@ -6024,8 +6024,8 @@
         </p:nvSpPr>
         <p:spPr>
           <a:xfrm>
-            <a:off x="10515600" y="6537960"/>
-            <a:ext cx="1371600" cy="274320"/>
+            <a:off x="10515600" y="6601968"/>
+            <a:ext cx="1371600" cy="228600"/>
           </a:xfrm>
           <a:prstGeom prst="rect">
             <a:avLst/>
@@ -6040,7 +6040,7 @@
           <a:p>
             <a:pPr algn="r"/>
             <a:r>
-              <a:rPr sz="850" b="0" i="0">
+              <a:rPr sz="800" b="0" i="0">
                 <a:solidFill>
                   <a:srgbClr val="707070"/>
                 </a:solidFill>
@@ -6565,23 +6565,23 @@
         </p:nvSpPr>
         <p:spPr>
           <a:xfrm>
-            <a:off x="365760" y="6537960"/>
-            <a:ext cx="7315200" cy="274320"/>
-          </a:xfrm>
-          <a:prstGeom prst="rect">
-            <a:avLst/>
-          </a:prstGeom>
-          <a:noFill/>
-        </p:spPr>
-        <p:txBody>
-          <a:bodyPr wrap="square" lIns="0" rIns="0" tIns="0" bIns="0">
-            <a:spAutoFit/>
-          </a:bodyPr>
-          <a:lstStyle/>
-          <a:p>
-            <a:pPr algn="l"/>
-            <a:r>
-              <a:rPr sz="850" b="0" i="0">
+            <a:off x="365760" y="6601968"/>
+            <a:ext cx="7315200" cy="228600"/>
+          </a:xfrm>
+          <a:prstGeom prst="rect">
+            <a:avLst/>
+          </a:prstGeom>
+          <a:noFill/>
+        </p:spPr>
+        <p:txBody>
+          <a:bodyPr wrap="square" lIns="0" rIns="0" tIns="0" bIns="0">
+            <a:spAutoFit/>
+          </a:bodyPr>
+          <a:lstStyle/>
+          <a:p>
+            <a:pPr algn="l"/>
+            <a:r>
+              <a:rPr sz="800" b="0" i="0">
                 <a:solidFill>
                   <a:srgbClr val="707070"/>
                 </a:solidFill>
@@ -6600,8 +6600,8 @@
         </p:nvSpPr>
         <p:spPr>
           <a:xfrm>
-            <a:off x="10515600" y="6537960"/>
-            <a:ext cx="1371600" cy="274320"/>
+            <a:off x="10515600" y="6601968"/>
+            <a:ext cx="1371600" cy="228600"/>
           </a:xfrm>
           <a:prstGeom prst="rect">
             <a:avLst/>
@@ -6616,7 +6616,7 @@
           <a:p>
             <a:pPr algn="r"/>
             <a:r>
-              <a:rPr sz="850" b="0" i="0">
+              <a:rPr sz="800" b="0" i="0">
                 <a:solidFill>
                   <a:srgbClr val="707070"/>
                 </a:solidFill>
@@ -7187,23 +7187,23 @@
         </p:nvSpPr>
         <p:spPr>
           <a:xfrm>
-            <a:off x="365760" y="6537960"/>
-            <a:ext cx="7315200" cy="274320"/>
-          </a:xfrm>
-          <a:prstGeom prst="rect">
-            <a:avLst/>
-          </a:prstGeom>
-          <a:noFill/>
-        </p:spPr>
-        <p:txBody>
-          <a:bodyPr wrap="square" lIns="0" rIns="0" tIns="0" bIns="0">
-            <a:spAutoFit/>
-          </a:bodyPr>
-          <a:lstStyle/>
-          <a:p>
-            <a:pPr algn="l"/>
-            <a:r>
-              <a:rPr sz="850" b="0" i="0">
+            <a:off x="365760" y="6601968"/>
+            <a:ext cx="7315200" cy="228600"/>
+          </a:xfrm>
+          <a:prstGeom prst="rect">
+            <a:avLst/>
+          </a:prstGeom>
+          <a:noFill/>
+        </p:spPr>
+        <p:txBody>
+          <a:bodyPr wrap="square" lIns="0" rIns="0" tIns="0" bIns="0">
+            <a:spAutoFit/>
+          </a:bodyPr>
+          <a:lstStyle/>
+          <a:p>
+            <a:pPr algn="l"/>
+            <a:r>
+              <a:rPr sz="800" b="0" i="0">
                 <a:solidFill>
                   <a:srgbClr val="707070"/>
                 </a:solidFill>
@@ -7222,8 +7222,8 @@
         </p:nvSpPr>
         <p:spPr>
           <a:xfrm>
-            <a:off x="10515600" y="6537960"/>
-            <a:ext cx="1371600" cy="274320"/>
+            <a:off x="10515600" y="6601968"/>
+            <a:ext cx="1371600" cy="228600"/>
           </a:xfrm>
           <a:prstGeom prst="rect">
             <a:avLst/>
@@ -7238,7 +7238,7 @@
           <a:p>
             <a:pPr algn="r"/>
             <a:r>
-              <a:rPr sz="850" b="0" i="0">
+              <a:rPr sz="800" b="0" i="0">
                 <a:solidFill>
                   <a:srgbClr val="707070"/>
                 </a:solidFill>
@@ -8317,23 +8317,23 @@
         </p:nvSpPr>
         <p:spPr>
           <a:xfrm>
-            <a:off x="365760" y="6537960"/>
-            <a:ext cx="7315200" cy="274320"/>
-          </a:xfrm>
-          <a:prstGeom prst="rect">
-            <a:avLst/>
-          </a:prstGeom>
-          <a:noFill/>
-        </p:spPr>
-        <p:txBody>
-          <a:bodyPr wrap="square" lIns="0" rIns="0" tIns="0" bIns="0">
-            <a:spAutoFit/>
-          </a:bodyPr>
-          <a:lstStyle/>
-          <a:p>
-            <a:pPr algn="l"/>
-            <a:r>
-              <a:rPr sz="850" b="0" i="0">
+            <a:off x="365760" y="6601968"/>
+            <a:ext cx="7315200" cy="228600"/>
+          </a:xfrm>
+          <a:prstGeom prst="rect">
+            <a:avLst/>
+          </a:prstGeom>
+          <a:noFill/>
+        </p:spPr>
+        <p:txBody>
+          <a:bodyPr wrap="square" lIns="0" rIns="0" tIns="0" bIns="0">
+            <a:spAutoFit/>
+          </a:bodyPr>
+          <a:lstStyle/>
+          <a:p>
+            <a:pPr algn="l"/>
+            <a:r>
+              <a:rPr sz="800" b="0" i="0">
                 <a:solidFill>
                   <a:srgbClr val="707070"/>
                 </a:solidFill>
@@ -8352,8 +8352,8 @@
         </p:nvSpPr>
         <p:spPr>
           <a:xfrm>
-            <a:off x="10515600" y="6537960"/>
-            <a:ext cx="1371600" cy="274320"/>
+            <a:off x="10515600" y="6601968"/>
+            <a:ext cx="1371600" cy="228600"/>
           </a:xfrm>
           <a:prstGeom prst="rect">
             <a:avLst/>
@@ -8368,7 +8368,7 @@
           <a:p>
             <a:pPr algn="r"/>
             <a:r>
-              <a:rPr sz="850" b="0" i="0">
+              <a:rPr sz="800" b="0" i="0">
                 <a:solidFill>
                   <a:srgbClr val="707070"/>
                 </a:solidFill>
@@ -8528,7 +8528,7 @@
         <p:spPr>
           <a:xfrm>
             <a:off x="365760" y="868680"/>
-            <a:ext cx="7772400" cy="2989647"/>
+            <a:ext cx="7772400" cy="5035015"/>
           </a:xfrm>
           <a:prstGeom prst="rect">
             <a:avLst/>
@@ -9139,23 +9139,23 @@
         </p:nvSpPr>
         <p:spPr>
           <a:xfrm>
-            <a:off x="365760" y="6537960"/>
-            <a:ext cx="7315200" cy="274320"/>
-          </a:xfrm>
-          <a:prstGeom prst="rect">
-            <a:avLst/>
-          </a:prstGeom>
-          <a:noFill/>
-        </p:spPr>
-        <p:txBody>
-          <a:bodyPr wrap="square" lIns="0" rIns="0" tIns="0" bIns="0">
-            <a:spAutoFit/>
-          </a:bodyPr>
-          <a:lstStyle/>
-          <a:p>
-            <a:pPr algn="l"/>
-            <a:r>
-              <a:rPr sz="850" b="0" i="0">
+            <a:off x="365760" y="6601968"/>
+            <a:ext cx="7315200" cy="228600"/>
+          </a:xfrm>
+          <a:prstGeom prst="rect">
+            <a:avLst/>
+          </a:prstGeom>
+          <a:noFill/>
+        </p:spPr>
+        <p:txBody>
+          <a:bodyPr wrap="square" lIns="0" rIns="0" tIns="0" bIns="0">
+            <a:spAutoFit/>
+          </a:bodyPr>
+          <a:lstStyle/>
+          <a:p>
+            <a:pPr algn="l"/>
+            <a:r>
+              <a:rPr sz="800" b="0" i="0">
                 <a:solidFill>
                   <a:srgbClr val="707070"/>
                 </a:solidFill>
@@ -9174,8 +9174,8 @@
         </p:nvSpPr>
         <p:spPr>
           <a:xfrm>
-            <a:off x="10515600" y="6537960"/>
-            <a:ext cx="1371600" cy="274320"/>
+            <a:off x="10515600" y="6601968"/>
+            <a:ext cx="1371600" cy="228600"/>
           </a:xfrm>
           <a:prstGeom prst="rect">
             <a:avLst/>
@@ -9190,7 +9190,7 @@
           <a:p>
             <a:pPr algn="r"/>
             <a:r>
-              <a:rPr sz="850" b="0" i="0">
+              <a:rPr sz="800" b="0" i="0">
                 <a:solidFill>
                   <a:srgbClr val="707070"/>
                 </a:solidFill>
@@ -9350,7 +9350,7 @@
         <p:spPr>
           <a:xfrm>
             <a:off x="365760" y="868680"/>
-            <a:ext cx="7772400" cy="2992272"/>
+            <a:ext cx="7772400" cy="5039436"/>
           </a:xfrm>
           <a:prstGeom prst="rect">
             <a:avLst/>
@@ -9713,23 +9713,23 @@
         </p:nvSpPr>
         <p:spPr>
           <a:xfrm>
-            <a:off x="365760" y="6537960"/>
-            <a:ext cx="7315200" cy="274320"/>
-          </a:xfrm>
-          <a:prstGeom prst="rect">
-            <a:avLst/>
-          </a:prstGeom>
-          <a:noFill/>
-        </p:spPr>
-        <p:txBody>
-          <a:bodyPr wrap="square" lIns="0" rIns="0" tIns="0" bIns="0">
-            <a:spAutoFit/>
-          </a:bodyPr>
-          <a:lstStyle/>
-          <a:p>
-            <a:pPr algn="l"/>
-            <a:r>
-              <a:rPr sz="850" b="0" i="0">
+            <a:off x="365760" y="6601968"/>
+            <a:ext cx="7315200" cy="228600"/>
+          </a:xfrm>
+          <a:prstGeom prst="rect">
+            <a:avLst/>
+          </a:prstGeom>
+          <a:noFill/>
+        </p:spPr>
+        <p:txBody>
+          <a:bodyPr wrap="square" lIns="0" rIns="0" tIns="0" bIns="0">
+            <a:spAutoFit/>
+          </a:bodyPr>
+          <a:lstStyle/>
+          <a:p>
+            <a:pPr algn="l"/>
+            <a:r>
+              <a:rPr sz="800" b="0" i="0">
                 <a:solidFill>
                   <a:srgbClr val="707070"/>
                 </a:solidFill>
@@ -9748,8 +9748,8 @@
         </p:nvSpPr>
         <p:spPr>
           <a:xfrm>
-            <a:off x="10515600" y="6537960"/>
-            <a:ext cx="1371600" cy="274320"/>
+            <a:off x="10515600" y="6601968"/>
+            <a:ext cx="1371600" cy="228600"/>
           </a:xfrm>
           <a:prstGeom prst="rect">
             <a:avLst/>
@@ -9764,7 +9764,7 @@
           <a:p>
             <a:pPr algn="r"/>
             <a:r>
-              <a:rPr sz="850" b="0" i="0">
+              <a:rPr sz="800" b="0" i="0">
                 <a:solidFill>
                   <a:srgbClr val="707070"/>
                 </a:solidFill>
@@ -10617,23 +10617,23 @@
         </p:nvSpPr>
         <p:spPr>
           <a:xfrm>
-            <a:off x="365760" y="6537960"/>
-            <a:ext cx="7315200" cy="274320"/>
-          </a:xfrm>
-          <a:prstGeom prst="rect">
-            <a:avLst/>
-          </a:prstGeom>
-          <a:noFill/>
-        </p:spPr>
-        <p:txBody>
-          <a:bodyPr wrap="square" lIns="0" rIns="0" tIns="0" bIns="0">
-            <a:spAutoFit/>
-          </a:bodyPr>
-          <a:lstStyle/>
-          <a:p>
-            <a:pPr algn="l"/>
-            <a:r>
-              <a:rPr sz="850" b="0" i="0">
+            <a:off x="365760" y="6601968"/>
+            <a:ext cx="7315200" cy="228600"/>
+          </a:xfrm>
+          <a:prstGeom prst="rect">
+            <a:avLst/>
+          </a:prstGeom>
+          <a:noFill/>
+        </p:spPr>
+        <p:txBody>
+          <a:bodyPr wrap="square" lIns="0" rIns="0" tIns="0" bIns="0">
+            <a:spAutoFit/>
+          </a:bodyPr>
+          <a:lstStyle/>
+          <a:p>
+            <a:pPr algn="l"/>
+            <a:r>
+              <a:rPr sz="800" b="0" i="0">
                 <a:solidFill>
                   <a:srgbClr val="707070"/>
                 </a:solidFill>
@@ -10652,8 +10652,8 @@
         </p:nvSpPr>
         <p:spPr>
           <a:xfrm>
-            <a:off x="10515600" y="6537960"/>
-            <a:ext cx="1371600" cy="274320"/>
+            <a:off x="10515600" y="6601968"/>
+            <a:ext cx="1371600" cy="228600"/>
           </a:xfrm>
           <a:prstGeom prst="rect">
             <a:avLst/>
@@ -10668,7 +10668,7 @@
           <a:p>
             <a:pPr algn="r"/>
             <a:r>
-              <a:rPr sz="850" b="0" i="0">
+              <a:rPr sz="800" b="0" i="0">
                 <a:solidFill>
                   <a:srgbClr val="707070"/>
                 </a:solidFill>
@@ -11599,23 +11599,23 @@
         </p:nvSpPr>
         <p:spPr>
           <a:xfrm>
-            <a:off x="365760" y="6537960"/>
-            <a:ext cx="7315200" cy="274320"/>
-          </a:xfrm>
-          <a:prstGeom prst="rect">
-            <a:avLst/>
-          </a:prstGeom>
-          <a:noFill/>
-        </p:spPr>
-        <p:txBody>
-          <a:bodyPr wrap="square" lIns="0" rIns="0" tIns="0" bIns="0">
-            <a:spAutoFit/>
-          </a:bodyPr>
-          <a:lstStyle/>
-          <a:p>
-            <a:pPr algn="l"/>
-            <a:r>
-              <a:rPr sz="850" b="0" i="0">
+            <a:off x="365760" y="6601968"/>
+            <a:ext cx="7315200" cy="228600"/>
+          </a:xfrm>
+          <a:prstGeom prst="rect">
+            <a:avLst/>
+          </a:prstGeom>
+          <a:noFill/>
+        </p:spPr>
+        <p:txBody>
+          <a:bodyPr wrap="square" lIns="0" rIns="0" tIns="0" bIns="0">
+            <a:spAutoFit/>
+          </a:bodyPr>
+          <a:lstStyle/>
+          <a:p>
+            <a:pPr algn="l"/>
+            <a:r>
+              <a:rPr sz="800" b="0" i="0">
                 <a:solidFill>
                   <a:srgbClr val="707070"/>
                 </a:solidFill>
@@ -11634,8 +11634,8 @@
         </p:nvSpPr>
         <p:spPr>
           <a:xfrm>
-            <a:off x="10515600" y="6537960"/>
-            <a:ext cx="1371600" cy="274320"/>
+            <a:off x="10515600" y="6601968"/>
+            <a:ext cx="1371600" cy="228600"/>
           </a:xfrm>
           <a:prstGeom prst="rect">
             <a:avLst/>
@@ -11650,7 +11650,7 @@
           <a:p>
             <a:pPr algn="r"/>
             <a:r>
-              <a:rPr sz="850" b="0" i="0">
+              <a:rPr sz="800" b="0" i="0">
                 <a:solidFill>
                   <a:srgbClr val="707070"/>
                 </a:solidFill>
@@ -12735,23 +12735,23 @@
         </p:nvSpPr>
         <p:spPr>
           <a:xfrm>
-            <a:off x="365760" y="6537960"/>
-            <a:ext cx="7315200" cy="274320"/>
-          </a:xfrm>
-          <a:prstGeom prst="rect">
-            <a:avLst/>
-          </a:prstGeom>
-          <a:noFill/>
-        </p:spPr>
-        <p:txBody>
-          <a:bodyPr wrap="square" lIns="0" rIns="0" tIns="0" bIns="0">
-            <a:spAutoFit/>
-          </a:bodyPr>
-          <a:lstStyle/>
-          <a:p>
-            <a:pPr algn="l"/>
-            <a:r>
-              <a:rPr sz="850" b="0" i="0">
+            <a:off x="365760" y="6601968"/>
+            <a:ext cx="7315200" cy="228600"/>
+          </a:xfrm>
+          <a:prstGeom prst="rect">
+            <a:avLst/>
+          </a:prstGeom>
+          <a:noFill/>
+        </p:spPr>
+        <p:txBody>
+          <a:bodyPr wrap="square" lIns="0" rIns="0" tIns="0" bIns="0">
+            <a:spAutoFit/>
+          </a:bodyPr>
+          <a:lstStyle/>
+          <a:p>
+            <a:pPr algn="l"/>
+            <a:r>
+              <a:rPr sz="800" b="0" i="0">
                 <a:solidFill>
                   <a:srgbClr val="707070"/>
                 </a:solidFill>
@@ -12770,8 +12770,8 @@
         </p:nvSpPr>
         <p:spPr>
           <a:xfrm>
-            <a:off x="10515600" y="6537960"/>
-            <a:ext cx="1371600" cy="274320"/>
+            <a:off x="10515600" y="6601968"/>
+            <a:ext cx="1371600" cy="228600"/>
           </a:xfrm>
           <a:prstGeom prst="rect">
             <a:avLst/>
@@ -12786,7 +12786,7 @@
           <a:p>
             <a:pPr algn="r"/>
             <a:r>
-              <a:rPr sz="850" b="0" i="0">
+              <a:rPr sz="800" b="0" i="0">
                 <a:solidFill>
                   <a:srgbClr val="707070"/>
                 </a:solidFill>
@@ -15317,23 +15317,23 @@
         </p:nvSpPr>
         <p:spPr>
           <a:xfrm>
-            <a:off x="365760" y="6537960"/>
-            <a:ext cx="7315200" cy="274320"/>
-          </a:xfrm>
-          <a:prstGeom prst="rect">
-            <a:avLst/>
-          </a:prstGeom>
-          <a:noFill/>
-        </p:spPr>
-        <p:txBody>
-          <a:bodyPr wrap="square" lIns="0" rIns="0" tIns="0" bIns="0">
-            <a:spAutoFit/>
-          </a:bodyPr>
-          <a:lstStyle/>
-          <a:p>
-            <a:pPr algn="l"/>
-            <a:r>
-              <a:rPr sz="850" b="0" i="0">
+            <a:off x="365760" y="6601968"/>
+            <a:ext cx="7315200" cy="228600"/>
+          </a:xfrm>
+          <a:prstGeom prst="rect">
+            <a:avLst/>
+          </a:prstGeom>
+          <a:noFill/>
+        </p:spPr>
+        <p:txBody>
+          <a:bodyPr wrap="square" lIns="0" rIns="0" tIns="0" bIns="0">
+            <a:spAutoFit/>
+          </a:bodyPr>
+          <a:lstStyle/>
+          <a:p>
+            <a:pPr algn="l"/>
+            <a:r>
+              <a:rPr sz="800" b="0" i="0">
                 <a:solidFill>
                   <a:srgbClr val="707070"/>
                 </a:solidFill>
@@ -15352,8 +15352,8 @@
         </p:nvSpPr>
         <p:spPr>
           <a:xfrm>
-            <a:off x="10515600" y="6537960"/>
-            <a:ext cx="1371600" cy="274320"/>
+            <a:off x="10515600" y="6601968"/>
+            <a:ext cx="1371600" cy="228600"/>
           </a:xfrm>
           <a:prstGeom prst="rect">
             <a:avLst/>
@@ -15368,7 +15368,7 @@
           <a:p>
             <a:pPr algn="r"/>
             <a:r>
-              <a:rPr sz="850" b="0" i="0">
+              <a:rPr sz="800" b="0" i="0">
                 <a:solidFill>
                   <a:srgbClr val="707070"/>
                 </a:solidFill>
@@ -16163,23 +16163,23 @@
         </p:nvSpPr>
         <p:spPr>
           <a:xfrm>
-            <a:off x="365760" y="6537960"/>
-            <a:ext cx="7315200" cy="274320"/>
-          </a:xfrm>
-          <a:prstGeom prst="rect">
-            <a:avLst/>
-          </a:prstGeom>
-          <a:noFill/>
-        </p:spPr>
-        <p:txBody>
-          <a:bodyPr wrap="square" lIns="0" rIns="0" tIns="0" bIns="0">
-            <a:spAutoFit/>
-          </a:bodyPr>
-          <a:lstStyle/>
-          <a:p>
-            <a:pPr algn="l"/>
-            <a:r>
-              <a:rPr sz="850" b="0" i="0">
+            <a:off x="365760" y="6601968"/>
+            <a:ext cx="7315200" cy="228600"/>
+          </a:xfrm>
+          <a:prstGeom prst="rect">
+            <a:avLst/>
+          </a:prstGeom>
+          <a:noFill/>
+        </p:spPr>
+        <p:txBody>
+          <a:bodyPr wrap="square" lIns="0" rIns="0" tIns="0" bIns="0">
+            <a:spAutoFit/>
+          </a:bodyPr>
+          <a:lstStyle/>
+          <a:p>
+            <a:pPr algn="l"/>
+            <a:r>
+              <a:rPr sz="800" b="0" i="0">
                 <a:solidFill>
                   <a:srgbClr val="707070"/>
                 </a:solidFill>
@@ -16198,8 +16198,8 @@
         </p:nvSpPr>
         <p:spPr>
           <a:xfrm>
-            <a:off x="10515600" y="6537960"/>
-            <a:ext cx="1371600" cy="274320"/>
+            <a:off x="10515600" y="6601968"/>
+            <a:ext cx="1371600" cy="228600"/>
           </a:xfrm>
           <a:prstGeom prst="rect">
             <a:avLst/>
@@ -16214,7 +16214,7 @@
           <a:p>
             <a:pPr algn="r"/>
             <a:r>
-              <a:rPr sz="850" b="0" i="0">
+              <a:rPr sz="800" b="0" i="0">
                 <a:solidFill>
                   <a:srgbClr val="707070"/>
                 </a:solidFill>
@@ -18074,23 +18074,23 @@
         </p:nvSpPr>
         <p:spPr>
           <a:xfrm>
-            <a:off x="365760" y="6537960"/>
-            <a:ext cx="7315200" cy="274320"/>
-          </a:xfrm>
-          <a:prstGeom prst="rect">
-            <a:avLst/>
-          </a:prstGeom>
-          <a:noFill/>
-        </p:spPr>
-        <p:txBody>
-          <a:bodyPr wrap="square" lIns="0" rIns="0" tIns="0" bIns="0">
-            <a:spAutoFit/>
-          </a:bodyPr>
-          <a:lstStyle/>
-          <a:p>
-            <a:pPr algn="l"/>
-            <a:r>
-              <a:rPr sz="850" b="0" i="0">
+            <a:off x="365760" y="6601968"/>
+            <a:ext cx="7315200" cy="228600"/>
+          </a:xfrm>
+          <a:prstGeom prst="rect">
+            <a:avLst/>
+          </a:prstGeom>
+          <a:noFill/>
+        </p:spPr>
+        <p:txBody>
+          <a:bodyPr wrap="square" lIns="0" rIns="0" tIns="0" bIns="0">
+            <a:spAutoFit/>
+          </a:bodyPr>
+          <a:lstStyle/>
+          <a:p>
+            <a:pPr algn="l"/>
+            <a:r>
+              <a:rPr sz="800" b="0" i="0">
                 <a:solidFill>
                   <a:srgbClr val="707070"/>
                 </a:solidFill>
@@ -18109,8 +18109,8 @@
         </p:nvSpPr>
         <p:spPr>
           <a:xfrm>
-            <a:off x="10515600" y="6537960"/>
-            <a:ext cx="1371600" cy="274320"/>
+            <a:off x="10515600" y="6601968"/>
+            <a:ext cx="1371600" cy="228600"/>
           </a:xfrm>
           <a:prstGeom prst="rect">
             <a:avLst/>
@@ -18125,7 +18125,7 @@
           <a:p>
             <a:pPr algn="r"/>
             <a:r>
-              <a:rPr sz="850" b="0" i="0">
+              <a:rPr sz="800" b="0" i="0">
                 <a:solidFill>
                   <a:srgbClr val="707070"/>
                 </a:solidFill>
@@ -18842,23 +18842,23 @@
         </p:nvSpPr>
         <p:spPr>
           <a:xfrm>
-            <a:off x="365760" y="6537960"/>
-            <a:ext cx="7315200" cy="274320"/>
-          </a:xfrm>
-          <a:prstGeom prst="rect">
-            <a:avLst/>
-          </a:prstGeom>
-          <a:noFill/>
-        </p:spPr>
-        <p:txBody>
-          <a:bodyPr wrap="square" lIns="0" rIns="0" tIns="0" bIns="0">
-            <a:spAutoFit/>
-          </a:bodyPr>
-          <a:lstStyle/>
-          <a:p>
-            <a:pPr algn="l"/>
-            <a:r>
-              <a:rPr sz="850" b="0" i="0">
+            <a:off x="365760" y="6601968"/>
+            <a:ext cx="7315200" cy="228600"/>
+          </a:xfrm>
+          <a:prstGeom prst="rect">
+            <a:avLst/>
+          </a:prstGeom>
+          <a:noFill/>
+        </p:spPr>
+        <p:txBody>
+          <a:bodyPr wrap="square" lIns="0" rIns="0" tIns="0" bIns="0">
+            <a:spAutoFit/>
+          </a:bodyPr>
+          <a:lstStyle/>
+          <a:p>
+            <a:pPr algn="l"/>
+            <a:r>
+              <a:rPr sz="800" b="0" i="0">
                 <a:solidFill>
                   <a:srgbClr val="707070"/>
                 </a:solidFill>
@@ -18877,8 +18877,8 @@
         </p:nvSpPr>
         <p:spPr>
           <a:xfrm>
-            <a:off x="10515600" y="6537960"/>
-            <a:ext cx="1371600" cy="274320"/>
+            <a:off x="10515600" y="6601968"/>
+            <a:ext cx="1371600" cy="228600"/>
           </a:xfrm>
           <a:prstGeom prst="rect">
             <a:avLst/>
@@ -18893,7 +18893,7 @@
           <a:p>
             <a:pPr algn="r"/>
             <a:r>
-              <a:rPr sz="850" b="0" i="0">
+              <a:rPr sz="800" b="0" i="0">
                 <a:solidFill>
                   <a:srgbClr val="707070"/>
                 </a:solidFill>
@@ -20981,23 +20981,23 @@
         </p:nvSpPr>
         <p:spPr>
           <a:xfrm>
-            <a:off x="365760" y="6537960"/>
-            <a:ext cx="7315200" cy="274320"/>
-          </a:xfrm>
-          <a:prstGeom prst="rect">
-            <a:avLst/>
-          </a:prstGeom>
-          <a:noFill/>
-        </p:spPr>
-        <p:txBody>
-          <a:bodyPr wrap="square" lIns="0" rIns="0" tIns="0" bIns="0">
-            <a:spAutoFit/>
-          </a:bodyPr>
-          <a:lstStyle/>
-          <a:p>
-            <a:pPr algn="l"/>
-            <a:r>
-              <a:rPr sz="850" b="0" i="0">
+            <a:off x="365760" y="6601968"/>
+            <a:ext cx="7315200" cy="228600"/>
+          </a:xfrm>
+          <a:prstGeom prst="rect">
+            <a:avLst/>
+          </a:prstGeom>
+          <a:noFill/>
+        </p:spPr>
+        <p:txBody>
+          <a:bodyPr wrap="square" lIns="0" rIns="0" tIns="0" bIns="0">
+            <a:spAutoFit/>
+          </a:bodyPr>
+          <a:lstStyle/>
+          <a:p>
+            <a:pPr algn="l"/>
+            <a:r>
+              <a:rPr sz="800" b="0" i="0">
                 <a:solidFill>
                   <a:srgbClr val="707070"/>
                 </a:solidFill>
@@ -21016,8 +21016,8 @@
         </p:nvSpPr>
         <p:spPr>
           <a:xfrm>
-            <a:off x="10515600" y="6537960"/>
-            <a:ext cx="1371600" cy="274320"/>
+            <a:off x="10515600" y="6601968"/>
+            <a:ext cx="1371600" cy="228600"/>
           </a:xfrm>
           <a:prstGeom prst="rect">
             <a:avLst/>
@@ -21032,7 +21032,7 @@
           <a:p>
             <a:pPr algn="r"/>
             <a:r>
-              <a:rPr sz="850" b="0" i="0">
+              <a:rPr sz="800" b="0" i="0">
                 <a:solidFill>
                   <a:srgbClr val="707070"/>
                 </a:solidFill>
@@ -22077,23 +22077,23 @@
         </p:nvSpPr>
         <p:spPr>
           <a:xfrm>
-            <a:off x="365760" y="6537960"/>
-            <a:ext cx="7315200" cy="274320"/>
-          </a:xfrm>
-          <a:prstGeom prst="rect">
-            <a:avLst/>
-          </a:prstGeom>
-          <a:noFill/>
-        </p:spPr>
-        <p:txBody>
-          <a:bodyPr wrap="square" lIns="0" rIns="0" tIns="0" bIns="0">
-            <a:spAutoFit/>
-          </a:bodyPr>
-          <a:lstStyle/>
-          <a:p>
-            <a:pPr algn="l"/>
-            <a:r>
-              <a:rPr sz="850" b="0" i="0">
+            <a:off x="365760" y="6601968"/>
+            <a:ext cx="7315200" cy="228600"/>
+          </a:xfrm>
+          <a:prstGeom prst="rect">
+            <a:avLst/>
+          </a:prstGeom>
+          <a:noFill/>
+        </p:spPr>
+        <p:txBody>
+          <a:bodyPr wrap="square" lIns="0" rIns="0" tIns="0" bIns="0">
+            <a:spAutoFit/>
+          </a:bodyPr>
+          <a:lstStyle/>
+          <a:p>
+            <a:pPr algn="l"/>
+            <a:r>
+              <a:rPr sz="800" b="0" i="0">
                 <a:solidFill>
                   <a:srgbClr val="707070"/>
                 </a:solidFill>
@@ -22112,8 +22112,8 @@
         </p:nvSpPr>
         <p:spPr>
           <a:xfrm>
-            <a:off x="10515600" y="6537960"/>
-            <a:ext cx="1371600" cy="274320"/>
+            <a:off x="10515600" y="6601968"/>
+            <a:ext cx="1371600" cy="228600"/>
           </a:xfrm>
           <a:prstGeom prst="rect">
             <a:avLst/>
@@ -22128,7 +22128,7 @@
           <a:p>
             <a:pPr algn="r"/>
             <a:r>
-              <a:rPr sz="850" b="0" i="0">
+              <a:rPr sz="800" b="0" i="0">
                 <a:solidFill>
                   <a:srgbClr val="707070"/>
                 </a:solidFill>
@@ -23769,23 +23769,23 @@
         </p:nvSpPr>
         <p:spPr>
           <a:xfrm>
-            <a:off x="365760" y="6537960"/>
-            <a:ext cx="7315200" cy="274320"/>
-          </a:xfrm>
-          <a:prstGeom prst="rect">
-            <a:avLst/>
-          </a:prstGeom>
-          <a:noFill/>
-        </p:spPr>
-        <p:txBody>
-          <a:bodyPr wrap="square" lIns="0" rIns="0" tIns="0" bIns="0">
-            <a:spAutoFit/>
-          </a:bodyPr>
-          <a:lstStyle/>
-          <a:p>
-            <a:pPr algn="l"/>
-            <a:r>
-              <a:rPr sz="850" b="0" i="0">
+            <a:off x="365760" y="6601968"/>
+            <a:ext cx="7315200" cy="228600"/>
+          </a:xfrm>
+          <a:prstGeom prst="rect">
+            <a:avLst/>
+          </a:prstGeom>
+          <a:noFill/>
+        </p:spPr>
+        <p:txBody>
+          <a:bodyPr wrap="square" lIns="0" rIns="0" tIns="0" bIns="0">
+            <a:spAutoFit/>
+          </a:bodyPr>
+          <a:lstStyle/>
+          <a:p>
+            <a:pPr algn="l"/>
+            <a:r>
+              <a:rPr sz="800" b="0" i="0">
                 <a:solidFill>
                   <a:srgbClr val="707070"/>
                 </a:solidFill>
@@ -23804,8 +23804,8 @@
         </p:nvSpPr>
         <p:spPr>
           <a:xfrm>
-            <a:off x="10515600" y="6537960"/>
-            <a:ext cx="1371600" cy="274320"/>
+            <a:off x="10515600" y="6601968"/>
+            <a:ext cx="1371600" cy="228600"/>
           </a:xfrm>
           <a:prstGeom prst="rect">
             <a:avLst/>
@@ -23820,7 +23820,7 @@
           <a:p>
             <a:pPr algn="r"/>
             <a:r>
-              <a:rPr sz="850" b="0" i="0">
+              <a:rPr sz="800" b="0" i="0">
                 <a:solidFill>
                   <a:srgbClr val="707070"/>
                 </a:solidFill>
@@ -26057,23 +26057,23 @@
         </p:nvSpPr>
         <p:spPr>
           <a:xfrm>
-            <a:off x="365760" y="6537960"/>
-            <a:ext cx="7315200" cy="274320"/>
-          </a:xfrm>
-          <a:prstGeom prst="rect">
-            <a:avLst/>
-          </a:prstGeom>
-          <a:noFill/>
-        </p:spPr>
-        <p:txBody>
-          <a:bodyPr wrap="square" lIns="0" rIns="0" tIns="0" bIns="0">
-            <a:spAutoFit/>
-          </a:bodyPr>
-          <a:lstStyle/>
-          <a:p>
-            <a:pPr algn="l"/>
-            <a:r>
-              <a:rPr sz="850" b="0" i="0">
+            <a:off x="365760" y="6601968"/>
+            <a:ext cx="7315200" cy="228600"/>
+          </a:xfrm>
+          <a:prstGeom prst="rect">
+            <a:avLst/>
+          </a:prstGeom>
+          <a:noFill/>
+        </p:spPr>
+        <p:txBody>
+          <a:bodyPr wrap="square" lIns="0" rIns="0" tIns="0" bIns="0">
+            <a:spAutoFit/>
+          </a:bodyPr>
+          <a:lstStyle/>
+          <a:p>
+            <a:pPr algn="l"/>
+            <a:r>
+              <a:rPr sz="800" b="0" i="0">
                 <a:solidFill>
                   <a:srgbClr val="707070"/>
                 </a:solidFill>
@@ -26092,8 +26092,8 @@
         </p:nvSpPr>
         <p:spPr>
           <a:xfrm>
-            <a:off x="10515600" y="6537960"/>
-            <a:ext cx="1371600" cy="274320"/>
+            <a:off x="10515600" y="6601968"/>
+            <a:ext cx="1371600" cy="228600"/>
           </a:xfrm>
           <a:prstGeom prst="rect">
             <a:avLst/>
@@ -26108,7 +26108,7 @@
           <a:p>
             <a:pPr algn="r"/>
             <a:r>
-              <a:rPr sz="850" b="0" i="0">
+              <a:rPr sz="800" b="0" i="0">
                 <a:solidFill>
                   <a:srgbClr val="707070"/>
                 </a:solidFill>
@@ -27992,23 +27992,23 @@
         </p:nvSpPr>
         <p:spPr>
           <a:xfrm>
-            <a:off x="365760" y="6537960"/>
-            <a:ext cx="7315200" cy="274320"/>
-          </a:xfrm>
-          <a:prstGeom prst="rect">
-            <a:avLst/>
-          </a:prstGeom>
-          <a:noFill/>
-        </p:spPr>
-        <p:txBody>
-          <a:bodyPr wrap="square" lIns="0" rIns="0" tIns="0" bIns="0">
-            <a:spAutoFit/>
-          </a:bodyPr>
-          <a:lstStyle/>
-          <a:p>
-            <a:pPr algn="l"/>
-            <a:r>
-              <a:rPr sz="850" b="0" i="0">
+            <a:off x="365760" y="6601968"/>
+            <a:ext cx="7315200" cy="228600"/>
+          </a:xfrm>
+          <a:prstGeom prst="rect">
+            <a:avLst/>
+          </a:prstGeom>
+          <a:noFill/>
+        </p:spPr>
+        <p:txBody>
+          <a:bodyPr wrap="square" lIns="0" rIns="0" tIns="0" bIns="0">
+            <a:spAutoFit/>
+          </a:bodyPr>
+          <a:lstStyle/>
+          <a:p>
+            <a:pPr algn="l"/>
+            <a:r>
+              <a:rPr sz="800" b="0" i="0">
                 <a:solidFill>
                   <a:srgbClr val="707070"/>
                 </a:solidFill>
@@ -28027,8 +28027,8 @@
         </p:nvSpPr>
         <p:spPr>
           <a:xfrm>
-            <a:off x="10515600" y="6537960"/>
-            <a:ext cx="1371600" cy="274320"/>
+            <a:off x="10515600" y="6601968"/>
+            <a:ext cx="1371600" cy="228600"/>
           </a:xfrm>
           <a:prstGeom prst="rect">
             <a:avLst/>
@@ -28043,7 +28043,7 @@
           <a:p>
             <a:pPr algn="r"/>
             <a:r>
-              <a:rPr sz="850" b="0" i="0">
+              <a:rPr sz="800" b="0" i="0">
                 <a:solidFill>
                   <a:srgbClr val="707070"/>
                 </a:solidFill>
@@ -28803,23 +28803,23 @@
         </p:nvSpPr>
         <p:spPr>
           <a:xfrm>
-            <a:off x="365760" y="6537960"/>
-            <a:ext cx="7315200" cy="274320"/>
-          </a:xfrm>
-          <a:prstGeom prst="rect">
-            <a:avLst/>
-          </a:prstGeom>
-          <a:noFill/>
-        </p:spPr>
-        <p:txBody>
-          <a:bodyPr wrap="square" lIns="0" rIns="0" tIns="0" bIns="0">
-            <a:spAutoFit/>
-          </a:bodyPr>
-          <a:lstStyle/>
-          <a:p>
-            <a:pPr algn="l"/>
-            <a:r>
-              <a:rPr sz="850" b="0" i="0">
+            <a:off x="365760" y="6601968"/>
+            <a:ext cx="7315200" cy="228600"/>
+          </a:xfrm>
+          <a:prstGeom prst="rect">
+            <a:avLst/>
+          </a:prstGeom>
+          <a:noFill/>
+        </p:spPr>
+        <p:txBody>
+          <a:bodyPr wrap="square" lIns="0" rIns="0" tIns="0" bIns="0">
+            <a:spAutoFit/>
+          </a:bodyPr>
+          <a:lstStyle/>
+          <a:p>
+            <a:pPr algn="l"/>
+            <a:r>
+              <a:rPr sz="800" b="0" i="0">
                 <a:solidFill>
                   <a:srgbClr val="707070"/>
                 </a:solidFill>
@@ -28838,8 +28838,8 @@
         </p:nvSpPr>
         <p:spPr>
           <a:xfrm>
-            <a:off x="10515600" y="6537960"/>
-            <a:ext cx="1371600" cy="274320"/>
+            <a:off x="10515600" y="6601968"/>
+            <a:ext cx="1371600" cy="228600"/>
           </a:xfrm>
           <a:prstGeom prst="rect">
             <a:avLst/>
@@ -28854,7 +28854,7 @@
           <a:p>
             <a:pPr algn="r"/>
             <a:r>
-              <a:rPr sz="850" b="0" i="0">
+              <a:rPr sz="800" b="0" i="0">
                 <a:solidFill>
                   <a:srgbClr val="707070"/>
                 </a:solidFill>
@@ -29460,23 +29460,23 @@
         </p:nvSpPr>
         <p:spPr>
           <a:xfrm>
-            <a:off x="365760" y="6537960"/>
-            <a:ext cx="7315200" cy="274320"/>
-          </a:xfrm>
-          <a:prstGeom prst="rect">
-            <a:avLst/>
-          </a:prstGeom>
-          <a:noFill/>
-        </p:spPr>
-        <p:txBody>
-          <a:bodyPr wrap="square" lIns="0" rIns="0" tIns="0" bIns="0">
-            <a:spAutoFit/>
-          </a:bodyPr>
-          <a:lstStyle/>
-          <a:p>
-            <a:pPr algn="l"/>
-            <a:r>
-              <a:rPr sz="850" b="0" i="0">
+            <a:off x="365760" y="6601968"/>
+            <a:ext cx="7315200" cy="228600"/>
+          </a:xfrm>
+          <a:prstGeom prst="rect">
+            <a:avLst/>
+          </a:prstGeom>
+          <a:noFill/>
+        </p:spPr>
+        <p:txBody>
+          <a:bodyPr wrap="square" lIns="0" rIns="0" tIns="0" bIns="0">
+            <a:spAutoFit/>
+          </a:bodyPr>
+          <a:lstStyle/>
+          <a:p>
+            <a:pPr algn="l"/>
+            <a:r>
+              <a:rPr sz="800" b="0" i="0">
                 <a:solidFill>
                   <a:srgbClr val="707070"/>
                 </a:solidFill>
@@ -29495,8 +29495,8 @@
         </p:nvSpPr>
         <p:spPr>
           <a:xfrm>
-            <a:off x="10515600" y="6537960"/>
-            <a:ext cx="1371600" cy="274320"/>
+            <a:off x="10515600" y="6601968"/>
+            <a:ext cx="1371600" cy="228600"/>
           </a:xfrm>
           <a:prstGeom prst="rect">
             <a:avLst/>
@@ -29511,7 +29511,7 @@
           <a:p>
             <a:pPr algn="r"/>
             <a:r>
-              <a:rPr sz="850" b="0" i="0">
+              <a:rPr sz="800" b="0" i="0">
                 <a:solidFill>
                   <a:srgbClr val="707070"/>
                 </a:solidFill>
@@ -30060,23 +30060,23 @@
         </p:nvSpPr>
         <p:spPr>
           <a:xfrm>
-            <a:off x="365760" y="6537960"/>
-            <a:ext cx="7315200" cy="274320"/>
-          </a:xfrm>
-          <a:prstGeom prst="rect">
-            <a:avLst/>
-          </a:prstGeom>
-          <a:noFill/>
-        </p:spPr>
-        <p:txBody>
-          <a:bodyPr wrap="square" lIns="0" rIns="0" tIns="0" bIns="0">
-            <a:spAutoFit/>
-          </a:bodyPr>
-          <a:lstStyle/>
-          <a:p>
-            <a:pPr algn="l"/>
-            <a:r>
-              <a:rPr sz="850" b="0" i="0">
+            <a:off x="365760" y="6601968"/>
+            <a:ext cx="7315200" cy="228600"/>
+          </a:xfrm>
+          <a:prstGeom prst="rect">
+            <a:avLst/>
+          </a:prstGeom>
+          <a:noFill/>
+        </p:spPr>
+        <p:txBody>
+          <a:bodyPr wrap="square" lIns="0" rIns="0" tIns="0" bIns="0">
+            <a:spAutoFit/>
+          </a:bodyPr>
+          <a:lstStyle/>
+          <a:p>
+            <a:pPr algn="l"/>
+            <a:r>
+              <a:rPr sz="800" b="0" i="0">
                 <a:solidFill>
                   <a:srgbClr val="707070"/>
                 </a:solidFill>
@@ -30095,8 +30095,8 @@
         </p:nvSpPr>
         <p:spPr>
           <a:xfrm>
-            <a:off x="10515600" y="6537960"/>
-            <a:ext cx="1371600" cy="274320"/>
+            <a:off x="10515600" y="6601968"/>
+            <a:ext cx="1371600" cy="228600"/>
           </a:xfrm>
           <a:prstGeom prst="rect">
             <a:avLst/>
@@ -30111,7 +30111,7 @@
           <a:p>
             <a:pPr algn="r"/>
             <a:r>
-              <a:rPr sz="850" b="0" i="0">
+              <a:rPr sz="800" b="0" i="0">
                 <a:solidFill>
                   <a:srgbClr val="707070"/>
                 </a:solidFill>
@@ -32694,23 +32694,23 @@
         </p:nvSpPr>
         <p:spPr>
           <a:xfrm>
-            <a:off x="365760" y="6537960"/>
-            <a:ext cx="7315200" cy="274320"/>
-          </a:xfrm>
-          <a:prstGeom prst="rect">
-            <a:avLst/>
-          </a:prstGeom>
-          <a:noFill/>
-        </p:spPr>
-        <p:txBody>
-          <a:bodyPr wrap="square" lIns="0" rIns="0" tIns="0" bIns="0">
-            <a:spAutoFit/>
-          </a:bodyPr>
-          <a:lstStyle/>
-          <a:p>
-            <a:pPr algn="l"/>
-            <a:r>
-              <a:rPr sz="850" b="0" i="0">
+            <a:off x="365760" y="6601968"/>
+            <a:ext cx="7315200" cy="228600"/>
+          </a:xfrm>
+          <a:prstGeom prst="rect">
+            <a:avLst/>
+          </a:prstGeom>
+          <a:noFill/>
+        </p:spPr>
+        <p:txBody>
+          <a:bodyPr wrap="square" lIns="0" rIns="0" tIns="0" bIns="0">
+            <a:spAutoFit/>
+          </a:bodyPr>
+          <a:lstStyle/>
+          <a:p>
+            <a:pPr algn="l"/>
+            <a:r>
+              <a:rPr sz="800" b="0" i="0">
                 <a:solidFill>
                   <a:srgbClr val="707070"/>
                 </a:solidFill>
@@ -32729,8 +32729,8 @@
         </p:nvSpPr>
         <p:spPr>
           <a:xfrm>
-            <a:off x="10515600" y="6537960"/>
-            <a:ext cx="1371600" cy="274320"/>
+            <a:off x="10515600" y="6601968"/>
+            <a:ext cx="1371600" cy="228600"/>
           </a:xfrm>
           <a:prstGeom prst="rect">
             <a:avLst/>
@@ -32745,7 +32745,7 @@
           <a:p>
             <a:pPr algn="r"/>
             <a:r>
-              <a:rPr sz="850" b="0" i="0">
+              <a:rPr sz="800" b="0" i="0">
                 <a:solidFill>
                   <a:srgbClr val="707070"/>
                 </a:solidFill>
@@ -35428,23 +35428,23 @@
         </p:nvSpPr>
         <p:spPr>
           <a:xfrm>
-            <a:off x="365760" y="6537960"/>
-            <a:ext cx="7315200" cy="274320"/>
-          </a:xfrm>
-          <a:prstGeom prst="rect">
-            <a:avLst/>
-          </a:prstGeom>
-          <a:noFill/>
-        </p:spPr>
-        <p:txBody>
-          <a:bodyPr wrap="square" lIns="0" rIns="0" tIns="0" bIns="0">
-            <a:spAutoFit/>
-          </a:bodyPr>
-          <a:lstStyle/>
-          <a:p>
-            <a:pPr algn="l"/>
-            <a:r>
-              <a:rPr sz="850" b="0" i="0">
+            <a:off x="365760" y="6601968"/>
+            <a:ext cx="7315200" cy="228600"/>
+          </a:xfrm>
+          <a:prstGeom prst="rect">
+            <a:avLst/>
+          </a:prstGeom>
+          <a:noFill/>
+        </p:spPr>
+        <p:txBody>
+          <a:bodyPr wrap="square" lIns="0" rIns="0" tIns="0" bIns="0">
+            <a:spAutoFit/>
+          </a:bodyPr>
+          <a:lstStyle/>
+          <a:p>
+            <a:pPr algn="l"/>
+            <a:r>
+              <a:rPr sz="800" b="0" i="0">
                 <a:solidFill>
                   <a:srgbClr val="707070"/>
                 </a:solidFill>
@@ -35463,8 +35463,8 @@
         </p:nvSpPr>
         <p:spPr>
           <a:xfrm>
-            <a:off x="10515600" y="6537960"/>
-            <a:ext cx="1371600" cy="274320"/>
+            <a:off x="10515600" y="6601968"/>
+            <a:ext cx="1371600" cy="228600"/>
           </a:xfrm>
           <a:prstGeom prst="rect">
             <a:avLst/>
@@ -35479,7 +35479,7 @@
           <a:p>
             <a:pPr algn="r"/>
             <a:r>
-              <a:rPr sz="850" b="0" i="0">
+              <a:rPr sz="800" b="0" i="0">
                 <a:solidFill>
                   <a:srgbClr val="707070"/>
                 </a:solidFill>
@@ -36958,23 +36958,23 @@
         </p:nvSpPr>
         <p:spPr>
           <a:xfrm>
-            <a:off x="365760" y="6537960"/>
-            <a:ext cx="7315200" cy="274320"/>
-          </a:xfrm>
-          <a:prstGeom prst="rect">
-            <a:avLst/>
-          </a:prstGeom>
-          <a:noFill/>
-        </p:spPr>
-        <p:txBody>
-          <a:bodyPr wrap="square" lIns="0" rIns="0" tIns="0" bIns="0">
-            <a:spAutoFit/>
-          </a:bodyPr>
-          <a:lstStyle/>
-          <a:p>
-            <a:pPr algn="l"/>
-            <a:r>
-              <a:rPr sz="850" b="0" i="0">
+            <a:off x="365760" y="6601968"/>
+            <a:ext cx="7315200" cy="228600"/>
+          </a:xfrm>
+          <a:prstGeom prst="rect">
+            <a:avLst/>
+          </a:prstGeom>
+          <a:noFill/>
+        </p:spPr>
+        <p:txBody>
+          <a:bodyPr wrap="square" lIns="0" rIns="0" tIns="0" bIns="0">
+            <a:spAutoFit/>
+          </a:bodyPr>
+          <a:lstStyle/>
+          <a:p>
+            <a:pPr algn="l"/>
+            <a:r>
+              <a:rPr sz="800" b="0" i="0">
                 <a:solidFill>
                   <a:srgbClr val="707070"/>
                 </a:solidFill>
@@ -36993,8 +36993,8 @@
         </p:nvSpPr>
         <p:spPr>
           <a:xfrm>
-            <a:off x="10515600" y="6537960"/>
-            <a:ext cx="1371600" cy="274320"/>
+            <a:off x="10515600" y="6601968"/>
+            <a:ext cx="1371600" cy="228600"/>
           </a:xfrm>
           <a:prstGeom prst="rect">
             <a:avLst/>
@@ -37009,7 +37009,7 @@
           <a:p>
             <a:pPr algn="r"/>
             <a:r>
-              <a:rPr sz="850" b="0" i="0">
+              <a:rPr sz="800" b="0" i="0">
                 <a:solidFill>
                   <a:srgbClr val="707070"/>
                 </a:solidFill>
@@ -38381,23 +38381,23 @@
         </p:nvSpPr>
         <p:spPr>
           <a:xfrm>
-            <a:off x="365760" y="6537960"/>
-            <a:ext cx="7315200" cy="274320"/>
-          </a:xfrm>
-          <a:prstGeom prst="rect">
-            <a:avLst/>
-          </a:prstGeom>
-          <a:noFill/>
-        </p:spPr>
-        <p:txBody>
-          <a:bodyPr wrap="square" lIns="0" rIns="0" tIns="0" bIns="0">
-            <a:spAutoFit/>
-          </a:bodyPr>
-          <a:lstStyle/>
-          <a:p>
-            <a:pPr algn="l"/>
-            <a:r>
-              <a:rPr sz="850" b="0" i="0">
+            <a:off x="365760" y="6601968"/>
+            <a:ext cx="7315200" cy="228600"/>
+          </a:xfrm>
+          <a:prstGeom prst="rect">
+            <a:avLst/>
+          </a:prstGeom>
+          <a:noFill/>
+        </p:spPr>
+        <p:txBody>
+          <a:bodyPr wrap="square" lIns="0" rIns="0" tIns="0" bIns="0">
+            <a:spAutoFit/>
+          </a:bodyPr>
+          <a:lstStyle/>
+          <a:p>
+            <a:pPr algn="l"/>
+            <a:r>
+              <a:rPr sz="800" b="0" i="0">
                 <a:solidFill>
                   <a:srgbClr val="707070"/>
                 </a:solidFill>
@@ -38416,8 +38416,8 @@
         </p:nvSpPr>
         <p:spPr>
           <a:xfrm>
-            <a:off x="10515600" y="6537960"/>
-            <a:ext cx="1371600" cy="274320"/>
+            <a:off x="10515600" y="6601968"/>
+            <a:ext cx="1371600" cy="228600"/>
           </a:xfrm>
           <a:prstGeom prst="rect">
             <a:avLst/>
@@ -38432,7 +38432,7 @@
           <a:p>
             <a:pPr algn="r"/>
             <a:r>
-              <a:rPr sz="850" b="0" i="0">
+              <a:rPr sz="800" b="0" i="0">
                 <a:solidFill>
                   <a:srgbClr val="707070"/>
                 </a:solidFill>

--- a/deck/Troy_K5_ELA_Executive_Summary.pptx
+++ b/deck/Troy_K5_ELA_Executive_Summary.pptx
@@ -3562,7 +3562,7 @@
         <p:spPr>
           <a:xfrm>
             <a:off x="274320" y="914400"/>
-            <a:ext cx="7772400" cy="2440806"/>
+            <a:ext cx="7772400" cy="4694121"/>
           </a:xfrm>
           <a:prstGeom prst="rect">
             <a:avLst/>

--- a/deck/Troy_K5_ELA_Executive_Summary.pptx
+++ b/deck/Troy_K5_ELA_Executive_Summary.pptx
@@ -3578,7 +3578,7 @@
         <p:spPr>
           <a:xfrm>
             <a:off x="8183879" y="914400"/>
-            <a:ext cx="3749039" cy="2880360"/>
+            <a:ext cx="3931920" cy="2880360"/>
           </a:xfrm>
           <a:prstGeom prst="rect">
             <a:avLst/>
@@ -4296,7 +4296,7 @@
         <p:spPr>
           <a:xfrm>
             <a:off x="8183879" y="3886200"/>
-            <a:ext cx="3749039" cy="2240280"/>
+            <a:ext cx="3931920" cy="2240280"/>
           </a:xfrm>
           <a:prstGeom prst="rect">
             <a:avLst/>
